--- a/static/ppts/G7_Sci_T3_Pressure.pptx
+++ b/static/ppts/G7_Sci_T3_Pressure.pptx
@@ -14,16 +14,12 @@
     <p:sldId id="262" r:id="rId8"/>
     <p:sldId id="263" r:id="rId9"/>
     <p:sldId id="264" r:id="rId10"/>
-    <p:sldId id="265" r:id="rId11"/>
-    <p:sldId id="266" r:id="rId12"/>
-    <p:sldId id="267" r:id="rId13"/>
-    <p:sldId id="268" r:id="rId14"/>
   </p:sldIdLst>
   <p:notesMasterIdLst>
-    <p:notesMasterId r:id="rId15"/>
+    <p:notesMasterId r:id="rId11"/>
   </p:notesMasterIdLst>
-  <p:sldSz cx="9144000" cy="5143500"/>
-  <p:notesSz cx="5143500" cy="9144000"/>
+  <p:sldSz cx="12192000" cy="6858000"/>
+  <p:notesSz cx="6858000" cy="12192000"/>
   <p:defaultTextStyle>
     <a:lvl1pPr marL="0" algn="l" defTabSz="914400" rtl="0" eaLnBrk="1" latinLnBrk="0" hangingPunct="1">
       <a:defRPr sz="1800" kern="1200">
@@ -556,358 +552,6 @@
 </p:notes>
 </file>
 
-<file path=ppt/notesSlides/notesSlide10.xml><?xml version="1.0" encoding="utf-8"?>
-<p:notes xmlns:a="http://schemas.openxmlformats.org/drawingml/2006/main" xmlns:r="http://schemas.openxmlformats.org/officeDocument/2006/relationships" xmlns:p="http://schemas.openxmlformats.org/presentationml/2006/main">
-  <p:cSld>
-    <p:spTree>
-      <p:nvGrpSpPr>
-        <p:cNvPr id="1" name=""/>
-        <p:cNvGrpSpPr/>
-        <p:nvPr/>
-      </p:nvGrpSpPr>
-      <p:grpSpPr>
-        <a:xfrm>
-          <a:off x="0" y="0"/>
-          <a:ext cx="0" cy="0"/>
-          <a:chOff x="0" y="0"/>
-          <a:chExt cx="0" cy="0"/>
-        </a:xfrm>
-      </p:grpSpPr>
-      <p:sp>
-        <p:nvSpPr>
-          <p:cNvPr id="2" name="Slide Image Placeholder 1"/>
-          <p:cNvSpPr>
-            <a:spLocks noGrp="1" noRot="1" noChangeAspect="1"/>
-          </p:cNvSpPr>
-          <p:nvPr>
-            <p:ph type="sldImg"/>
-          </p:nvPr>
-        </p:nvSpPr>
-        <p:spPr/>
-      </p:sp>
-      <p:sp>
-        <p:nvSpPr>
-          <p:cNvPr id="3" name="Notes Placeholder 2"/>
-          <p:cNvSpPr>
-            <a:spLocks noGrp="1"/>
-          </p:cNvSpPr>
-          <p:nvPr>
-            <p:ph type="body" idx="1"/>
-          </p:nvPr>
-        </p:nvSpPr>
-        <p:spPr/>
-        <p:txBody>
-          <a:bodyPr/>
-          <a:lstStyle/>
-          <a:p>
-            <a:r>
-              <a:rPr lang="en-US" dirty="0"/>
-              <a:t/>
-            </a:r>
-            <a:endParaRPr lang="en-US" dirty="0"/>
-          </a:p>
-        </p:txBody>
-      </p:sp>
-      <p:sp>
-        <p:nvSpPr>
-          <p:cNvPr id="4" name="Slide Number Placeholder 3"/>
-          <p:cNvSpPr>
-            <a:spLocks noGrp="1"/>
-          </p:cNvSpPr>
-          <p:nvPr>
-            <p:ph type="sldNum" sz="quarter" idx="10"/>
-          </p:nvPr>
-        </p:nvSpPr>
-        <p:spPr/>
-        <p:txBody>
-          <a:bodyPr/>
-          <a:lstStyle/>
-          <a:p>
-            <a:fld id="{F7021451-1387-4CA6-816F-3879F97B5CBC}" type="slidenum">
-              <a:rPr lang="en-US"/>
-              <a:t>10</a:t>
-            </a:fld>
-            <a:endParaRPr lang="en-US"/>
-          </a:p>
-        </p:txBody>
-      </p:sp>
-    </p:spTree>
-    <p:extLst>
-      <p:ext uri="{BB962C8B-B14F-4D97-AF65-F5344CB8AC3E}">
-        <p14:creationId xmlns:p14="http://schemas.microsoft.com/office/powerpoint/2010/main" val="1024086991"/>
-      </p:ext>
-    </p:extLst>
-  </p:cSld>
-  <p:clrMapOvr>
-    <a:masterClrMapping/>
-  </p:clrMapOvr>
-</p:notes>
-</file>
-
-<file path=ppt/notesSlides/notesSlide11.xml><?xml version="1.0" encoding="utf-8"?>
-<p:notes xmlns:a="http://schemas.openxmlformats.org/drawingml/2006/main" xmlns:r="http://schemas.openxmlformats.org/officeDocument/2006/relationships" xmlns:p="http://schemas.openxmlformats.org/presentationml/2006/main">
-  <p:cSld>
-    <p:spTree>
-      <p:nvGrpSpPr>
-        <p:cNvPr id="1" name=""/>
-        <p:cNvGrpSpPr/>
-        <p:nvPr/>
-      </p:nvGrpSpPr>
-      <p:grpSpPr>
-        <a:xfrm>
-          <a:off x="0" y="0"/>
-          <a:ext cx="0" cy="0"/>
-          <a:chOff x="0" y="0"/>
-          <a:chExt cx="0" cy="0"/>
-        </a:xfrm>
-      </p:grpSpPr>
-      <p:sp>
-        <p:nvSpPr>
-          <p:cNvPr id="2" name="Slide Image Placeholder 1"/>
-          <p:cNvSpPr>
-            <a:spLocks noGrp="1" noRot="1" noChangeAspect="1"/>
-          </p:cNvSpPr>
-          <p:nvPr>
-            <p:ph type="sldImg"/>
-          </p:nvPr>
-        </p:nvSpPr>
-        <p:spPr/>
-      </p:sp>
-      <p:sp>
-        <p:nvSpPr>
-          <p:cNvPr id="3" name="Notes Placeholder 2"/>
-          <p:cNvSpPr>
-            <a:spLocks noGrp="1"/>
-          </p:cNvSpPr>
-          <p:nvPr>
-            <p:ph type="body" idx="1"/>
-          </p:nvPr>
-        </p:nvSpPr>
-        <p:spPr/>
-        <p:txBody>
-          <a:bodyPr/>
-          <a:lstStyle/>
-          <a:p>
-            <a:r>
-              <a:rPr lang="en-US" dirty="0"/>
-              <a:t/>
-            </a:r>
-            <a:endParaRPr lang="en-US" dirty="0"/>
-          </a:p>
-        </p:txBody>
-      </p:sp>
-      <p:sp>
-        <p:nvSpPr>
-          <p:cNvPr id="4" name="Slide Number Placeholder 3"/>
-          <p:cNvSpPr>
-            <a:spLocks noGrp="1"/>
-          </p:cNvSpPr>
-          <p:nvPr>
-            <p:ph type="sldNum" sz="quarter" idx="10"/>
-          </p:nvPr>
-        </p:nvSpPr>
-        <p:spPr/>
-        <p:txBody>
-          <a:bodyPr/>
-          <a:lstStyle/>
-          <a:p>
-            <a:fld id="{F7021451-1387-4CA6-816F-3879F97B5CBC}" type="slidenum">
-              <a:rPr lang="en-US"/>
-              <a:t>11</a:t>
-            </a:fld>
-            <a:endParaRPr lang="en-US"/>
-          </a:p>
-        </p:txBody>
-      </p:sp>
-    </p:spTree>
-    <p:extLst>
-      <p:ext uri="{BB962C8B-B14F-4D97-AF65-F5344CB8AC3E}">
-        <p14:creationId xmlns:p14="http://schemas.microsoft.com/office/powerpoint/2010/main" val="1024086991"/>
-      </p:ext>
-    </p:extLst>
-  </p:cSld>
-  <p:clrMapOvr>
-    <a:masterClrMapping/>
-  </p:clrMapOvr>
-</p:notes>
-</file>
-
-<file path=ppt/notesSlides/notesSlide12.xml><?xml version="1.0" encoding="utf-8"?>
-<p:notes xmlns:a="http://schemas.openxmlformats.org/drawingml/2006/main" xmlns:r="http://schemas.openxmlformats.org/officeDocument/2006/relationships" xmlns:p="http://schemas.openxmlformats.org/presentationml/2006/main">
-  <p:cSld>
-    <p:spTree>
-      <p:nvGrpSpPr>
-        <p:cNvPr id="1" name=""/>
-        <p:cNvGrpSpPr/>
-        <p:nvPr/>
-      </p:nvGrpSpPr>
-      <p:grpSpPr>
-        <a:xfrm>
-          <a:off x="0" y="0"/>
-          <a:ext cx="0" cy="0"/>
-          <a:chOff x="0" y="0"/>
-          <a:chExt cx="0" cy="0"/>
-        </a:xfrm>
-      </p:grpSpPr>
-      <p:sp>
-        <p:nvSpPr>
-          <p:cNvPr id="2" name="Slide Image Placeholder 1"/>
-          <p:cNvSpPr>
-            <a:spLocks noGrp="1" noRot="1" noChangeAspect="1"/>
-          </p:cNvSpPr>
-          <p:nvPr>
-            <p:ph type="sldImg"/>
-          </p:nvPr>
-        </p:nvSpPr>
-        <p:spPr/>
-      </p:sp>
-      <p:sp>
-        <p:nvSpPr>
-          <p:cNvPr id="3" name="Notes Placeholder 2"/>
-          <p:cNvSpPr>
-            <a:spLocks noGrp="1"/>
-          </p:cNvSpPr>
-          <p:nvPr>
-            <p:ph type="body" idx="1"/>
-          </p:nvPr>
-        </p:nvSpPr>
-        <p:spPr/>
-        <p:txBody>
-          <a:bodyPr/>
-          <a:lstStyle/>
-          <a:p>
-            <a:r>
-              <a:rPr lang="en-US" dirty="0"/>
-              <a:t/>
-            </a:r>
-            <a:endParaRPr lang="en-US" dirty="0"/>
-          </a:p>
-        </p:txBody>
-      </p:sp>
-      <p:sp>
-        <p:nvSpPr>
-          <p:cNvPr id="4" name="Slide Number Placeholder 3"/>
-          <p:cNvSpPr>
-            <a:spLocks noGrp="1"/>
-          </p:cNvSpPr>
-          <p:nvPr>
-            <p:ph type="sldNum" sz="quarter" idx="10"/>
-          </p:nvPr>
-        </p:nvSpPr>
-        <p:spPr/>
-        <p:txBody>
-          <a:bodyPr/>
-          <a:lstStyle/>
-          <a:p>
-            <a:fld id="{F7021451-1387-4CA6-816F-3879F97B5CBC}" type="slidenum">
-              <a:rPr lang="en-US"/>
-              <a:t>12</a:t>
-            </a:fld>
-            <a:endParaRPr lang="en-US"/>
-          </a:p>
-        </p:txBody>
-      </p:sp>
-    </p:spTree>
-    <p:extLst>
-      <p:ext uri="{BB962C8B-B14F-4D97-AF65-F5344CB8AC3E}">
-        <p14:creationId xmlns:p14="http://schemas.microsoft.com/office/powerpoint/2010/main" val="1024086991"/>
-      </p:ext>
-    </p:extLst>
-  </p:cSld>
-  <p:clrMapOvr>
-    <a:masterClrMapping/>
-  </p:clrMapOvr>
-</p:notes>
-</file>
-
-<file path=ppt/notesSlides/notesSlide13.xml><?xml version="1.0" encoding="utf-8"?>
-<p:notes xmlns:a="http://schemas.openxmlformats.org/drawingml/2006/main" xmlns:r="http://schemas.openxmlformats.org/officeDocument/2006/relationships" xmlns:p="http://schemas.openxmlformats.org/presentationml/2006/main">
-  <p:cSld>
-    <p:spTree>
-      <p:nvGrpSpPr>
-        <p:cNvPr id="1" name=""/>
-        <p:cNvGrpSpPr/>
-        <p:nvPr/>
-      </p:nvGrpSpPr>
-      <p:grpSpPr>
-        <a:xfrm>
-          <a:off x="0" y="0"/>
-          <a:ext cx="0" cy="0"/>
-          <a:chOff x="0" y="0"/>
-          <a:chExt cx="0" cy="0"/>
-        </a:xfrm>
-      </p:grpSpPr>
-      <p:sp>
-        <p:nvSpPr>
-          <p:cNvPr id="2" name="Slide Image Placeholder 1"/>
-          <p:cNvSpPr>
-            <a:spLocks noGrp="1" noRot="1" noChangeAspect="1"/>
-          </p:cNvSpPr>
-          <p:nvPr>
-            <p:ph type="sldImg"/>
-          </p:nvPr>
-        </p:nvSpPr>
-        <p:spPr/>
-      </p:sp>
-      <p:sp>
-        <p:nvSpPr>
-          <p:cNvPr id="3" name="Notes Placeholder 2"/>
-          <p:cNvSpPr>
-            <a:spLocks noGrp="1"/>
-          </p:cNvSpPr>
-          <p:nvPr>
-            <p:ph type="body" idx="1"/>
-          </p:nvPr>
-        </p:nvSpPr>
-        <p:spPr/>
-        <p:txBody>
-          <a:bodyPr/>
-          <a:lstStyle/>
-          <a:p>
-            <a:r>
-              <a:rPr lang="en-US" dirty="0"/>
-              <a:t/>
-            </a:r>
-            <a:endParaRPr lang="en-US" dirty="0"/>
-          </a:p>
-        </p:txBody>
-      </p:sp>
-      <p:sp>
-        <p:nvSpPr>
-          <p:cNvPr id="4" name="Slide Number Placeholder 3"/>
-          <p:cNvSpPr>
-            <a:spLocks noGrp="1"/>
-          </p:cNvSpPr>
-          <p:nvPr>
-            <p:ph type="sldNum" sz="quarter" idx="10"/>
-          </p:nvPr>
-        </p:nvSpPr>
-        <p:spPr/>
-        <p:txBody>
-          <a:bodyPr/>
-          <a:lstStyle/>
-          <a:p>
-            <a:fld id="{F7021451-1387-4CA6-816F-3879F97B5CBC}" type="slidenum">
-              <a:rPr lang="en-US"/>
-              <a:t>13</a:t>
-            </a:fld>
-            <a:endParaRPr lang="en-US"/>
-          </a:p>
-        </p:txBody>
-      </p:sp>
-    </p:spTree>
-    <p:extLst>
-      <p:ext uri="{BB962C8B-B14F-4D97-AF65-F5344CB8AC3E}">
-        <p14:creationId xmlns:p14="http://schemas.microsoft.com/office/powerpoint/2010/main" val="1024086991"/>
-      </p:ext>
-    </p:extLst>
-  </p:cSld>
-  <p:clrMapOvr>
-    <a:masterClrMapping/>
-  </p:clrMapOvr>
-</p:notes>
-</file>
-
 <file path=ppt/notesSlides/notesSlide2.xml><?xml version="1.0" encoding="utf-8"?>
 <p:notes xmlns:a="http://schemas.openxmlformats.org/drawingml/2006/main" xmlns:r="http://schemas.openxmlformats.org/officeDocument/2006/relationships" xmlns:p="http://schemas.openxmlformats.org/presentationml/2006/main">
   <p:cSld>
@@ -1922,13 +1566,6 @@
 <file path=ppt/slides/slide1.xml><?xml version="1.0" encoding="utf-8"?>
 <p:sld xmlns:a="http://schemas.openxmlformats.org/drawingml/2006/main" xmlns:r="http://schemas.openxmlformats.org/officeDocument/2006/relationships" xmlns:p="http://schemas.openxmlformats.org/presentationml/2006/main">
   <p:cSld name="Slide 1">
-    <p:bg>
-      <p:bgPr>
-        <a:solidFill>
-          <a:srgbClr val="1B2A4A"/>
-        </a:solidFill>
-      </p:bgPr>
-    </p:bg>
     <p:spTree>
       <p:nvGrpSpPr>
         <p:cNvPr id="1" name=""/>
@@ -1951,8 +1588,28 @@
         </p:nvSpPr>
         <p:spPr>
           <a:xfrm>
-            <a:off x="0" y="4389120"/>
-            <a:ext cx="9144000" cy="54864"/>
+            <a:off x="0" y="0"/>
+            <a:ext cx="12188952" cy="6858000"/>
+          </a:xfrm>
+          <a:prstGeom prst="rect">
+            <a:avLst/>
+          </a:prstGeom>
+          <a:solidFill>
+            <a:srgbClr val="1B2A4A"/>
+          </a:solidFill>
+          <a:ln/>
+        </p:spPr>
+      </p:sp>
+      <p:sp>
+        <p:nvSpPr>
+          <p:cNvPr id="3" name="Shape 1"/>
+          <p:cNvSpPr/>
+          <p:nvPr/>
+        </p:nvSpPr>
+        <p:spPr>
+          <a:xfrm>
+            <a:off x="0" y="0"/>
+            <a:ext cx="137160" cy="6858000"/>
           </a:xfrm>
           <a:prstGeom prst="rect">
             <a:avLst/>
@@ -1965,18 +1622,18 @@
       </p:sp>
       <p:sp>
         <p:nvSpPr>
-          <p:cNvPr id="3" name="Shape 1"/>
-          <p:cNvSpPr/>
-          <p:nvPr/>
-        </p:nvSpPr>
-        <p:spPr>
-          <a:xfrm>
-            <a:off x="457200" y="365760"/>
-            <a:ext cx="1097280" cy="365760"/>
+          <p:cNvPr id="4" name="Shape 2"/>
+          <p:cNvSpPr/>
+          <p:nvPr/>
+        </p:nvSpPr>
+        <p:spPr>
+          <a:xfrm>
+            <a:off x="731520" y="731520"/>
+            <a:ext cx="2011680" cy="411480"/>
           </a:xfrm>
           <a:prstGeom prst="roundRect">
             <a:avLst>
-              <a:gd name="adj" fmla="val 25000"/>
+              <a:gd name="adj" fmla="val 33333"/>
             </a:avLst>
           </a:prstGeom>
           <a:solidFill>
@@ -1987,14 +1644,14 @@
       </p:sp>
       <p:sp>
         <p:nvSpPr>
-          <p:cNvPr id="4" name="Text 2"/>
-          <p:cNvSpPr/>
-          <p:nvPr/>
-        </p:nvSpPr>
-        <p:spPr>
-          <a:xfrm>
-            <a:off x="457200" y="365760"/>
-            <a:ext cx="1097280" cy="365760"/>
+          <p:cNvPr id="5" name="Text 3"/>
+          <p:cNvSpPr/>
+          <p:nvPr/>
+        </p:nvSpPr>
+        <p:spPr>
+          <a:xfrm>
+            <a:off x="731520" y="731520"/>
+            <a:ext cx="2011680" cy="411480"/>
           </a:xfrm>
           <a:prstGeom prst="rect">
             <a:avLst/>
@@ -2010,46 +1667,46 @@
               <a:buNone/>
             </a:pPr>
             <a:r>
-              <a:rPr lang="en-US" sz="1000" b="1" dirty="0">
+              <a:rPr lang="en-US" sz="1100" b="1" dirty="0">
                 <a:solidFill>
                   <a:srgbClr val="FFFFFF"/>
                 </a:solidFill>
-                <a:latin typeface="Calibri" pitchFamily="34" charset="0"/>
-                <a:ea typeface="Calibri" pitchFamily="34" charset="-122"/>
-                <a:cs typeface="Calibri" pitchFamily="34" charset="-120"/>
-              </a:rPr>
-              <a:t>MR ZOCCHI</a:t>
-            </a:r>
-            <a:endParaRPr lang="en-US" sz="1000" dirty="0"/>
-          </a:p>
-        </p:txBody>
-      </p:sp>
-      <p:sp>
-        <p:nvSpPr>
-          <p:cNvPr id="5" name="Text 3"/>
-          <p:cNvSpPr/>
-          <p:nvPr/>
-        </p:nvSpPr>
-        <p:spPr>
-          <a:xfrm>
-            <a:off x="457200" y="1371600"/>
-            <a:ext cx="8229600" cy="1828800"/>
-          </a:xfrm>
-          <a:prstGeom prst="rect">
-            <a:avLst/>
-          </a:prstGeom>
-          <a:noFill/>
-          <a:ln/>
-        </p:spPr>
-        <p:txBody>
-          <a:bodyPr wrap="square" rtlCol="0" anchor="t"/>
+                <a:latin typeface="Arial" pitchFamily="34" charset="0"/>
+                <a:ea typeface="Arial" pitchFamily="34" charset="-122"/>
+                <a:cs typeface="Arial" pitchFamily="34" charset="-120"/>
+              </a:rPr>
+              <a:t>GRADE 7 SCIENCE</a:t>
+            </a:r>
+            <a:endParaRPr lang="en-US" sz="1100" dirty="0"/>
+          </a:p>
+        </p:txBody>
+      </p:sp>
+      <p:sp>
+        <p:nvSpPr>
+          <p:cNvPr id="6" name="Text 4"/>
+          <p:cNvSpPr/>
+          <p:nvPr/>
+        </p:nvSpPr>
+        <p:spPr>
+          <a:xfrm>
+            <a:off x="731520" y="1828800"/>
+            <a:ext cx="10058400" cy="1371600"/>
+          </a:xfrm>
+          <a:prstGeom prst="rect">
+            <a:avLst/>
+          </a:prstGeom>
+          <a:noFill/>
+          <a:ln/>
+        </p:spPr>
+        <p:txBody>
+          <a:bodyPr wrap="square" rtlCol="0" anchor="ctr"/>
           <a:lstStyle/>
           <a:p>
             <a:pPr indent="0" marL="0">
               <a:buNone/>
             </a:pPr>
             <a:r>
-              <a:rPr lang="en-US" sz="3600" b="1" dirty="0">
+              <a:rPr lang="en-US" sz="4000" b="1" dirty="0">
                 <a:solidFill>
                   <a:srgbClr val="FFFFFF"/>
                 </a:solidFill>
@@ -2059,20 +1716,20 @@
               </a:rPr>
               <a:t>Pressure</a:t>
             </a:r>
-            <a:endParaRPr lang="en-US" sz="3600" dirty="0"/>
-          </a:p>
-        </p:txBody>
-      </p:sp>
-      <p:sp>
-        <p:nvSpPr>
-          <p:cNvPr id="6" name="Text 4"/>
-          <p:cNvSpPr/>
-          <p:nvPr/>
-        </p:nvSpPr>
-        <p:spPr>
-          <a:xfrm>
-            <a:off x="457200" y="3840480"/>
-            <a:ext cx="3657600" cy="457200"/>
+            <a:endParaRPr lang="en-US" sz="4000" dirty="0"/>
+          </a:p>
+        </p:txBody>
+      </p:sp>
+      <p:sp>
+        <p:nvSpPr>
+          <p:cNvPr id="7" name="Text 5"/>
+          <p:cNvSpPr/>
+          <p:nvPr/>
+        </p:nvSpPr>
+        <p:spPr>
+          <a:xfrm>
+            <a:off x="731520" y="3200400"/>
+            <a:ext cx="7315200" cy="457200"/>
           </a:xfrm>
           <a:prstGeom prst="rect">
             <a:avLst/>
@@ -2088,1065 +1745,95 @@
               <a:buNone/>
             </a:pPr>
             <a:r>
-              <a:rPr lang="en-US" sz="1400" i="1" dirty="0">
+              <a:rPr lang="en-US" sz="1600" dirty="0">
                 <a:solidFill>
                   <a:srgbClr val="E9C46A"/>
                 </a:solidFill>
-                <a:latin typeface="Calibri" pitchFamily="34" charset="0"/>
-                <a:ea typeface="Calibri" pitchFamily="34" charset="-122"/>
-                <a:cs typeface="Calibri" pitchFamily="34" charset="-120"/>
+                <a:latin typeface="Arial" pitchFamily="34" charset="0"/>
+                <a:ea typeface="Arial" pitchFamily="34" charset="-122"/>
+                <a:cs typeface="Arial" pitchFamily="34" charset="-120"/>
+              </a:rPr>
+              <a:t>Term 3 · Physics</a:t>
+            </a:r>
+            <a:endParaRPr lang="en-US" sz="1600" dirty="0"/>
+          </a:p>
+        </p:txBody>
+      </p:sp>
+      <p:sp>
+        <p:nvSpPr>
+          <p:cNvPr id="8" name="Text 6"/>
+          <p:cNvSpPr/>
+          <p:nvPr/>
+        </p:nvSpPr>
+        <p:spPr>
+          <a:xfrm>
+            <a:off x="731520" y="5669280"/>
+            <a:ext cx="2743200" cy="365760"/>
+          </a:xfrm>
+          <a:prstGeom prst="rect">
+            <a:avLst/>
+          </a:prstGeom>
+          <a:noFill/>
+          <a:ln/>
+        </p:spPr>
+        <p:txBody>
+          <a:bodyPr wrap="square" rtlCol="0" anchor="ctr"/>
+          <a:lstStyle/>
+          <a:p>
+            <a:pPr indent="0" marL="0">
+              <a:buNone/>
+            </a:pPr>
+            <a:r>
+              <a:rPr lang="en-US" sz="1400" b="1" dirty="0">
+                <a:solidFill>
+                  <a:srgbClr val="E9C46A"/>
+                </a:solidFill>
+                <a:latin typeface="Arial" pitchFamily="34" charset="0"/>
+                <a:ea typeface="Arial" pitchFamily="34" charset="-122"/>
+                <a:cs typeface="Arial" pitchFamily="34" charset="-120"/>
+              </a:rPr>
+              <a:t>MR ZOCCHI</a:t>
+            </a:r>
+            <a:endParaRPr lang="en-US" sz="1400" dirty="0"/>
+          </a:p>
+        </p:txBody>
+      </p:sp>
+      <p:sp>
+        <p:nvSpPr>
+          <p:cNvPr id="9" name="Text 7"/>
+          <p:cNvSpPr/>
+          <p:nvPr/>
+        </p:nvSpPr>
+        <p:spPr>
+          <a:xfrm>
+            <a:off x="731520" y="6035040"/>
+            <a:ext cx="2743200" cy="274320"/>
+          </a:xfrm>
+          <a:prstGeom prst="rect">
+            <a:avLst/>
+          </a:prstGeom>
+          <a:noFill/>
+          <a:ln/>
+        </p:spPr>
+        <p:txBody>
+          <a:bodyPr wrap="square" rtlCol="0" anchor="ctr"/>
+          <a:lstStyle/>
+          <a:p>
+            <a:pPr indent="0" marL="0">
+              <a:buNone/>
+            </a:pPr>
+            <a:r>
+              <a:rPr lang="en-US" sz="1100" dirty="0">
+                <a:solidFill>
+                  <a:srgbClr val="9B9690"/>
+                </a:solidFill>
+                <a:latin typeface="Arial" pitchFamily="34" charset="0"/>
+                <a:ea typeface="Arial" pitchFamily="34" charset="-122"/>
+                <a:cs typeface="Arial" pitchFamily="34" charset="-120"/>
               </a:rPr>
               <a:t>mrzocchi.com</a:t>
             </a:r>
-            <a:endParaRPr lang="en-US" sz="1400" dirty="0"/>
-          </a:p>
-        </p:txBody>
-      </p:sp>
-    </p:spTree>
-  </p:cSld>
-  <p:clrMapOvr>
-    <a:masterClrMapping/>
-  </p:clrMapOvr>
-</p:sld>
-</file>
-
-<file path=ppt/slides/slide10.xml><?xml version="1.0" encoding="utf-8"?>
-<p:sld xmlns:a="http://schemas.openxmlformats.org/drawingml/2006/main" xmlns:r="http://schemas.openxmlformats.org/officeDocument/2006/relationships" xmlns:p="http://schemas.openxmlformats.org/presentationml/2006/main">
-  <p:cSld name="Slide 10">
-    <p:spTree>
-      <p:nvGrpSpPr>
-        <p:cNvPr id="1" name=""/>
-        <p:cNvGrpSpPr/>
-        <p:nvPr/>
-      </p:nvGrpSpPr>
-      <p:grpSpPr>
-        <a:xfrm>
-          <a:off x="0" y="0"/>
-          <a:ext cx="0" cy="0"/>
-          <a:chOff x="0" y="0"/>
-          <a:chExt cx="0" cy="0"/>
-        </a:xfrm>
-      </p:grpSpPr>
-      <p:sp>
-        <p:nvSpPr>
-          <p:cNvPr id="2" name="Shape 0"/>
-          <p:cNvSpPr/>
-          <p:nvPr/>
-        </p:nvSpPr>
-        <p:spPr>
-          <a:xfrm>
-            <a:off x="0" y="0"/>
-            <a:ext cx="9144000" cy="54864"/>
-          </a:xfrm>
-          <a:prstGeom prst="rect">
-            <a:avLst/>
-          </a:prstGeom>
-          <a:solidFill>
-            <a:srgbClr val="C8372D"/>
-          </a:solidFill>
-          <a:ln/>
-        </p:spPr>
-      </p:sp>
-      <p:sp>
-        <p:nvSpPr>
-          <p:cNvPr id="3" name="Text 1"/>
-          <p:cNvSpPr/>
-          <p:nvPr/>
-        </p:nvSpPr>
-        <p:spPr>
-          <a:xfrm>
-            <a:off x="457200" y="228600"/>
-            <a:ext cx="8229600" cy="548640"/>
-          </a:xfrm>
-          <a:prstGeom prst="rect">
-            <a:avLst/>
-          </a:prstGeom>
-          <a:noFill/>
-          <a:ln/>
-        </p:spPr>
-        <p:txBody>
-          <a:bodyPr wrap="square" lIns="0" tIns="0" rIns="0" bIns="0" rtlCol="0" anchor="ctr"/>
-          <a:lstStyle/>
-          <a:p>
-            <a:pPr indent="0" marL="0">
-              <a:buNone/>
-            </a:pPr>
-            <a:r>
-              <a:rPr lang="en-US" sz="2400" b="1" dirty="0">
-                <a:solidFill>
-                  <a:srgbClr val="1B2A4A"/>
-                </a:solidFill>
-                <a:latin typeface="Georgia" pitchFamily="34" charset="0"/>
-                <a:ea typeface="Georgia" pitchFamily="34" charset="-122"/>
-                <a:cs typeface="Georgia" pitchFamily="34" charset="-120"/>
-              </a:rPr>
-              <a:t>Check Your Understanding</a:t>
-            </a:r>
-            <a:endParaRPr lang="en-US" sz="2400" dirty="0"/>
-          </a:p>
-        </p:txBody>
-      </p:sp>
-      <p:sp>
-        <p:nvSpPr>
-          <p:cNvPr id="4" name="Shape 2"/>
-          <p:cNvSpPr/>
-          <p:nvPr/>
-        </p:nvSpPr>
-        <p:spPr>
-          <a:xfrm>
-            <a:off x="457200" y="868680"/>
-            <a:ext cx="1828800" cy="27432"/>
-          </a:xfrm>
-          <a:prstGeom prst="rect">
-            <a:avLst/>
-          </a:prstGeom>
-          <a:solidFill>
-            <a:srgbClr val="C8372D"/>
-          </a:solidFill>
-          <a:ln/>
-        </p:spPr>
-      </p:sp>
-      <p:sp>
-        <p:nvSpPr>
-          <p:cNvPr id="5" name="Shape 3"/>
-          <p:cNvSpPr/>
-          <p:nvPr/>
-        </p:nvSpPr>
-        <p:spPr>
-          <a:xfrm>
-            <a:off x="457200" y="1188720"/>
-            <a:ext cx="8229600" cy="1371600"/>
-          </a:xfrm>
-          <a:prstGeom prst="roundRect">
-            <a:avLst>
-              <a:gd name="adj" fmla="val 10000"/>
-            </a:avLst>
-          </a:prstGeom>
-          <a:solidFill>
-            <a:srgbClr val="FAF8F5"/>
-          </a:solidFill>
-          <a:ln w="12700">
-            <a:solidFill>
-              <a:srgbClr val="E5E2DC"/>
-            </a:solidFill>
-            <a:prstDash val="solid"/>
-          </a:ln>
-        </p:spPr>
-      </p:sp>
-      <p:sp>
-        <p:nvSpPr>
-          <p:cNvPr id="6" name="Text 4"/>
-          <p:cNvSpPr/>
-          <p:nvPr/>
-        </p:nvSpPr>
-        <p:spPr>
-          <a:xfrm>
-            <a:off x="731520" y="1188720"/>
-            <a:ext cx="7680960" cy="1371600"/>
-          </a:xfrm>
-          <a:prstGeom prst="rect">
-            <a:avLst/>
-          </a:prstGeom>
-          <a:noFill/>
-          <a:ln/>
-        </p:spPr>
-        <p:txBody>
-          <a:bodyPr wrap="square" rtlCol="0" anchor="ctr"/>
-          <a:lstStyle/>
-          <a:p>
-            <a:pPr indent="0" marL="0">
-              <a:buNone/>
-            </a:pPr>
-            <a:r>
-              <a:rPr lang="en-US" sz="1800" b="1" dirty="0">
-                <a:solidFill>
-                  <a:srgbClr val="1B2A4A"/>
-                </a:solidFill>
-                <a:latin typeface="Georgia" pitchFamily="34" charset="0"/>
-                <a:ea typeface="Georgia" pitchFamily="34" charset="-122"/>
-                <a:cs typeface="Georgia" pitchFamily="34" charset="-120"/>
-              </a:rPr>
-              <a:t>❓  Name three types of force.</a:t>
-            </a:r>
-            <a:endParaRPr lang="en-US" sz="1800" dirty="0"/>
-          </a:p>
-        </p:txBody>
-      </p:sp>
-      <p:sp>
-        <p:nvSpPr>
-          <p:cNvPr id="7" name="Shape 5"/>
-          <p:cNvSpPr/>
-          <p:nvPr/>
-        </p:nvSpPr>
-        <p:spPr>
-          <a:xfrm>
-            <a:off x="457200" y="2926080"/>
-            <a:ext cx="8229600" cy="1463040"/>
-          </a:xfrm>
-          <a:prstGeom prst="roundRect">
-            <a:avLst>
-              <a:gd name="adj" fmla="val 9375"/>
-            </a:avLst>
-          </a:prstGeom>
-          <a:solidFill>
-            <a:srgbClr val="E8F5F3"/>
-          </a:solidFill>
-          <a:ln/>
-        </p:spPr>
-      </p:sp>
-      <p:sp>
-        <p:nvSpPr>
-          <p:cNvPr id="8" name="Shape 6"/>
-          <p:cNvSpPr/>
-          <p:nvPr/>
-        </p:nvSpPr>
-        <p:spPr>
-          <a:xfrm>
-            <a:off x="457200" y="2926080"/>
-            <a:ext cx="54864" cy="1463040"/>
-          </a:xfrm>
-          <a:prstGeom prst="rect">
-            <a:avLst/>
-          </a:prstGeom>
-          <a:solidFill>
-            <a:srgbClr val="C8372D"/>
-          </a:solidFill>
-          <a:ln/>
-        </p:spPr>
-      </p:sp>
-      <p:sp>
-        <p:nvSpPr>
-          <p:cNvPr id="9" name="Text 7"/>
-          <p:cNvSpPr/>
-          <p:nvPr/>
-        </p:nvSpPr>
-        <p:spPr>
-          <a:xfrm>
-            <a:off x="731520" y="2926080"/>
-            <a:ext cx="7680960" cy="1463040"/>
-          </a:xfrm>
-          <a:prstGeom prst="rect">
-            <a:avLst/>
-          </a:prstGeom>
-          <a:noFill/>
-          <a:ln/>
-        </p:spPr>
-        <p:txBody>
-          <a:bodyPr wrap="square" rtlCol="0" anchor="ctr"/>
-          <a:lstStyle/>
-          <a:p>
-            <a:pPr indent="0" marL="0">
-              <a:lnSpc>
-                <a:spcPct val="140000"/>
-              </a:lnSpc>
-              <a:buNone/>
-            </a:pPr>
-            <a:r>
-              <a:rPr lang="en-US" sz="1600" dirty="0">
-                <a:solidFill>
-                  <a:srgbClr val="3D3A36"/>
-                </a:solidFill>
-                <a:latin typeface="Calibri" pitchFamily="34" charset="0"/>
-                <a:ea typeface="Calibri" pitchFamily="34" charset="-122"/>
-                <a:cs typeface="Calibri" pitchFamily="34" charset="-120"/>
-              </a:rPr>
-              <a:t>Gravity, friction, air resistance, tension, normal (contact/reaction), magnetic, electrostatic.</a:t>
-            </a:r>
-            <a:endParaRPr lang="en-US" sz="1600" dirty="0"/>
-          </a:p>
-        </p:txBody>
-      </p:sp>
-      <p:sp>
-        <p:nvSpPr>
-          <p:cNvPr id="10" name="Text 8"/>
-          <p:cNvSpPr/>
-          <p:nvPr/>
-        </p:nvSpPr>
-        <p:spPr>
-          <a:xfrm>
-            <a:off x="7315200" y="4754880"/>
-            <a:ext cx="1828800" cy="274320"/>
-          </a:xfrm>
-          <a:prstGeom prst="rect">
-            <a:avLst/>
-          </a:prstGeom>
-          <a:noFill/>
-          <a:ln/>
-        </p:spPr>
-        <p:txBody>
-          <a:bodyPr wrap="square" rtlCol="0" anchor="ctr"/>
-          <a:lstStyle/>
-          <a:p>
-            <a:pPr algn="r" indent="0" marL="0">
-              <a:buNone/>
-            </a:pPr>
-            <a:r>
-              <a:rPr lang="en-US" sz="900" dirty="0">
-                <a:solidFill>
-                  <a:srgbClr val="9B9690"/>
-                </a:solidFill>
-                <a:latin typeface="Calibri" pitchFamily="34" charset="0"/>
-                <a:ea typeface="Calibri" pitchFamily="34" charset="-122"/>
-                <a:cs typeface="Calibri" pitchFamily="34" charset="-120"/>
-              </a:rPr>
-              <a:t>mrzocchi.com</a:t>
-            </a:r>
-            <a:endParaRPr lang="en-US" sz="900" dirty="0"/>
-          </a:p>
-        </p:txBody>
-      </p:sp>
-    </p:spTree>
-  </p:cSld>
-  <p:clrMapOvr>
-    <a:masterClrMapping/>
-  </p:clrMapOvr>
-</p:sld>
-</file>
-
-<file path=ppt/slides/slide11.xml><?xml version="1.0" encoding="utf-8"?>
-<p:sld xmlns:a="http://schemas.openxmlformats.org/drawingml/2006/main" xmlns:r="http://schemas.openxmlformats.org/officeDocument/2006/relationships" xmlns:p="http://schemas.openxmlformats.org/presentationml/2006/main">
-  <p:cSld name="Slide 11">
-    <p:spTree>
-      <p:nvGrpSpPr>
-        <p:cNvPr id="1" name=""/>
-        <p:cNvGrpSpPr/>
-        <p:nvPr/>
-      </p:nvGrpSpPr>
-      <p:grpSpPr>
-        <a:xfrm>
-          <a:off x="0" y="0"/>
-          <a:ext cx="0" cy="0"/>
-          <a:chOff x="0" y="0"/>
-          <a:chExt cx="0" cy="0"/>
-        </a:xfrm>
-      </p:grpSpPr>
-      <p:sp>
-        <p:nvSpPr>
-          <p:cNvPr id="2" name="Shape 0"/>
-          <p:cNvSpPr/>
-          <p:nvPr/>
-        </p:nvSpPr>
-        <p:spPr>
-          <a:xfrm>
-            <a:off x="0" y="0"/>
-            <a:ext cx="9144000" cy="54864"/>
-          </a:xfrm>
-          <a:prstGeom prst="rect">
-            <a:avLst/>
-          </a:prstGeom>
-          <a:solidFill>
-            <a:srgbClr val="C8372D"/>
-          </a:solidFill>
-          <a:ln/>
-        </p:spPr>
-      </p:sp>
-      <p:sp>
-        <p:nvSpPr>
-          <p:cNvPr id="3" name="Text 1"/>
-          <p:cNvSpPr/>
-          <p:nvPr/>
-        </p:nvSpPr>
-        <p:spPr>
-          <a:xfrm>
-            <a:off x="457200" y="228600"/>
-            <a:ext cx="8229600" cy="548640"/>
-          </a:xfrm>
-          <a:prstGeom prst="rect">
-            <a:avLst/>
-          </a:prstGeom>
-          <a:noFill/>
-          <a:ln/>
-        </p:spPr>
-        <p:txBody>
-          <a:bodyPr wrap="square" lIns="0" tIns="0" rIns="0" bIns="0" rtlCol="0" anchor="ctr"/>
-          <a:lstStyle/>
-          <a:p>
-            <a:pPr indent="0" marL="0">
-              <a:buNone/>
-            </a:pPr>
-            <a:r>
-              <a:rPr lang="en-US" sz="2400" b="1" dirty="0">
-                <a:solidFill>
-                  <a:srgbClr val="1B2A4A"/>
-                </a:solidFill>
-                <a:latin typeface="Georgia" pitchFamily="34" charset="0"/>
-                <a:ea typeface="Georgia" pitchFamily="34" charset="-122"/>
-                <a:cs typeface="Georgia" pitchFamily="34" charset="-120"/>
-              </a:rPr>
-              <a:t>Check Your Understanding</a:t>
-            </a:r>
-            <a:endParaRPr lang="en-US" sz="2400" dirty="0"/>
-          </a:p>
-        </p:txBody>
-      </p:sp>
-      <p:sp>
-        <p:nvSpPr>
-          <p:cNvPr id="4" name="Shape 2"/>
-          <p:cNvSpPr/>
-          <p:nvPr/>
-        </p:nvSpPr>
-        <p:spPr>
-          <a:xfrm>
-            <a:off x="457200" y="868680"/>
-            <a:ext cx="1828800" cy="27432"/>
-          </a:xfrm>
-          <a:prstGeom prst="rect">
-            <a:avLst/>
-          </a:prstGeom>
-          <a:solidFill>
-            <a:srgbClr val="C8372D"/>
-          </a:solidFill>
-          <a:ln/>
-        </p:spPr>
-      </p:sp>
-      <p:sp>
-        <p:nvSpPr>
-          <p:cNvPr id="5" name="Shape 3"/>
-          <p:cNvSpPr/>
-          <p:nvPr/>
-        </p:nvSpPr>
-        <p:spPr>
-          <a:xfrm>
-            <a:off x="457200" y="1188720"/>
-            <a:ext cx="8229600" cy="1371600"/>
-          </a:xfrm>
-          <a:prstGeom prst="roundRect">
-            <a:avLst>
-              <a:gd name="adj" fmla="val 10000"/>
-            </a:avLst>
-          </a:prstGeom>
-          <a:solidFill>
-            <a:srgbClr val="FAF8F5"/>
-          </a:solidFill>
-          <a:ln w="12700">
-            <a:solidFill>
-              <a:srgbClr val="E5E2DC"/>
-            </a:solidFill>
-            <a:prstDash val="solid"/>
-          </a:ln>
-        </p:spPr>
-      </p:sp>
-      <p:sp>
-        <p:nvSpPr>
-          <p:cNvPr id="6" name="Text 4"/>
-          <p:cNvSpPr/>
-          <p:nvPr/>
-        </p:nvSpPr>
-        <p:spPr>
-          <a:xfrm>
-            <a:off x="731520" y="1188720"/>
-            <a:ext cx="7680960" cy="1371600"/>
-          </a:xfrm>
-          <a:prstGeom prst="rect">
-            <a:avLst/>
-          </a:prstGeom>
-          <a:noFill/>
-          <a:ln/>
-        </p:spPr>
-        <p:txBody>
-          <a:bodyPr wrap="square" rtlCol="0" anchor="ctr"/>
-          <a:lstStyle/>
-          <a:p>
-            <a:pPr indent="0" marL="0">
-              <a:buNone/>
-            </a:pPr>
-            <a:r>
-              <a:rPr lang="en-US" sz="1800" b="1" dirty="0">
-                <a:solidFill>
-                  <a:srgbClr val="1B2A4A"/>
-                </a:solidFill>
-                <a:latin typeface="Georgia" pitchFamily="34" charset="0"/>
-                <a:ea typeface="Georgia" pitchFamily="34" charset="-122"/>
-                <a:cs typeface="Georgia" pitchFamily="34" charset="-120"/>
-              </a:rPr>
-              <a:t>❓  What happens when forces are balanced?</a:t>
-            </a:r>
-            <a:endParaRPr lang="en-US" sz="1800" dirty="0"/>
-          </a:p>
-        </p:txBody>
-      </p:sp>
-      <p:sp>
-        <p:nvSpPr>
-          <p:cNvPr id="7" name="Shape 5"/>
-          <p:cNvSpPr/>
-          <p:nvPr/>
-        </p:nvSpPr>
-        <p:spPr>
-          <a:xfrm>
-            <a:off x="457200" y="2926080"/>
-            <a:ext cx="8229600" cy="1463040"/>
-          </a:xfrm>
-          <a:prstGeom prst="roundRect">
-            <a:avLst>
-              <a:gd name="adj" fmla="val 9375"/>
-            </a:avLst>
-          </a:prstGeom>
-          <a:solidFill>
-            <a:srgbClr val="E8F5F3"/>
-          </a:solidFill>
-          <a:ln/>
-        </p:spPr>
-      </p:sp>
-      <p:sp>
-        <p:nvSpPr>
-          <p:cNvPr id="8" name="Shape 6"/>
-          <p:cNvSpPr/>
-          <p:nvPr/>
-        </p:nvSpPr>
-        <p:spPr>
-          <a:xfrm>
-            <a:off x="457200" y="2926080"/>
-            <a:ext cx="54864" cy="1463040"/>
-          </a:xfrm>
-          <a:prstGeom prst="rect">
-            <a:avLst/>
-          </a:prstGeom>
-          <a:solidFill>
-            <a:srgbClr val="C8372D"/>
-          </a:solidFill>
-          <a:ln/>
-        </p:spPr>
-      </p:sp>
-      <p:sp>
-        <p:nvSpPr>
-          <p:cNvPr id="9" name="Text 7"/>
-          <p:cNvSpPr/>
-          <p:nvPr/>
-        </p:nvSpPr>
-        <p:spPr>
-          <a:xfrm>
-            <a:off x="731520" y="2926080"/>
-            <a:ext cx="7680960" cy="1463040"/>
-          </a:xfrm>
-          <a:prstGeom prst="rect">
-            <a:avLst/>
-          </a:prstGeom>
-          <a:noFill/>
-          <a:ln/>
-        </p:spPr>
-        <p:txBody>
-          <a:bodyPr wrap="square" rtlCol="0" anchor="ctr"/>
-          <a:lstStyle/>
-          <a:p>
-            <a:pPr indent="0" marL="0">
-              <a:lnSpc>
-                <a:spcPct val="140000"/>
-              </a:lnSpc>
-              <a:buNone/>
-            </a:pPr>
-            <a:r>
-              <a:rPr lang="en-US" sz="1600" dirty="0">
-                <a:solidFill>
-                  <a:srgbClr val="3D3A36"/>
-                </a:solidFill>
-                <a:latin typeface="Calibri" pitchFamily="34" charset="0"/>
-                <a:ea typeface="Calibri" pitchFamily="34" charset="-122"/>
-                <a:cs typeface="Calibri" pitchFamily="34" charset="-120"/>
-              </a:rPr>
-              <a:t>Resultant force = 0. The object stays still or continues at constant speed (Newton's 1st Law).</a:t>
-            </a:r>
-            <a:endParaRPr lang="en-US" sz="1600" dirty="0"/>
-          </a:p>
-        </p:txBody>
-      </p:sp>
-      <p:sp>
-        <p:nvSpPr>
-          <p:cNvPr id="10" name="Text 8"/>
-          <p:cNvSpPr/>
-          <p:nvPr/>
-        </p:nvSpPr>
-        <p:spPr>
-          <a:xfrm>
-            <a:off x="7315200" y="4754880"/>
-            <a:ext cx="1828800" cy="274320"/>
-          </a:xfrm>
-          <a:prstGeom prst="rect">
-            <a:avLst/>
-          </a:prstGeom>
-          <a:noFill/>
-          <a:ln/>
-        </p:spPr>
-        <p:txBody>
-          <a:bodyPr wrap="square" rtlCol="0" anchor="ctr"/>
-          <a:lstStyle/>
-          <a:p>
-            <a:pPr algn="r" indent="0" marL="0">
-              <a:buNone/>
-            </a:pPr>
-            <a:r>
-              <a:rPr lang="en-US" sz="900" dirty="0">
-                <a:solidFill>
-                  <a:srgbClr val="9B9690"/>
-                </a:solidFill>
-                <a:latin typeface="Calibri" pitchFamily="34" charset="0"/>
-                <a:ea typeface="Calibri" pitchFamily="34" charset="-122"/>
-                <a:cs typeface="Calibri" pitchFamily="34" charset="-120"/>
-              </a:rPr>
-              <a:t>mrzocchi.com</a:t>
-            </a:r>
-            <a:endParaRPr lang="en-US" sz="900" dirty="0"/>
-          </a:p>
-        </p:txBody>
-      </p:sp>
-    </p:spTree>
-  </p:cSld>
-  <p:clrMapOvr>
-    <a:masterClrMapping/>
-  </p:clrMapOvr>
-</p:sld>
-</file>
-
-<file path=ppt/slides/slide12.xml><?xml version="1.0" encoding="utf-8"?>
-<p:sld xmlns:a="http://schemas.openxmlformats.org/drawingml/2006/main" xmlns:r="http://schemas.openxmlformats.org/officeDocument/2006/relationships" xmlns:p="http://schemas.openxmlformats.org/presentationml/2006/main">
-  <p:cSld name="Slide 12">
-    <p:spTree>
-      <p:nvGrpSpPr>
-        <p:cNvPr id="1" name=""/>
-        <p:cNvGrpSpPr/>
-        <p:nvPr/>
-      </p:nvGrpSpPr>
-      <p:grpSpPr>
-        <a:xfrm>
-          <a:off x="0" y="0"/>
-          <a:ext cx="0" cy="0"/>
-          <a:chOff x="0" y="0"/>
-          <a:chExt cx="0" cy="0"/>
-        </a:xfrm>
-      </p:grpSpPr>
-      <p:sp>
-        <p:nvSpPr>
-          <p:cNvPr id="2" name="Shape 0"/>
-          <p:cNvSpPr/>
-          <p:nvPr/>
-        </p:nvSpPr>
-        <p:spPr>
-          <a:xfrm>
-            <a:off x="0" y="0"/>
-            <a:ext cx="9144000" cy="54864"/>
-          </a:xfrm>
-          <a:prstGeom prst="rect">
-            <a:avLst/>
-          </a:prstGeom>
-          <a:solidFill>
-            <a:srgbClr val="C8372D"/>
-          </a:solidFill>
-          <a:ln/>
-        </p:spPr>
-      </p:sp>
-      <p:sp>
-        <p:nvSpPr>
-          <p:cNvPr id="3" name="Text 1"/>
-          <p:cNvSpPr/>
-          <p:nvPr/>
-        </p:nvSpPr>
-        <p:spPr>
-          <a:xfrm>
-            <a:off x="457200" y="228600"/>
-            <a:ext cx="8229600" cy="548640"/>
-          </a:xfrm>
-          <a:prstGeom prst="rect">
-            <a:avLst/>
-          </a:prstGeom>
-          <a:noFill/>
-          <a:ln/>
-        </p:spPr>
-        <p:txBody>
-          <a:bodyPr wrap="square" lIns="0" tIns="0" rIns="0" bIns="0" rtlCol="0" anchor="ctr"/>
-          <a:lstStyle/>
-          <a:p>
-            <a:pPr indent="0" marL="0">
-              <a:buNone/>
-            </a:pPr>
-            <a:r>
-              <a:rPr lang="en-US" sz="2400" b="1" dirty="0">
-                <a:solidFill>
-                  <a:srgbClr val="1B2A4A"/>
-                </a:solidFill>
-                <a:latin typeface="Georgia" pitchFamily="34" charset="0"/>
-                <a:ea typeface="Georgia" pitchFamily="34" charset="-122"/>
-                <a:cs typeface="Georgia" pitchFamily="34" charset="-120"/>
-              </a:rPr>
-              <a:t>Check Your Understanding</a:t>
-            </a:r>
-            <a:endParaRPr lang="en-US" sz="2400" dirty="0"/>
-          </a:p>
-        </p:txBody>
-      </p:sp>
-      <p:sp>
-        <p:nvSpPr>
-          <p:cNvPr id="4" name="Shape 2"/>
-          <p:cNvSpPr/>
-          <p:nvPr/>
-        </p:nvSpPr>
-        <p:spPr>
-          <a:xfrm>
-            <a:off x="457200" y="868680"/>
-            <a:ext cx="1828800" cy="27432"/>
-          </a:xfrm>
-          <a:prstGeom prst="rect">
-            <a:avLst/>
-          </a:prstGeom>
-          <a:solidFill>
-            <a:srgbClr val="C8372D"/>
-          </a:solidFill>
-          <a:ln/>
-        </p:spPr>
-      </p:sp>
-      <p:sp>
-        <p:nvSpPr>
-          <p:cNvPr id="5" name="Shape 3"/>
-          <p:cNvSpPr/>
-          <p:nvPr/>
-        </p:nvSpPr>
-        <p:spPr>
-          <a:xfrm>
-            <a:off x="457200" y="1188720"/>
-            <a:ext cx="8229600" cy="1371600"/>
-          </a:xfrm>
-          <a:prstGeom prst="roundRect">
-            <a:avLst>
-              <a:gd name="adj" fmla="val 10000"/>
-            </a:avLst>
-          </a:prstGeom>
-          <a:solidFill>
-            <a:srgbClr val="FAF8F5"/>
-          </a:solidFill>
-          <a:ln w="12700">
-            <a:solidFill>
-              <a:srgbClr val="E5E2DC"/>
-            </a:solidFill>
-            <a:prstDash val="solid"/>
-          </a:ln>
-        </p:spPr>
-      </p:sp>
-      <p:sp>
-        <p:nvSpPr>
-          <p:cNvPr id="6" name="Text 4"/>
-          <p:cNvSpPr/>
-          <p:nvPr/>
-        </p:nvSpPr>
-        <p:spPr>
-          <a:xfrm>
-            <a:off x="731520" y="1188720"/>
-            <a:ext cx="7680960" cy="1371600"/>
-          </a:xfrm>
-          <a:prstGeom prst="rect">
-            <a:avLst/>
-          </a:prstGeom>
-          <a:noFill/>
-          <a:ln/>
-        </p:spPr>
-        <p:txBody>
-          <a:bodyPr wrap="square" rtlCol="0" anchor="ctr"/>
-          <a:lstStyle/>
-          <a:p>
-            <a:pPr indent="0" marL="0">
-              <a:buNone/>
-            </a:pPr>
-            <a:r>
-              <a:rPr lang="en-US" sz="1800" b="1" dirty="0">
-                <a:solidFill>
-                  <a:srgbClr val="1B2A4A"/>
-                </a:solidFill>
-                <a:latin typeface="Georgia" pitchFamily="34" charset="0"/>
-                <a:ea typeface="Georgia" pitchFamily="34" charset="-122"/>
-                <a:cs typeface="Georgia" pitchFamily="34" charset="-120"/>
-              </a:rPr>
-              <a:t>❓  A car has 5000N driving force and 3000N friction. What is the resultant force?</a:t>
-            </a:r>
-            <a:endParaRPr lang="en-US" sz="1800" dirty="0"/>
-          </a:p>
-        </p:txBody>
-      </p:sp>
-      <p:sp>
-        <p:nvSpPr>
-          <p:cNvPr id="7" name="Shape 5"/>
-          <p:cNvSpPr/>
-          <p:nvPr/>
-        </p:nvSpPr>
-        <p:spPr>
-          <a:xfrm>
-            <a:off x="457200" y="2926080"/>
-            <a:ext cx="8229600" cy="1463040"/>
-          </a:xfrm>
-          <a:prstGeom prst="roundRect">
-            <a:avLst>
-              <a:gd name="adj" fmla="val 9375"/>
-            </a:avLst>
-          </a:prstGeom>
-          <a:solidFill>
-            <a:srgbClr val="E8F5F3"/>
-          </a:solidFill>
-          <a:ln/>
-        </p:spPr>
-      </p:sp>
-      <p:sp>
-        <p:nvSpPr>
-          <p:cNvPr id="8" name="Shape 6"/>
-          <p:cNvSpPr/>
-          <p:nvPr/>
-        </p:nvSpPr>
-        <p:spPr>
-          <a:xfrm>
-            <a:off x="457200" y="2926080"/>
-            <a:ext cx="54864" cy="1463040"/>
-          </a:xfrm>
-          <a:prstGeom prst="rect">
-            <a:avLst/>
-          </a:prstGeom>
-          <a:solidFill>
-            <a:srgbClr val="C8372D"/>
-          </a:solidFill>
-          <a:ln/>
-        </p:spPr>
-      </p:sp>
-      <p:sp>
-        <p:nvSpPr>
-          <p:cNvPr id="9" name="Text 7"/>
-          <p:cNvSpPr/>
-          <p:nvPr/>
-        </p:nvSpPr>
-        <p:spPr>
-          <a:xfrm>
-            <a:off x="731520" y="2926080"/>
-            <a:ext cx="7680960" cy="1463040"/>
-          </a:xfrm>
-          <a:prstGeom prst="rect">
-            <a:avLst/>
-          </a:prstGeom>
-          <a:noFill/>
-          <a:ln/>
-        </p:spPr>
-        <p:txBody>
-          <a:bodyPr wrap="square" rtlCol="0" anchor="ctr"/>
-          <a:lstStyle/>
-          <a:p>
-            <a:pPr indent="0" marL="0">
-              <a:lnSpc>
-                <a:spcPct val="140000"/>
-              </a:lnSpc>
-              <a:buNone/>
-            </a:pPr>
-            <a:r>
-              <a:rPr lang="en-US" sz="1600" dirty="0">
-                <a:solidFill>
-                  <a:srgbClr val="3D3A36"/>
-                </a:solidFill>
-                <a:latin typeface="Calibri" pitchFamily="34" charset="0"/>
-                <a:ea typeface="Calibri" pitchFamily="34" charset="-122"/>
-                <a:cs typeface="Calibri" pitchFamily="34" charset="-120"/>
-              </a:rPr>
-              <a:t>5000 − 3000 = 2000N forward. The car accelerates.</a:t>
-            </a:r>
-            <a:endParaRPr lang="en-US" sz="1600" dirty="0"/>
-          </a:p>
-        </p:txBody>
-      </p:sp>
-      <p:sp>
-        <p:nvSpPr>
-          <p:cNvPr id="10" name="Text 8"/>
-          <p:cNvSpPr/>
-          <p:nvPr/>
-        </p:nvSpPr>
-        <p:spPr>
-          <a:xfrm>
-            <a:off x="7315200" y="4754880"/>
-            <a:ext cx="1828800" cy="274320"/>
-          </a:xfrm>
-          <a:prstGeom prst="rect">
-            <a:avLst/>
-          </a:prstGeom>
-          <a:noFill/>
-          <a:ln/>
-        </p:spPr>
-        <p:txBody>
-          <a:bodyPr wrap="square" rtlCol="0" anchor="ctr"/>
-          <a:lstStyle/>
-          <a:p>
-            <a:pPr algn="r" indent="0" marL="0">
-              <a:buNone/>
-            </a:pPr>
-            <a:r>
-              <a:rPr lang="en-US" sz="900" dirty="0">
-                <a:solidFill>
-                  <a:srgbClr val="9B9690"/>
-                </a:solidFill>
-                <a:latin typeface="Calibri" pitchFamily="34" charset="0"/>
-                <a:ea typeface="Calibri" pitchFamily="34" charset="-122"/>
-                <a:cs typeface="Calibri" pitchFamily="34" charset="-120"/>
-              </a:rPr>
-              <a:t>mrzocchi.com</a:t>
-            </a:r>
-            <a:endParaRPr lang="en-US" sz="900" dirty="0"/>
-          </a:p>
-        </p:txBody>
-      </p:sp>
-    </p:spTree>
-  </p:cSld>
-  <p:clrMapOvr>
-    <a:masterClrMapping/>
-  </p:clrMapOvr>
-</p:sld>
-</file>
-
-<file path=ppt/slides/slide13.xml><?xml version="1.0" encoding="utf-8"?>
-<p:sld xmlns:a="http://schemas.openxmlformats.org/drawingml/2006/main" xmlns:r="http://schemas.openxmlformats.org/officeDocument/2006/relationships" xmlns:p="http://schemas.openxmlformats.org/presentationml/2006/main">
-  <p:cSld name="Slide 13">
-    <p:bg>
-      <p:bgPr>
-        <a:solidFill>
-          <a:srgbClr val="1B2A4A"/>
-        </a:solidFill>
-      </p:bgPr>
-    </p:bg>
-    <p:spTree>
-      <p:nvGrpSpPr>
-        <p:cNvPr id="1" name=""/>
-        <p:cNvGrpSpPr/>
-        <p:nvPr/>
-      </p:nvGrpSpPr>
-      <p:grpSpPr>
-        <a:xfrm>
-          <a:off x="0" y="0"/>
-          <a:ext cx="0" cy="0"/>
-          <a:chOff x="0" y="0"/>
-          <a:chExt cx="0" cy="0"/>
-        </a:xfrm>
-      </p:grpSpPr>
-      <p:sp>
-        <p:nvSpPr>
-          <p:cNvPr id="2" name="Shape 0"/>
-          <p:cNvSpPr/>
-          <p:nvPr/>
-        </p:nvSpPr>
-        <p:spPr>
-          <a:xfrm>
-            <a:off x="0" y="4389120"/>
-            <a:ext cx="9144000" cy="54864"/>
-          </a:xfrm>
-          <a:prstGeom prst="rect">
-            <a:avLst/>
-          </a:prstGeom>
-          <a:solidFill>
-            <a:srgbClr val="C8372D"/>
-          </a:solidFill>
-          <a:ln/>
-        </p:spPr>
-      </p:sp>
-      <p:sp>
-        <p:nvSpPr>
-          <p:cNvPr id="3" name="Text 1"/>
-          <p:cNvSpPr/>
-          <p:nvPr/>
-        </p:nvSpPr>
-        <p:spPr>
-          <a:xfrm>
-            <a:off x="457200" y="1371600"/>
-            <a:ext cx="8229600" cy="1371600"/>
-          </a:xfrm>
-          <a:prstGeom prst="rect">
-            <a:avLst/>
-          </a:prstGeom>
-          <a:noFill/>
-          <a:ln/>
-        </p:spPr>
-        <p:txBody>
-          <a:bodyPr wrap="square" rtlCol="0" anchor="ctr"/>
-          <a:lstStyle/>
-          <a:p>
-            <a:pPr algn="ctr" indent="0" marL="0">
-              <a:buNone/>
-            </a:pPr>
-            <a:r>
-              <a:rPr lang="en-US" sz="3600" b="1" dirty="0">
-                <a:solidFill>
-                  <a:srgbClr val="FFFFFF"/>
-                </a:solidFill>
-                <a:latin typeface="Georgia" pitchFamily="34" charset="0"/>
-                <a:ea typeface="Georgia" pitchFamily="34" charset="-122"/>
-                <a:cs typeface="Georgia" pitchFamily="34" charset="-120"/>
-              </a:rPr>
-              <a:t>Keep Practising!</a:t>
-            </a:r>
-            <a:endParaRPr lang="en-US" sz="3600" dirty="0"/>
-          </a:p>
-        </p:txBody>
-      </p:sp>
-      <p:sp>
-        <p:nvSpPr>
-          <p:cNvPr id="4" name="Text 2"/>
-          <p:cNvSpPr/>
-          <p:nvPr/>
-        </p:nvSpPr>
-        <p:spPr>
-          <a:xfrm>
-            <a:off x="457200" y="2743200"/>
-            <a:ext cx="8229600" cy="731520"/>
-          </a:xfrm>
-          <a:prstGeom prst="rect">
-            <a:avLst/>
-          </a:prstGeom>
-          <a:noFill/>
-          <a:ln/>
-        </p:spPr>
-        <p:txBody>
-          <a:bodyPr wrap="square" rtlCol="0" anchor="ctr"/>
-          <a:lstStyle/>
-          <a:p>
-            <a:pPr algn="ctr" indent="0" marL="0">
-              <a:buNone/>
-            </a:pPr>
-            <a:r>
-              <a:rPr lang="en-US" sz="1800" dirty="0">
-                <a:solidFill>
-                  <a:srgbClr val="E9C46A"/>
-                </a:solidFill>
-                <a:latin typeface="Calibri" pitchFamily="34" charset="0"/>
-                <a:ea typeface="Calibri" pitchFamily="34" charset="-122"/>
-                <a:cs typeface="Calibri" pitchFamily="34" charset="-120"/>
-              </a:rPr>
-              <a:t>Use the Self-Quiz on mrzocchi.com to test yourself</a:t>
-            </a:r>
-            <a:endParaRPr lang="en-US" sz="1800" dirty="0"/>
-          </a:p>
-        </p:txBody>
-      </p:sp>
-      <p:sp>
-        <p:nvSpPr>
-          <p:cNvPr id="5" name="Text 3"/>
-          <p:cNvSpPr/>
-          <p:nvPr/>
-        </p:nvSpPr>
-        <p:spPr>
-          <a:xfrm>
-            <a:off x="457200" y="3840480"/>
-            <a:ext cx="8229600" cy="457200"/>
-          </a:xfrm>
-          <a:prstGeom prst="rect">
-            <a:avLst/>
-          </a:prstGeom>
-          <a:noFill/>
-          <a:ln/>
-        </p:spPr>
-        <p:txBody>
-          <a:bodyPr wrap="square" rtlCol="0" anchor="ctr"/>
-          <a:lstStyle/>
-          <a:p>
-            <a:pPr algn="ctr" indent="0" marL="0">
-              <a:buNone/>
-            </a:pPr>
-            <a:r>
-              <a:rPr lang="en-US" sz="1400" dirty="0">
-                <a:solidFill>
-                  <a:srgbClr val="9B9690"/>
-                </a:solidFill>
-                <a:latin typeface="Calibri" pitchFamily="34" charset="0"/>
-                <a:ea typeface="Calibri" pitchFamily="34" charset="-122"/>
-                <a:cs typeface="Calibri" pitchFamily="34" charset="-120"/>
-              </a:rPr>
-              <a:t>mrzocchi.com</a:t>
-            </a:r>
-            <a:endParaRPr lang="en-US" sz="1400" dirty="0"/>
+            <a:endParaRPr lang="en-US" sz="1100" dirty="0"/>
           </a:p>
         </p:txBody>
       </p:sp>
@@ -3184,13 +1871,13 @@
         <p:spPr>
           <a:xfrm>
             <a:off x="0" y="0"/>
-            <a:ext cx="9144000" cy="54864"/>
-          </a:xfrm>
-          <a:prstGeom prst="rect">
-            <a:avLst/>
-          </a:prstGeom>
-          <a:solidFill>
-            <a:srgbClr val="C8372D"/>
+            <a:ext cx="12188952" cy="1097280"/>
+          </a:xfrm>
+          <a:prstGeom prst="rect">
+            <a:avLst/>
+          </a:prstGeom>
+          <a:solidFill>
+            <a:srgbClr val="1B2A4A"/>
           </a:solidFill>
           <a:ln/>
         </p:spPr>
@@ -3203,49 +1890,115 @@
         </p:nvSpPr>
         <p:spPr>
           <a:xfrm>
-            <a:off x="457200" y="228600"/>
-            <a:ext cx="8229600" cy="548640"/>
-          </a:xfrm>
-          <a:prstGeom prst="rect">
-            <a:avLst/>
-          </a:prstGeom>
-          <a:noFill/>
-          <a:ln/>
-        </p:spPr>
-        <p:txBody>
-          <a:bodyPr wrap="square" lIns="0" tIns="0" rIns="0" bIns="0" rtlCol="0" anchor="ctr"/>
+            <a:off x="548640" y="182880"/>
+            <a:ext cx="9144000" cy="731520"/>
+          </a:xfrm>
+          <a:prstGeom prst="rect">
+            <a:avLst/>
+          </a:prstGeom>
+          <a:noFill/>
+          <a:ln/>
+        </p:spPr>
+        <p:txBody>
+          <a:bodyPr wrap="square" rtlCol="0" anchor="ctr"/>
           <a:lstStyle/>
           <a:p>
             <a:pPr indent="0" marL="0">
               <a:buNone/>
             </a:pPr>
             <a:r>
-              <a:rPr lang="en-US" sz="2400" b="1" dirty="0">
-                <a:solidFill>
-                  <a:srgbClr val="1B2A4A"/>
+              <a:rPr lang="en-US" sz="2600" b="1" dirty="0">
+                <a:solidFill>
+                  <a:srgbClr val="FFFFFF"/>
                 </a:solidFill>
                 <a:latin typeface="Georgia" pitchFamily="34" charset="0"/>
                 <a:ea typeface="Georgia" pitchFamily="34" charset="-122"/>
                 <a:cs typeface="Georgia" pitchFamily="34" charset="-120"/>
               </a:rPr>
-              <a:t>What We're Learning</a:t>
-            </a:r>
-            <a:endParaRPr lang="en-US" sz="2400" dirty="0"/>
-          </a:p>
-        </p:txBody>
-      </p:sp>
-      <p:sp>
-        <p:nvSpPr>
-          <p:cNvPr id="4" name="Shape 2"/>
-          <p:cNvSpPr/>
-          <p:nvPr/>
-        </p:nvSpPr>
-        <p:spPr>
-          <a:xfrm>
-            <a:off x="457200" y="868680"/>
-            <a:ext cx="1828800" cy="27432"/>
-          </a:xfrm>
-          <a:prstGeom prst="rect">
+              <a:t>🎯 Learning Objectives</a:t>
+            </a:r>
+            <a:endParaRPr lang="en-US" sz="2600" dirty="0"/>
+          </a:p>
+        </p:txBody>
+      </p:sp>
+      <p:sp>
+        <p:nvSpPr>
+          <p:cNvPr id="4" name="Text 2"/>
+          <p:cNvSpPr/>
+          <p:nvPr/>
+        </p:nvSpPr>
+        <p:spPr>
+          <a:xfrm>
+            <a:off x="731520" y="1371600"/>
+            <a:ext cx="9144000" cy="365760"/>
+          </a:xfrm>
+          <a:prstGeom prst="rect">
+            <a:avLst/>
+          </a:prstGeom>
+          <a:noFill/>
+          <a:ln/>
+        </p:spPr>
+        <p:txBody>
+          <a:bodyPr wrap="square" rtlCol="0" anchor="ctr"/>
+          <a:lstStyle/>
+          <a:p>
+            <a:pPr indent="0" marL="0">
+              <a:buNone/>
+            </a:pPr>
+            <a:r>
+              <a:rPr lang="en-US" sz="1400" i="1" dirty="0">
+                <a:solidFill>
+                  <a:srgbClr val="6B6660"/>
+                </a:solidFill>
+                <a:latin typeface="Arial" pitchFamily="34" charset="0"/>
+                <a:ea typeface="Arial" pitchFamily="34" charset="-122"/>
+                <a:cs typeface="Arial" pitchFamily="34" charset="-120"/>
+              </a:rPr>
+              <a:t>By the end of this lesson, you will be able to:</a:t>
+            </a:r>
+            <a:endParaRPr lang="en-US" sz="1400" dirty="0"/>
+          </a:p>
+        </p:txBody>
+      </p:sp>
+      <p:sp>
+        <p:nvSpPr>
+          <p:cNvPr id="5" name="Shape 3"/>
+          <p:cNvSpPr/>
+          <p:nvPr/>
+        </p:nvSpPr>
+        <p:spPr>
+          <a:xfrm>
+            <a:off x="731520" y="2011680"/>
+            <a:ext cx="10515600" cy="594360"/>
+          </a:xfrm>
+          <a:prstGeom prst="roundRect">
+            <a:avLst>
+              <a:gd name="adj" fmla="val 15385"/>
+            </a:avLst>
+          </a:prstGeom>
+          <a:solidFill>
+            <a:srgbClr val="F3F1EE"/>
+          </a:solidFill>
+          <a:ln w="12700">
+            <a:solidFill>
+              <a:srgbClr val="E5E2DC"/>
+            </a:solidFill>
+            <a:prstDash val="solid"/>
+          </a:ln>
+        </p:spPr>
+      </p:sp>
+      <p:sp>
+        <p:nvSpPr>
+          <p:cNvPr id="6" name="Shape 4"/>
+          <p:cNvSpPr/>
+          <p:nvPr/>
+        </p:nvSpPr>
+        <p:spPr>
+          <a:xfrm>
+            <a:off x="914400" y="2121408"/>
+            <a:ext cx="365760" cy="365760"/>
+          </a:xfrm>
+          <a:prstGeom prst="ellipse">
             <a:avLst/>
           </a:prstGeom>
           <a:solidFill>
@@ -3256,14 +2009,119 @@
       </p:sp>
       <p:sp>
         <p:nvSpPr>
-          <p:cNvPr id="5" name="Shape 3"/>
-          <p:cNvSpPr/>
-          <p:nvPr/>
-        </p:nvSpPr>
-        <p:spPr>
-          <a:xfrm>
-            <a:off x="457200" y="1188720"/>
-            <a:ext cx="320040" cy="320040"/>
+          <p:cNvPr id="7" name="Text 5"/>
+          <p:cNvSpPr/>
+          <p:nvPr/>
+        </p:nvSpPr>
+        <p:spPr>
+          <a:xfrm>
+            <a:off x="914400" y="2121408"/>
+            <a:ext cx="365760" cy="365760"/>
+          </a:xfrm>
+          <a:prstGeom prst="rect">
+            <a:avLst/>
+          </a:prstGeom>
+          <a:noFill/>
+          <a:ln/>
+        </p:spPr>
+        <p:txBody>
+          <a:bodyPr wrap="square" rtlCol="0" anchor="ctr"/>
+          <a:lstStyle/>
+          <a:p>
+            <a:pPr algn="ctr" indent="0" marL="0">
+              <a:buNone/>
+            </a:pPr>
+            <a:r>
+              <a:rPr lang="en-US" sz="1200" b="1" dirty="0">
+                <a:solidFill>
+                  <a:srgbClr val="FFFFFF"/>
+                </a:solidFill>
+                <a:latin typeface="Arial" pitchFamily="34" charset="0"/>
+                <a:ea typeface="Arial" pitchFamily="34" charset="-122"/>
+                <a:cs typeface="Arial" pitchFamily="34" charset="-120"/>
+              </a:rPr>
+              <a:t>1</a:t>
+            </a:r>
+            <a:endParaRPr lang="en-US" sz="1200" dirty="0"/>
+          </a:p>
+        </p:txBody>
+      </p:sp>
+      <p:sp>
+        <p:nvSpPr>
+          <p:cNvPr id="8" name="Text 6"/>
+          <p:cNvSpPr/>
+          <p:nvPr/>
+        </p:nvSpPr>
+        <p:spPr>
+          <a:xfrm>
+            <a:off x="1463040" y="2057400"/>
+            <a:ext cx="9601200" cy="502920"/>
+          </a:xfrm>
+          <a:prstGeom prst="rect">
+            <a:avLst/>
+          </a:prstGeom>
+          <a:noFill/>
+          <a:ln/>
+        </p:spPr>
+        <p:txBody>
+          <a:bodyPr wrap="square" rtlCol="0" anchor="ctr"/>
+          <a:lstStyle/>
+          <a:p>
+            <a:pPr indent="0" marL="0">
+              <a:buNone/>
+            </a:pPr>
+            <a:r>
+              <a:rPr lang="en-US" sz="1500" dirty="0">
+                <a:solidFill>
+                  <a:srgbClr val="3D3A36"/>
+                </a:solidFill>
+                <a:latin typeface="Arial" pitchFamily="34" charset="0"/>
+                <a:ea typeface="Arial" pitchFamily="34" charset="-122"/>
+                <a:cs typeface="Arial" pitchFamily="34" charset="-120"/>
+              </a:rPr>
+              <a:t>Define pressure and state its unit</a:t>
+            </a:r>
+            <a:endParaRPr lang="en-US" sz="1500" dirty="0"/>
+          </a:p>
+        </p:txBody>
+      </p:sp>
+      <p:sp>
+        <p:nvSpPr>
+          <p:cNvPr id="9" name="Shape 7"/>
+          <p:cNvSpPr/>
+          <p:nvPr/>
+        </p:nvSpPr>
+        <p:spPr>
+          <a:xfrm>
+            <a:off x="731520" y="2743200"/>
+            <a:ext cx="10515600" cy="594360"/>
+          </a:xfrm>
+          <a:prstGeom prst="roundRect">
+            <a:avLst>
+              <a:gd name="adj" fmla="val 15385"/>
+            </a:avLst>
+          </a:prstGeom>
+          <a:solidFill>
+            <a:srgbClr val="F3F1EE"/>
+          </a:solidFill>
+          <a:ln w="12700">
+            <a:solidFill>
+              <a:srgbClr val="E5E2DC"/>
+            </a:solidFill>
+            <a:prstDash val="solid"/>
+          </a:ln>
+        </p:spPr>
+      </p:sp>
+      <p:sp>
+        <p:nvSpPr>
+          <p:cNvPr id="10" name="Shape 8"/>
+          <p:cNvSpPr/>
+          <p:nvPr/>
+        </p:nvSpPr>
+        <p:spPr>
+          <a:xfrm>
+            <a:off x="914400" y="2852928"/>
+            <a:ext cx="365760" cy="365760"/>
           </a:xfrm>
           <a:prstGeom prst="ellipse">
             <a:avLst/>
@@ -3276,14 +2134,14 @@
       </p:sp>
       <p:sp>
         <p:nvSpPr>
-          <p:cNvPr id="6" name="Text 4"/>
-          <p:cNvSpPr/>
-          <p:nvPr/>
-        </p:nvSpPr>
-        <p:spPr>
-          <a:xfrm>
-            <a:off x="457200" y="1188720"/>
-            <a:ext cx="320040" cy="320040"/>
+          <p:cNvPr id="11" name="Text 9"/>
+          <p:cNvSpPr/>
+          <p:nvPr/>
+        </p:nvSpPr>
+        <p:spPr>
+          <a:xfrm>
+            <a:off x="914400" y="2852928"/>
+            <a:ext cx="365760" cy="365760"/>
           </a:xfrm>
           <a:prstGeom prst="rect">
             <a:avLst/>
@@ -3303,11 +2161,11 @@
                 <a:solidFill>
                   <a:srgbClr val="FFFFFF"/>
                 </a:solidFill>
-                <a:latin typeface="Calibri" pitchFamily="34" charset="0"/>
-                <a:ea typeface="Calibri" pitchFamily="34" charset="-122"/>
-                <a:cs typeface="Calibri" pitchFamily="34" charset="-120"/>
-              </a:rPr>
-              <a:t>1</a:t>
+                <a:latin typeface="Arial" pitchFamily="34" charset="0"/>
+                <a:ea typeface="Arial" pitchFamily="34" charset="-122"/>
+                <a:cs typeface="Arial" pitchFamily="34" charset="-120"/>
+              </a:rPr>
+              <a:t>2</a:t>
             </a:r>
             <a:endParaRPr lang="en-US" sz="1200" dirty="0"/>
           </a:p>
@@ -3315,14 +2173,14 @@
       </p:sp>
       <p:sp>
         <p:nvSpPr>
-          <p:cNvPr id="7" name="Text 5"/>
-          <p:cNvSpPr/>
-          <p:nvPr/>
-        </p:nvSpPr>
-        <p:spPr>
-          <a:xfrm>
-            <a:off x="914400" y="1143000"/>
-            <a:ext cx="7772400" cy="411480"/>
+          <p:cNvPr id="12" name="Text 10"/>
+          <p:cNvSpPr/>
+          <p:nvPr/>
+        </p:nvSpPr>
+        <p:spPr>
+          <a:xfrm>
+            <a:off x="1463040" y="2788920"/>
+            <a:ext cx="9601200" cy="502920"/>
           </a:xfrm>
           <a:prstGeom prst="rect">
             <a:avLst/>
@@ -3338,30 +2196,57 @@
               <a:buNone/>
             </a:pPr>
             <a:r>
-              <a:rPr lang="en-US" sz="1600" dirty="0">
+              <a:rPr lang="en-US" sz="1500" dirty="0">
                 <a:solidFill>
                   <a:srgbClr val="3D3A36"/>
                 </a:solidFill>
-                <a:latin typeface="Calibri" pitchFamily="34" charset="0"/>
-                <a:ea typeface="Calibri" pitchFamily="34" charset="-122"/>
-                <a:cs typeface="Calibri" pitchFamily="34" charset="-120"/>
-              </a:rPr>
-              <a:t>We are learning about types of forces, balanced and unbalanced forces, friction and drag, calculating speed, and understanding pressure.</a:t>
-            </a:r>
-            <a:endParaRPr lang="en-US" sz="1600" dirty="0"/>
-          </a:p>
-        </p:txBody>
-      </p:sp>
-      <p:sp>
-        <p:nvSpPr>
-          <p:cNvPr id="8" name="Shape 6"/>
-          <p:cNvSpPr/>
-          <p:nvPr/>
-        </p:nvSpPr>
-        <p:spPr>
-          <a:xfrm>
-            <a:off x="457200" y="1783080"/>
-            <a:ext cx="320040" cy="320040"/>
+                <a:latin typeface="Arial" pitchFamily="34" charset="0"/>
+                <a:ea typeface="Arial" pitchFamily="34" charset="-122"/>
+                <a:cs typeface="Arial" pitchFamily="34" charset="-120"/>
+              </a:rPr>
+              <a:t>Use the formula: pressure = force ÷ area</a:t>
+            </a:r>
+            <a:endParaRPr lang="en-US" sz="1500" dirty="0"/>
+          </a:p>
+        </p:txBody>
+      </p:sp>
+      <p:sp>
+        <p:nvSpPr>
+          <p:cNvPr id="13" name="Shape 11"/>
+          <p:cNvSpPr/>
+          <p:nvPr/>
+        </p:nvSpPr>
+        <p:spPr>
+          <a:xfrm>
+            <a:off x="731520" y="3474720"/>
+            <a:ext cx="10515600" cy="594360"/>
+          </a:xfrm>
+          <a:prstGeom prst="roundRect">
+            <a:avLst>
+              <a:gd name="adj" fmla="val 15385"/>
+            </a:avLst>
+          </a:prstGeom>
+          <a:solidFill>
+            <a:srgbClr val="F3F1EE"/>
+          </a:solidFill>
+          <a:ln w="12700">
+            <a:solidFill>
+              <a:srgbClr val="E5E2DC"/>
+            </a:solidFill>
+            <a:prstDash val="solid"/>
+          </a:ln>
+        </p:spPr>
+      </p:sp>
+      <p:sp>
+        <p:nvSpPr>
+          <p:cNvPr id="14" name="Shape 12"/>
+          <p:cNvSpPr/>
+          <p:nvPr/>
+        </p:nvSpPr>
+        <p:spPr>
+          <a:xfrm>
+            <a:off x="914400" y="3584448"/>
+            <a:ext cx="365760" cy="365760"/>
           </a:xfrm>
           <a:prstGeom prst="ellipse">
             <a:avLst/>
@@ -3374,14 +2259,14 @@
       </p:sp>
       <p:sp>
         <p:nvSpPr>
-          <p:cNvPr id="9" name="Text 7"/>
-          <p:cNvSpPr/>
-          <p:nvPr/>
-        </p:nvSpPr>
-        <p:spPr>
-          <a:xfrm>
-            <a:off x="457200" y="1783080"/>
-            <a:ext cx="320040" cy="320040"/>
+          <p:cNvPr id="15" name="Text 13"/>
+          <p:cNvSpPr/>
+          <p:nvPr/>
+        </p:nvSpPr>
+        <p:spPr>
+          <a:xfrm>
+            <a:off x="914400" y="3584448"/>
+            <a:ext cx="365760" cy="365760"/>
           </a:xfrm>
           <a:prstGeom prst="rect">
             <a:avLst/>
@@ -3401,11 +2286,11 @@
                 <a:solidFill>
                   <a:srgbClr val="FFFFFF"/>
                 </a:solidFill>
-                <a:latin typeface="Calibri" pitchFamily="34" charset="0"/>
-                <a:ea typeface="Calibri" pitchFamily="34" charset="-122"/>
-                <a:cs typeface="Calibri" pitchFamily="34" charset="-120"/>
-              </a:rPr>
-              <a:t>2</a:t>
+                <a:latin typeface="Arial" pitchFamily="34" charset="0"/>
+                <a:ea typeface="Arial" pitchFamily="34" charset="-122"/>
+                <a:cs typeface="Arial" pitchFamily="34" charset="-120"/>
+              </a:rPr>
+              <a:t>3</a:t>
             </a:r>
             <a:endParaRPr lang="en-US" sz="1200" dirty="0"/>
           </a:p>
@@ -3413,14 +2298,14 @@
       </p:sp>
       <p:sp>
         <p:nvSpPr>
-          <p:cNvPr id="10" name="Text 8"/>
-          <p:cNvSpPr/>
-          <p:nvPr/>
-        </p:nvSpPr>
-        <p:spPr>
-          <a:xfrm>
-            <a:off x="914400" y="1737360"/>
-            <a:ext cx="7772400" cy="411480"/>
+          <p:cNvPr id="16" name="Text 14"/>
+          <p:cNvSpPr/>
+          <p:nvPr/>
+        </p:nvSpPr>
+        <p:spPr>
+          <a:xfrm>
+            <a:off x="1463040" y="3520440"/>
+            <a:ext cx="9601200" cy="502920"/>
           </a:xfrm>
           <a:prstGeom prst="rect">
             <a:avLst/>
@@ -3436,30 +2321,57 @@
               <a:buNone/>
             </a:pPr>
             <a:r>
-              <a:rPr lang="en-US" sz="1600" dirty="0">
+              <a:rPr lang="en-US" sz="1500" dirty="0">
                 <a:solidFill>
                   <a:srgbClr val="3D3A36"/>
                 </a:solidFill>
-                <a:latin typeface="Calibri" pitchFamily="34" charset="0"/>
-                <a:ea typeface="Calibri" pitchFamily="34" charset="-122"/>
-                <a:cs typeface="Calibri" pitchFamily="34" charset="-120"/>
-              </a:rPr>
-              <a:t>Key Concept: Relationships</a:t>
-            </a:r>
-            <a:endParaRPr lang="en-US" sz="1600" dirty="0"/>
-          </a:p>
-        </p:txBody>
-      </p:sp>
-      <p:sp>
-        <p:nvSpPr>
-          <p:cNvPr id="11" name="Shape 9"/>
-          <p:cNvSpPr/>
-          <p:nvPr/>
-        </p:nvSpPr>
-        <p:spPr>
-          <a:xfrm>
-            <a:off x="457200" y="2377440"/>
-            <a:ext cx="320040" cy="320040"/>
+                <a:latin typeface="Arial" pitchFamily="34" charset="0"/>
+                <a:ea typeface="Arial" pitchFamily="34" charset="-122"/>
+                <a:cs typeface="Arial" pitchFamily="34" charset="-120"/>
+              </a:rPr>
+              <a:t>Explain how area affects pressure</a:t>
+            </a:r>
+            <a:endParaRPr lang="en-US" sz="1500" dirty="0"/>
+          </a:p>
+        </p:txBody>
+      </p:sp>
+      <p:sp>
+        <p:nvSpPr>
+          <p:cNvPr id="17" name="Shape 15"/>
+          <p:cNvSpPr/>
+          <p:nvPr/>
+        </p:nvSpPr>
+        <p:spPr>
+          <a:xfrm>
+            <a:off x="731520" y="4206240"/>
+            <a:ext cx="10515600" cy="594360"/>
+          </a:xfrm>
+          <a:prstGeom prst="roundRect">
+            <a:avLst>
+              <a:gd name="adj" fmla="val 15385"/>
+            </a:avLst>
+          </a:prstGeom>
+          <a:solidFill>
+            <a:srgbClr val="F3F1EE"/>
+          </a:solidFill>
+          <a:ln w="12700">
+            <a:solidFill>
+              <a:srgbClr val="E5E2DC"/>
+            </a:solidFill>
+            <a:prstDash val="solid"/>
+          </a:ln>
+        </p:spPr>
+      </p:sp>
+      <p:sp>
+        <p:nvSpPr>
+          <p:cNvPr id="18" name="Shape 16"/>
+          <p:cNvSpPr/>
+          <p:nvPr/>
+        </p:nvSpPr>
+        <p:spPr>
+          <a:xfrm>
+            <a:off x="914400" y="4315968"/>
+            <a:ext cx="365760" cy="365760"/>
           </a:xfrm>
           <a:prstGeom prst="ellipse">
             <a:avLst/>
@@ -3472,14 +2384,14 @@
       </p:sp>
       <p:sp>
         <p:nvSpPr>
-          <p:cNvPr id="12" name="Text 10"/>
-          <p:cNvSpPr/>
-          <p:nvPr/>
-        </p:nvSpPr>
-        <p:spPr>
-          <a:xfrm>
-            <a:off x="457200" y="2377440"/>
-            <a:ext cx="320040" cy="320040"/>
+          <p:cNvPr id="19" name="Text 17"/>
+          <p:cNvSpPr/>
+          <p:nvPr/>
+        </p:nvSpPr>
+        <p:spPr>
+          <a:xfrm>
+            <a:off x="914400" y="4315968"/>
+            <a:ext cx="365760" cy="365760"/>
           </a:xfrm>
           <a:prstGeom prst="rect">
             <a:avLst/>
@@ -3499,11 +2411,11 @@
                 <a:solidFill>
                   <a:srgbClr val="FFFFFF"/>
                 </a:solidFill>
-                <a:latin typeface="Calibri" pitchFamily="34" charset="0"/>
-                <a:ea typeface="Calibri" pitchFamily="34" charset="-122"/>
-                <a:cs typeface="Calibri" pitchFamily="34" charset="-120"/>
-              </a:rPr>
-              <a:t>3</a:t>
+                <a:latin typeface="Arial" pitchFamily="34" charset="0"/>
+                <a:ea typeface="Arial" pitchFamily="34" charset="-122"/>
+                <a:cs typeface="Arial" pitchFamily="34" charset="-120"/>
+              </a:rPr>
+              <a:t>4</a:t>
             </a:r>
             <a:endParaRPr lang="en-US" sz="1200" dirty="0"/>
           </a:p>
@@ -3511,14 +2423,14 @@
       </p:sp>
       <p:sp>
         <p:nvSpPr>
-          <p:cNvPr id="13" name="Text 11"/>
-          <p:cNvSpPr/>
-          <p:nvPr/>
-        </p:nvSpPr>
-        <p:spPr>
-          <a:xfrm>
-            <a:off x="914400" y="2331720"/>
-            <a:ext cx="7772400" cy="411480"/>
+          <p:cNvPr id="20" name="Text 18"/>
+          <p:cNvSpPr/>
+          <p:nvPr/>
+        </p:nvSpPr>
+        <p:spPr>
+          <a:xfrm>
+            <a:off x="1463040" y="4251960"/>
+            <a:ext cx="9601200" cy="502920"/>
           </a:xfrm>
           <a:prstGeom prst="rect">
             <a:avLst/>
@@ -3534,127 +2446,49 @@
               <a:buNone/>
             </a:pPr>
             <a:r>
-              <a:rPr lang="en-US" sz="1600" dirty="0">
+              <a:rPr lang="en-US" sz="1500" dirty="0">
                 <a:solidFill>
                   <a:srgbClr val="3D3A36"/>
                 </a:solidFill>
-                <a:latin typeface="Calibri" pitchFamily="34" charset="0"/>
-                <a:ea typeface="Calibri" pitchFamily="34" charset="-122"/>
-                <a:cs typeface="Calibri" pitchFamily="34" charset="-120"/>
-              </a:rPr>
-              <a:t>Global Context: Scientific and Technical Innovation</a:t>
-            </a:r>
-            <a:endParaRPr lang="en-US" sz="1600" dirty="0"/>
-          </a:p>
-        </p:txBody>
-      </p:sp>
-      <p:sp>
-        <p:nvSpPr>
-          <p:cNvPr id="14" name="Shape 12"/>
-          <p:cNvSpPr/>
-          <p:nvPr/>
-        </p:nvSpPr>
-        <p:spPr>
-          <a:xfrm>
-            <a:off x="457200" y="2971800"/>
-            <a:ext cx="320040" cy="320040"/>
-          </a:xfrm>
-          <a:prstGeom prst="ellipse">
-            <a:avLst/>
-          </a:prstGeom>
-          <a:solidFill>
-            <a:srgbClr val="E5E2DC"/>
-          </a:solidFill>
-          <a:ln/>
-        </p:spPr>
-      </p:sp>
-      <p:sp>
-        <p:nvSpPr>
-          <p:cNvPr id="15" name="Text 13"/>
-          <p:cNvSpPr/>
-          <p:nvPr/>
-        </p:nvSpPr>
-        <p:spPr>
-          <a:xfrm>
-            <a:off x="457200" y="2971800"/>
-            <a:ext cx="320040" cy="320040"/>
-          </a:xfrm>
-          <a:prstGeom prst="rect">
-            <a:avLst/>
-          </a:prstGeom>
-          <a:noFill/>
-          <a:ln/>
-        </p:spPr>
-        <p:txBody>
-          <a:bodyPr wrap="square" rtlCol="0" anchor="ctr"/>
-          <a:lstStyle/>
-          <a:p>
-            <a:pPr algn="ctr" indent="0" marL="0">
-              <a:buNone/>
-            </a:pPr>
-            <a:r>
-              <a:rPr lang="en-US" sz="1200" b="1" dirty="0">
-                <a:solidFill>
-                  <a:srgbClr val="FFFFFF"/>
-                </a:solidFill>
-                <a:latin typeface="Calibri" pitchFamily="34" charset="0"/>
-                <a:ea typeface="Calibri" pitchFamily="34" charset="-122"/>
-                <a:cs typeface="Calibri" pitchFamily="34" charset="-120"/>
-              </a:rPr>
-              <a:t>4</a:t>
-            </a:r>
-            <a:endParaRPr lang="en-US" sz="1200" dirty="0"/>
-          </a:p>
-        </p:txBody>
-      </p:sp>
-      <p:sp>
-        <p:nvSpPr>
-          <p:cNvPr id="16" name="Text 14"/>
-          <p:cNvSpPr/>
-          <p:nvPr/>
-        </p:nvSpPr>
-        <p:spPr>
-          <a:xfrm>
-            <a:off x="914400" y="2926080"/>
-            <a:ext cx="7772400" cy="411480"/>
-          </a:xfrm>
-          <a:prstGeom prst="rect">
-            <a:avLst/>
-          </a:prstGeom>
-          <a:noFill/>
-          <a:ln/>
-        </p:spPr>
-        <p:txBody>
-          <a:bodyPr wrap="square" rtlCol="0" anchor="ctr"/>
-          <a:lstStyle/>
-          <a:p>
-            <a:pPr indent="0" marL="0">
-              <a:buNone/>
-            </a:pPr>
-            <a:r>
-              <a:rPr lang="en-US" sz="1600" dirty="0">
-                <a:solidFill>
-                  <a:srgbClr val="3D3A36"/>
-                </a:solidFill>
-                <a:latin typeface="Calibri" pitchFamily="34" charset="0"/>
-                <a:ea typeface="Calibri" pitchFamily="34" charset="-122"/>
-                <a:cs typeface="Calibri" pitchFamily="34" charset="-120"/>
-              </a:rPr>
-              <a:t>"Understanding the relationships between forces and motion helps us design and innovate technologies."</a:t>
-            </a:r>
-            <a:endParaRPr lang="en-US" sz="1600" dirty="0"/>
-          </a:p>
-        </p:txBody>
-      </p:sp>
-      <p:sp>
-        <p:nvSpPr>
-          <p:cNvPr id="17" name="Text 15"/>
-          <p:cNvSpPr/>
-          <p:nvPr/>
-        </p:nvSpPr>
-        <p:spPr>
-          <a:xfrm>
-            <a:off x="7315200" y="4754880"/>
+                <a:latin typeface="Arial" pitchFamily="34" charset="0"/>
+                <a:ea typeface="Arial" pitchFamily="34" charset="-122"/>
+                <a:cs typeface="Arial" pitchFamily="34" charset="-120"/>
+              </a:rPr>
+              <a:t>Apply pressure concepts to real-world examples</a:t>
+            </a:r>
+            <a:endParaRPr lang="en-US" sz="1500" dirty="0"/>
+          </a:p>
+        </p:txBody>
+      </p:sp>
+      <p:sp>
+        <p:nvSpPr>
+          <p:cNvPr id="21" name="Shape 19"/>
+          <p:cNvSpPr/>
+          <p:nvPr/>
+        </p:nvSpPr>
+        <p:spPr>
+          <a:xfrm>
+            <a:off x="0" y="6492240"/>
+            <a:ext cx="12188952" cy="365760"/>
+          </a:xfrm>
+          <a:prstGeom prst="rect">
+            <a:avLst/>
+          </a:prstGeom>
+          <a:solidFill>
+            <a:srgbClr val="1B2A4A"/>
+          </a:solidFill>
+          <a:ln/>
+        </p:spPr>
+      </p:sp>
+      <p:sp>
+        <p:nvSpPr>
+          <p:cNvPr id="22" name="Text 20"/>
+          <p:cNvSpPr/>
+          <p:nvPr/>
+        </p:nvSpPr>
+        <p:spPr>
+          <a:xfrm>
+            <a:off x="10058400" y="6537960"/>
             <a:ext cx="1828800" cy="274320"/>
           </a:xfrm>
           <a:prstGeom prst="rect">
@@ -3673,11 +2507,11 @@
             <a:r>
               <a:rPr lang="en-US" sz="900" dirty="0">
                 <a:solidFill>
-                  <a:srgbClr val="9B9690"/>
-                </a:solidFill>
-                <a:latin typeface="Calibri" pitchFamily="34" charset="0"/>
-                <a:ea typeface="Calibri" pitchFamily="34" charset="-122"/>
-                <a:cs typeface="Calibri" pitchFamily="34" charset="-120"/>
+                  <a:srgbClr val="E9C46A"/>
+                </a:solidFill>
+                <a:latin typeface="Arial" pitchFamily="34" charset="0"/>
+                <a:ea typeface="Arial" pitchFamily="34" charset="-122"/>
+                <a:cs typeface="Arial" pitchFamily="34" charset="-120"/>
               </a:rPr>
               <a:t>mrzocchi.com</a:t>
             </a:r>
@@ -3719,13 +2553,13 @@
         <p:spPr>
           <a:xfrm>
             <a:off x="0" y="0"/>
-            <a:ext cx="9144000" cy="54864"/>
-          </a:xfrm>
-          <a:prstGeom prst="rect">
-            <a:avLst/>
-          </a:prstGeom>
-          <a:solidFill>
-            <a:srgbClr val="C8372D"/>
+            <a:ext cx="12188952" cy="1097280"/>
+          </a:xfrm>
+          <a:prstGeom prst="rect">
+            <a:avLst/>
+          </a:prstGeom>
+          <a:solidFill>
+            <a:srgbClr val="1B2A4A"/>
           </a:solidFill>
           <a:ln/>
         </p:spPr>
@@ -3738,67 +2572,47 @@
         </p:nvSpPr>
         <p:spPr>
           <a:xfrm>
-            <a:off x="457200" y="228600"/>
-            <a:ext cx="8229600" cy="548640"/>
-          </a:xfrm>
-          <a:prstGeom prst="rect">
-            <a:avLst/>
-          </a:prstGeom>
-          <a:noFill/>
-          <a:ln/>
-        </p:spPr>
-        <p:txBody>
-          <a:bodyPr wrap="square" lIns="0" tIns="0" rIns="0" bIns="0" rtlCol="0" anchor="ctr"/>
+            <a:off x="548640" y="182880"/>
+            <a:ext cx="10972800" cy="731520"/>
+          </a:xfrm>
+          <a:prstGeom prst="rect">
+            <a:avLst/>
+          </a:prstGeom>
+          <a:noFill/>
+          <a:ln/>
+        </p:spPr>
+        <p:txBody>
+          <a:bodyPr wrap="square" rtlCol="0" anchor="ctr"/>
           <a:lstStyle/>
           <a:p>
             <a:pPr indent="0" marL="0">
               <a:buNone/>
             </a:pPr>
             <a:r>
-              <a:rPr lang="en-US" sz="2400" b="1" dirty="0">
-                <a:solidFill>
-                  <a:srgbClr val="1B2A4A"/>
+              <a:rPr lang="en-US" sz="2600" b="1" dirty="0">
+                <a:solidFill>
+                  <a:srgbClr val="FFFFFF"/>
                 </a:solidFill>
                 <a:latin typeface="Georgia" pitchFamily="34" charset="0"/>
                 <a:ea typeface="Georgia" pitchFamily="34" charset="-122"/>
                 <a:cs typeface="Georgia" pitchFamily="34" charset="-120"/>
               </a:rPr>
-              <a:t>Key Vocabulary</a:t>
-            </a:r>
-            <a:endParaRPr lang="en-US" sz="2400" dirty="0"/>
-          </a:p>
-        </p:txBody>
-      </p:sp>
-      <p:sp>
-        <p:nvSpPr>
-          <p:cNvPr id="4" name="Shape 2"/>
-          <p:cNvSpPr/>
-          <p:nvPr/>
-        </p:nvSpPr>
-        <p:spPr>
-          <a:xfrm>
-            <a:off x="457200" y="868680"/>
-            <a:ext cx="1828800" cy="27432"/>
-          </a:xfrm>
-          <a:prstGeom prst="rect">
-            <a:avLst/>
-          </a:prstGeom>
-          <a:solidFill>
-            <a:srgbClr val="C8372D"/>
-          </a:solidFill>
-          <a:ln/>
-        </p:spPr>
-      </p:sp>
-      <p:sp>
-        <p:nvSpPr>
-          <p:cNvPr id="5" name="Text 3"/>
-          <p:cNvSpPr/>
-          <p:nvPr/>
-        </p:nvSpPr>
-        <p:spPr>
-          <a:xfrm>
-            <a:off x="457200" y="1188720"/>
-            <a:ext cx="8229600" cy="548640"/>
+              <a:t>What is Pressure?</a:t>
+            </a:r>
+            <a:endParaRPr lang="en-US" sz="2600" dirty="0"/>
+          </a:p>
+        </p:txBody>
+      </p:sp>
+      <p:sp>
+        <p:nvSpPr>
+          <p:cNvPr id="4" name="Text 2"/>
+          <p:cNvSpPr/>
+          <p:nvPr/>
+        </p:nvSpPr>
+        <p:spPr>
+          <a:xfrm>
+            <a:off x="731520" y="1325880"/>
+            <a:ext cx="10515600" cy="457200"/>
           </a:xfrm>
           <a:prstGeom prst="rect">
             <a:avLst/>
@@ -3814,19 +2628,46 @@
               <a:buNone/>
             </a:pPr>
             <a:r>
-              <a:rPr lang="en-US" sz="2800" b="1" dirty="0">
-                <a:solidFill>
-                  <a:srgbClr val="C8372D"/>
-                </a:solidFill>
-                <a:latin typeface="Georgia" pitchFamily="34" charset="0"/>
-                <a:ea typeface="Georgia" pitchFamily="34" charset="-122"/>
-                <a:cs typeface="Georgia" pitchFamily="34" charset="-120"/>
-              </a:rPr>
-              <a:t>Force</a:t>
-            </a:r>
-            <a:endParaRPr lang="en-US" sz="2800" dirty="0"/>
-          </a:p>
-        </p:txBody>
+              <a:rPr lang="en-US" sz="1400" i="1" dirty="0">
+                <a:solidFill>
+                  <a:srgbClr val="6B6660"/>
+                </a:solidFill>
+                <a:latin typeface="Arial" pitchFamily="34" charset="0"/>
+                <a:ea typeface="Arial" pitchFamily="34" charset="-122"/>
+                <a:cs typeface="Arial" pitchFamily="34" charset="-120"/>
+              </a:rPr>
+              <a:t>Pressure explains why sharp knives cut and snowshoes don't sink.</a:t>
+            </a:r>
+            <a:endParaRPr lang="en-US" sz="1400" dirty="0"/>
+          </a:p>
+        </p:txBody>
+      </p:sp>
+      <p:sp>
+        <p:nvSpPr>
+          <p:cNvPr id="5" name="Shape 3"/>
+          <p:cNvSpPr/>
+          <p:nvPr/>
+        </p:nvSpPr>
+        <p:spPr>
+          <a:xfrm>
+            <a:off x="731520" y="1920240"/>
+            <a:ext cx="10515600" cy="640080"/>
+          </a:xfrm>
+          <a:prstGeom prst="roundRect">
+            <a:avLst>
+              <a:gd name="adj" fmla="val 14286"/>
+            </a:avLst>
+          </a:prstGeom>
+          <a:solidFill>
+            <a:srgbClr val="FFFFFF"/>
+          </a:solidFill>
+          <a:ln w="6350">
+            <a:solidFill>
+              <a:srgbClr val="E5E2DC"/>
+            </a:solidFill>
+            <a:prstDash val="solid"/>
+          </a:ln>
+        </p:spPr>
       </p:sp>
       <p:sp>
         <p:nvSpPr>
@@ -3836,8 +2677,8 @@
         </p:nvSpPr>
         <p:spPr>
           <a:xfrm>
-            <a:off x="457200" y="1691640"/>
-            <a:ext cx="8229600" cy="365760"/>
+            <a:off x="1005840" y="1965960"/>
+            <a:ext cx="10058400" cy="548640"/>
           </a:xfrm>
           <a:prstGeom prst="rect">
             <a:avLst/>
@@ -3853,30 +2694,57 @@
               <a:buNone/>
             </a:pPr>
             <a:r>
-              <a:rPr lang="en-US" sz="1600" i="1" dirty="0">
-                <a:solidFill>
-                  <a:srgbClr val="9B9690"/>
-                </a:solidFill>
-                <a:latin typeface="Calibri" pitchFamily="34" charset="0"/>
-                <a:ea typeface="Calibri" pitchFamily="34" charset="-122"/>
-                <a:cs typeface="Calibri" pitchFamily="34" charset="-120"/>
-              </a:rPr>
-              <a:t>力</a:t>
-            </a:r>
-            <a:endParaRPr lang="en-US" sz="1600" dirty="0"/>
-          </a:p>
-        </p:txBody>
-      </p:sp>
-      <p:sp>
-        <p:nvSpPr>
-          <p:cNvPr id="7" name="Text 5"/>
-          <p:cNvSpPr/>
-          <p:nvPr/>
-        </p:nvSpPr>
-        <p:spPr>
-          <a:xfrm>
-            <a:off x="457200" y="2194560"/>
-            <a:ext cx="8229600" cy="1828800"/>
+              <a:rPr lang="en-US" sz="1500" dirty="0">
+                <a:solidFill>
+                  <a:srgbClr val="3D3A36"/>
+                </a:solidFill>
+                <a:latin typeface="Arial" pitchFamily="34" charset="0"/>
+                <a:ea typeface="Arial" pitchFamily="34" charset="-122"/>
+                <a:cs typeface="Arial" pitchFamily="34" charset="-120"/>
+              </a:rPr>
+              <a:t>▸ Pressure is the force acting per unit area</a:t>
+            </a:r>
+            <a:endParaRPr lang="en-US" sz="1500" dirty="0"/>
+          </a:p>
+        </p:txBody>
+      </p:sp>
+      <p:sp>
+        <p:nvSpPr>
+          <p:cNvPr id="7" name="Shape 5"/>
+          <p:cNvSpPr/>
+          <p:nvPr/>
+        </p:nvSpPr>
+        <p:spPr>
+          <a:xfrm>
+            <a:off x="731520" y="2697480"/>
+            <a:ext cx="10515600" cy="640080"/>
+          </a:xfrm>
+          <a:prstGeom prst="roundRect">
+            <a:avLst>
+              <a:gd name="adj" fmla="val 14286"/>
+            </a:avLst>
+          </a:prstGeom>
+          <a:solidFill>
+            <a:srgbClr val="F8F6F3"/>
+          </a:solidFill>
+          <a:ln w="6350">
+            <a:solidFill>
+              <a:srgbClr val="E5E2DC"/>
+            </a:solidFill>
+            <a:prstDash val="solid"/>
+          </a:ln>
+        </p:spPr>
+      </p:sp>
+      <p:sp>
+        <p:nvSpPr>
+          <p:cNvPr id="8" name="Text 6"/>
+          <p:cNvSpPr/>
+          <p:nvPr/>
+        </p:nvSpPr>
+        <p:spPr>
+          <a:xfrm>
+            <a:off x="1005840" y="2743200"/>
+            <a:ext cx="10058400" cy="548640"/>
           </a:xfrm>
           <a:prstGeom prst="rect">
             <a:avLst/>
@@ -3889,35 +2757,250 @@
           <a:lstStyle/>
           <a:p>
             <a:pPr indent="0" marL="0">
-              <a:lnSpc>
-                <a:spcPct val="150000"/>
-              </a:lnSpc>
-              <a:buNone/>
-            </a:pPr>
-            <a:r>
-              <a:rPr lang="en-US" sz="1800" dirty="0">
-                <a:solidFill>
-                  <a:srgbClr val="6B6660"/>
-                </a:solidFill>
-                <a:latin typeface="Calibri" pitchFamily="34" charset="0"/>
-                <a:ea typeface="Calibri" pitchFamily="34" charset="-122"/>
-                <a:cs typeface="Calibri" pitchFamily="34" charset="-120"/>
-              </a:rPr>
-              <a:t>A push or pull that can change an object's speed, direction, or shape. Measured in Newtons (N).</a:t>
-            </a:r>
-            <a:endParaRPr lang="en-US" sz="1800" dirty="0"/>
-          </a:p>
-        </p:txBody>
-      </p:sp>
-      <p:sp>
-        <p:nvSpPr>
-          <p:cNvPr id="8" name="Text 6"/>
-          <p:cNvSpPr/>
-          <p:nvPr/>
-        </p:nvSpPr>
-        <p:spPr>
-          <a:xfrm>
-            <a:off x="7315200" y="4754880"/>
+              <a:buNone/>
+            </a:pPr>
+            <a:r>
+              <a:rPr lang="en-US" sz="1500" dirty="0">
+                <a:solidFill>
+                  <a:srgbClr val="3D3A36"/>
+                </a:solidFill>
+                <a:latin typeface="Arial" pitchFamily="34" charset="0"/>
+                <a:ea typeface="Arial" pitchFamily="34" charset="-122"/>
+                <a:cs typeface="Arial" pitchFamily="34" charset="-120"/>
+              </a:rPr>
+              <a:t>▸ Pressure = Force ÷ Area</a:t>
+            </a:r>
+            <a:endParaRPr lang="en-US" sz="1500" dirty="0"/>
+          </a:p>
+        </p:txBody>
+      </p:sp>
+      <p:sp>
+        <p:nvSpPr>
+          <p:cNvPr id="9" name="Shape 7"/>
+          <p:cNvSpPr/>
+          <p:nvPr/>
+        </p:nvSpPr>
+        <p:spPr>
+          <a:xfrm>
+            <a:off x="731520" y="3474720"/>
+            <a:ext cx="10515600" cy="640080"/>
+          </a:xfrm>
+          <a:prstGeom prst="roundRect">
+            <a:avLst>
+              <a:gd name="adj" fmla="val 14286"/>
+            </a:avLst>
+          </a:prstGeom>
+          <a:solidFill>
+            <a:srgbClr val="FFFFFF"/>
+          </a:solidFill>
+          <a:ln w="6350">
+            <a:solidFill>
+              <a:srgbClr val="E5E2DC"/>
+            </a:solidFill>
+            <a:prstDash val="solid"/>
+          </a:ln>
+        </p:spPr>
+      </p:sp>
+      <p:sp>
+        <p:nvSpPr>
+          <p:cNvPr id="10" name="Text 8"/>
+          <p:cNvSpPr/>
+          <p:nvPr/>
+        </p:nvSpPr>
+        <p:spPr>
+          <a:xfrm>
+            <a:off x="1005840" y="3520440"/>
+            <a:ext cx="10058400" cy="548640"/>
+          </a:xfrm>
+          <a:prstGeom prst="rect">
+            <a:avLst/>
+          </a:prstGeom>
+          <a:noFill/>
+          <a:ln/>
+        </p:spPr>
+        <p:txBody>
+          <a:bodyPr wrap="square" rtlCol="0" anchor="ctr"/>
+          <a:lstStyle/>
+          <a:p>
+            <a:pPr indent="0" marL="0">
+              <a:buNone/>
+            </a:pPr>
+            <a:r>
+              <a:rPr lang="en-US" sz="1500" dirty="0">
+                <a:solidFill>
+                  <a:srgbClr val="3D3A36"/>
+                </a:solidFill>
+                <a:latin typeface="Arial" pitchFamily="34" charset="0"/>
+                <a:ea typeface="Arial" pitchFamily="34" charset="-122"/>
+                <a:cs typeface="Arial" pitchFamily="34" charset="-120"/>
+              </a:rPr>
+              <a:t>▸ Measured in Pascals (Pa) or N/m²</a:t>
+            </a:r>
+            <a:endParaRPr lang="en-US" sz="1500" dirty="0"/>
+          </a:p>
+        </p:txBody>
+      </p:sp>
+      <p:sp>
+        <p:nvSpPr>
+          <p:cNvPr id="11" name="Shape 9"/>
+          <p:cNvSpPr/>
+          <p:nvPr/>
+        </p:nvSpPr>
+        <p:spPr>
+          <a:xfrm>
+            <a:off x="731520" y="4251960"/>
+            <a:ext cx="10515600" cy="640080"/>
+          </a:xfrm>
+          <a:prstGeom prst="roundRect">
+            <a:avLst>
+              <a:gd name="adj" fmla="val 14286"/>
+            </a:avLst>
+          </a:prstGeom>
+          <a:solidFill>
+            <a:srgbClr val="F8F6F3"/>
+          </a:solidFill>
+          <a:ln w="6350">
+            <a:solidFill>
+              <a:srgbClr val="E5E2DC"/>
+            </a:solidFill>
+            <a:prstDash val="solid"/>
+          </a:ln>
+        </p:spPr>
+      </p:sp>
+      <p:sp>
+        <p:nvSpPr>
+          <p:cNvPr id="12" name="Text 10"/>
+          <p:cNvSpPr/>
+          <p:nvPr/>
+        </p:nvSpPr>
+        <p:spPr>
+          <a:xfrm>
+            <a:off x="1005840" y="4297680"/>
+            <a:ext cx="10058400" cy="548640"/>
+          </a:xfrm>
+          <a:prstGeom prst="rect">
+            <a:avLst/>
+          </a:prstGeom>
+          <a:noFill/>
+          <a:ln/>
+        </p:spPr>
+        <p:txBody>
+          <a:bodyPr wrap="square" rtlCol="0" anchor="ctr"/>
+          <a:lstStyle/>
+          <a:p>
+            <a:pPr indent="0" marL="0">
+              <a:buNone/>
+            </a:pPr>
+            <a:r>
+              <a:rPr lang="en-US" sz="1500" dirty="0">
+                <a:solidFill>
+                  <a:srgbClr val="3D3A36"/>
+                </a:solidFill>
+                <a:latin typeface="Arial" pitchFamily="34" charset="0"/>
+                <a:ea typeface="Arial" pitchFamily="34" charset="-122"/>
+                <a:cs typeface="Arial" pitchFamily="34" charset="-120"/>
+              </a:rPr>
+              <a:t>▸ 1 Pa = 1 N acting on 1 m²</a:t>
+            </a:r>
+            <a:endParaRPr lang="en-US" sz="1500" dirty="0"/>
+          </a:p>
+        </p:txBody>
+      </p:sp>
+      <p:sp>
+        <p:nvSpPr>
+          <p:cNvPr id="13" name="Shape 11"/>
+          <p:cNvSpPr/>
+          <p:nvPr/>
+        </p:nvSpPr>
+        <p:spPr>
+          <a:xfrm>
+            <a:off x="731520" y="5029200"/>
+            <a:ext cx="10515600" cy="640080"/>
+          </a:xfrm>
+          <a:prstGeom prst="roundRect">
+            <a:avLst>
+              <a:gd name="adj" fmla="val 14286"/>
+            </a:avLst>
+          </a:prstGeom>
+          <a:solidFill>
+            <a:srgbClr val="FFFFFF"/>
+          </a:solidFill>
+          <a:ln w="6350">
+            <a:solidFill>
+              <a:srgbClr val="E5E2DC"/>
+            </a:solidFill>
+            <a:prstDash val="solid"/>
+          </a:ln>
+        </p:spPr>
+      </p:sp>
+      <p:sp>
+        <p:nvSpPr>
+          <p:cNvPr id="14" name="Text 12"/>
+          <p:cNvSpPr/>
+          <p:nvPr/>
+        </p:nvSpPr>
+        <p:spPr>
+          <a:xfrm>
+            <a:off x="1005840" y="5074920"/>
+            <a:ext cx="10058400" cy="548640"/>
+          </a:xfrm>
+          <a:prstGeom prst="rect">
+            <a:avLst/>
+          </a:prstGeom>
+          <a:noFill/>
+          <a:ln/>
+        </p:spPr>
+        <p:txBody>
+          <a:bodyPr wrap="square" rtlCol="0" anchor="ctr"/>
+          <a:lstStyle/>
+          <a:p>
+            <a:pPr indent="0" marL="0">
+              <a:buNone/>
+            </a:pPr>
+            <a:r>
+              <a:rPr lang="en-US" sz="1500" dirty="0">
+                <a:solidFill>
+                  <a:srgbClr val="3D3A36"/>
+                </a:solidFill>
+                <a:latin typeface="Arial" pitchFamily="34" charset="0"/>
+                <a:ea typeface="Arial" pitchFamily="34" charset="-122"/>
+                <a:cs typeface="Arial" pitchFamily="34" charset="-120"/>
+              </a:rPr>
+              <a:t>▸ Same force over smaller area = MORE pressure</a:t>
+            </a:r>
+            <a:endParaRPr lang="en-US" sz="1500" dirty="0"/>
+          </a:p>
+        </p:txBody>
+      </p:sp>
+      <p:sp>
+        <p:nvSpPr>
+          <p:cNvPr id="15" name="Shape 13"/>
+          <p:cNvSpPr/>
+          <p:nvPr/>
+        </p:nvSpPr>
+        <p:spPr>
+          <a:xfrm>
+            <a:off x="0" y="6492240"/>
+            <a:ext cx="12188952" cy="365760"/>
+          </a:xfrm>
+          <a:prstGeom prst="rect">
+            <a:avLst/>
+          </a:prstGeom>
+          <a:solidFill>
+            <a:srgbClr val="1B2A4A"/>
+          </a:solidFill>
+          <a:ln/>
+        </p:spPr>
+      </p:sp>
+      <p:sp>
+        <p:nvSpPr>
+          <p:cNvPr id="16" name="Text 14"/>
+          <p:cNvSpPr/>
+          <p:nvPr/>
+        </p:nvSpPr>
+        <p:spPr>
+          <a:xfrm>
+            <a:off x="10058400" y="6537960"/>
             <a:ext cx="1828800" cy="274320"/>
           </a:xfrm>
           <a:prstGeom prst="rect">
@@ -3936,11 +3019,11 @@
             <a:r>
               <a:rPr lang="en-US" sz="900" dirty="0">
                 <a:solidFill>
-                  <a:srgbClr val="9B9690"/>
-                </a:solidFill>
-                <a:latin typeface="Calibri" pitchFamily="34" charset="0"/>
-                <a:ea typeface="Calibri" pitchFamily="34" charset="-122"/>
-                <a:cs typeface="Calibri" pitchFamily="34" charset="-120"/>
+                  <a:srgbClr val="E9C46A"/>
+                </a:solidFill>
+                <a:latin typeface="Arial" pitchFamily="34" charset="0"/>
+                <a:ea typeface="Arial" pitchFamily="34" charset="-122"/>
+                <a:cs typeface="Arial" pitchFamily="34" charset="-120"/>
               </a:rPr>
               <a:t>mrzocchi.com</a:t>
             </a:r>
@@ -3982,13 +3065,13 @@
         <p:spPr>
           <a:xfrm>
             <a:off x="0" y="0"/>
-            <a:ext cx="9144000" cy="54864"/>
-          </a:xfrm>
-          <a:prstGeom prst="rect">
-            <a:avLst/>
-          </a:prstGeom>
-          <a:solidFill>
-            <a:srgbClr val="C8372D"/>
+            <a:ext cx="12188952" cy="1097280"/>
+          </a:xfrm>
+          <a:prstGeom prst="rect">
+            <a:avLst/>
+          </a:prstGeom>
+          <a:solidFill>
+            <a:srgbClr val="1B2A4A"/>
           </a:solidFill>
           <a:ln/>
         </p:spPr>
@@ -4001,34 +3084,34 @@
         </p:nvSpPr>
         <p:spPr>
           <a:xfrm>
-            <a:off x="457200" y="228600"/>
-            <a:ext cx="8229600" cy="548640"/>
-          </a:xfrm>
-          <a:prstGeom prst="rect">
-            <a:avLst/>
-          </a:prstGeom>
-          <a:noFill/>
-          <a:ln/>
-        </p:spPr>
-        <p:txBody>
-          <a:bodyPr wrap="square" lIns="0" tIns="0" rIns="0" bIns="0" rtlCol="0" anchor="ctr"/>
+            <a:off x="548640" y="182880"/>
+            <a:ext cx="10972800" cy="731520"/>
+          </a:xfrm>
+          <a:prstGeom prst="rect">
+            <a:avLst/>
+          </a:prstGeom>
+          <a:noFill/>
+          <a:ln/>
+        </p:spPr>
+        <p:txBody>
+          <a:bodyPr wrap="square" rtlCol="0" anchor="ctr"/>
           <a:lstStyle/>
           <a:p>
             <a:pPr indent="0" marL="0">
               <a:buNone/>
             </a:pPr>
             <a:r>
-              <a:rPr lang="en-US" sz="2400" b="1" dirty="0">
-                <a:solidFill>
-                  <a:srgbClr val="1B2A4A"/>
+              <a:rPr lang="en-US" sz="2600" b="1" dirty="0">
+                <a:solidFill>
+                  <a:srgbClr val="FFFFFF"/>
                 </a:solidFill>
                 <a:latin typeface="Georgia" pitchFamily="34" charset="0"/>
                 <a:ea typeface="Georgia" pitchFamily="34" charset="-122"/>
                 <a:cs typeface="Georgia" pitchFamily="34" charset="-120"/>
               </a:rPr>
-              <a:t>Key Vocabulary</a:t>
-            </a:r>
-            <a:endParaRPr lang="en-US" sz="2400" dirty="0"/>
+              <a:t>✏️ Calculating Pressure</a:t>
+            </a:r>
+            <a:endParaRPr lang="en-US" sz="2600" dirty="0"/>
           </a:p>
         </p:txBody>
       </p:sp>
@@ -4040,10 +3123,76 @@
         </p:nvSpPr>
         <p:spPr>
           <a:xfrm>
-            <a:off x="457200" y="868680"/>
-            <a:ext cx="1828800" cy="27432"/>
-          </a:xfrm>
-          <a:prstGeom prst="rect">
+            <a:off x="548640" y="1371600"/>
+            <a:ext cx="10972800" cy="914400"/>
+          </a:xfrm>
+          <a:prstGeom prst="roundRect">
+            <a:avLst>
+              <a:gd name="adj" fmla="val 12000"/>
+            </a:avLst>
+          </a:prstGeom>
+          <a:solidFill>
+            <a:srgbClr val="FFF8E7"/>
+          </a:solidFill>
+          <a:ln w="19050">
+            <a:solidFill>
+              <a:srgbClr val="E9C46A"/>
+            </a:solidFill>
+            <a:prstDash val="solid"/>
+          </a:ln>
+        </p:spPr>
+      </p:sp>
+      <p:sp>
+        <p:nvSpPr>
+          <p:cNvPr id="5" name="Text 3"/>
+          <p:cNvSpPr/>
+          <p:nvPr/>
+        </p:nvSpPr>
+        <p:spPr>
+          <a:xfrm>
+            <a:off x="822960" y="1417320"/>
+            <a:ext cx="10424160" cy="822960"/>
+          </a:xfrm>
+          <a:prstGeom prst="rect">
+            <a:avLst/>
+          </a:prstGeom>
+          <a:noFill/>
+          <a:ln/>
+        </p:spPr>
+        <p:txBody>
+          <a:bodyPr wrap="square" rtlCol="0" anchor="ctr"/>
+          <a:lstStyle/>
+          <a:p>
+            <a:pPr indent="0" marL="0">
+              <a:buNone/>
+            </a:pPr>
+            <a:r>
+              <a:rPr lang="en-US" sz="1600" b="1" dirty="0">
+                <a:solidFill>
+                  <a:srgbClr val="1B2A4A"/>
+                </a:solidFill>
+                <a:latin typeface="Arial" pitchFamily="34" charset="0"/>
+                <a:ea typeface="Arial" pitchFamily="34" charset="-122"/>
+                <a:cs typeface="Arial" pitchFamily="34" charset="-120"/>
+              </a:rPr>
+              <a:t>A box weighs 600 N and sits on a base of 2 m². What pressure does it exert?</a:t>
+            </a:r>
+            <a:endParaRPr lang="en-US" sz="1600" dirty="0"/>
+          </a:p>
+        </p:txBody>
+      </p:sp>
+      <p:sp>
+        <p:nvSpPr>
+          <p:cNvPr id="6" name="Shape 4"/>
+          <p:cNvSpPr/>
+          <p:nvPr/>
+        </p:nvSpPr>
+        <p:spPr>
+          <a:xfrm>
+            <a:off x="731520" y="2651760"/>
+            <a:ext cx="365760" cy="365760"/>
+          </a:xfrm>
+          <a:prstGeom prst="ellipse">
             <a:avLst/>
           </a:prstGeom>
           <a:solidFill>
@@ -4054,14 +3203,53 @@
       </p:sp>
       <p:sp>
         <p:nvSpPr>
-          <p:cNvPr id="5" name="Text 3"/>
-          <p:cNvSpPr/>
-          <p:nvPr/>
-        </p:nvSpPr>
-        <p:spPr>
-          <a:xfrm>
-            <a:off x="457200" y="1188720"/>
-            <a:ext cx="8229600" cy="548640"/>
+          <p:cNvPr id="7" name="Text 5"/>
+          <p:cNvSpPr/>
+          <p:nvPr/>
+        </p:nvSpPr>
+        <p:spPr>
+          <a:xfrm>
+            <a:off x="731520" y="2651760"/>
+            <a:ext cx="365760" cy="365760"/>
+          </a:xfrm>
+          <a:prstGeom prst="rect">
+            <a:avLst/>
+          </a:prstGeom>
+          <a:noFill/>
+          <a:ln/>
+        </p:spPr>
+        <p:txBody>
+          <a:bodyPr wrap="square" rtlCol="0" anchor="ctr"/>
+          <a:lstStyle/>
+          <a:p>
+            <a:pPr algn="ctr" indent="0" marL="0">
+              <a:buNone/>
+            </a:pPr>
+            <a:r>
+              <a:rPr lang="en-US" sz="1200" b="1" dirty="0">
+                <a:solidFill>
+                  <a:srgbClr val="FFFFFF"/>
+                </a:solidFill>
+                <a:latin typeface="Arial" pitchFamily="34" charset="0"/>
+                <a:ea typeface="Arial" pitchFamily="34" charset="-122"/>
+                <a:cs typeface="Arial" pitchFamily="34" charset="-120"/>
+              </a:rPr>
+              <a:t>1</a:t>
+            </a:r>
+            <a:endParaRPr lang="en-US" sz="1200" dirty="0"/>
+          </a:p>
+        </p:txBody>
+      </p:sp>
+      <p:sp>
+        <p:nvSpPr>
+          <p:cNvPr id="8" name="Text 6"/>
+          <p:cNvSpPr/>
+          <p:nvPr/>
+        </p:nvSpPr>
+        <p:spPr>
+          <a:xfrm>
+            <a:off x="1280160" y="2606040"/>
+            <a:ext cx="10058400" cy="548640"/>
           </a:xfrm>
           <a:prstGeom prst="rect">
             <a:avLst/>
@@ -4077,30 +3265,89 @@
               <a:buNone/>
             </a:pPr>
             <a:r>
-              <a:rPr lang="en-US" sz="2800" b="1" dirty="0">
-                <a:solidFill>
-                  <a:srgbClr val="C8372D"/>
-                </a:solidFill>
-                <a:latin typeface="Georgia" pitchFamily="34" charset="0"/>
-                <a:ea typeface="Georgia" pitchFamily="34" charset="-122"/>
-                <a:cs typeface="Georgia" pitchFamily="34" charset="-120"/>
-              </a:rPr>
-              <a:t>Gravity</a:t>
-            </a:r>
-            <a:endParaRPr lang="en-US" sz="2800" dirty="0"/>
-          </a:p>
-        </p:txBody>
-      </p:sp>
-      <p:sp>
-        <p:nvSpPr>
-          <p:cNvPr id="6" name="Text 4"/>
-          <p:cNvSpPr/>
-          <p:nvPr/>
-        </p:nvSpPr>
-        <p:spPr>
-          <a:xfrm>
-            <a:off x="457200" y="1691640"/>
-            <a:ext cx="8229600" cy="365760"/>
+              <a:rPr lang="en-US" sz="1400" dirty="0">
+                <a:solidFill>
+                  <a:srgbClr val="3D3A36"/>
+                </a:solidFill>
+                <a:latin typeface="Arial" pitchFamily="34" charset="0"/>
+                <a:ea typeface="Arial" pitchFamily="34" charset="-122"/>
+                <a:cs typeface="Arial" pitchFamily="34" charset="-120"/>
+              </a:rPr>
+              <a:t>Write the formula: Pressure = Force ÷ Area</a:t>
+            </a:r>
+            <a:endParaRPr lang="en-US" sz="1400" dirty="0"/>
+          </a:p>
+        </p:txBody>
+      </p:sp>
+      <p:sp>
+        <p:nvSpPr>
+          <p:cNvPr id="9" name="Shape 7"/>
+          <p:cNvSpPr/>
+          <p:nvPr/>
+        </p:nvSpPr>
+        <p:spPr>
+          <a:xfrm>
+            <a:off x="731520" y="3337560"/>
+            <a:ext cx="365760" cy="365760"/>
+          </a:xfrm>
+          <a:prstGeom prst="ellipse">
+            <a:avLst/>
+          </a:prstGeom>
+          <a:solidFill>
+            <a:srgbClr val="C8372D"/>
+          </a:solidFill>
+          <a:ln/>
+        </p:spPr>
+      </p:sp>
+      <p:sp>
+        <p:nvSpPr>
+          <p:cNvPr id="10" name="Text 8"/>
+          <p:cNvSpPr/>
+          <p:nvPr/>
+        </p:nvSpPr>
+        <p:spPr>
+          <a:xfrm>
+            <a:off x="731520" y="3337560"/>
+            <a:ext cx="365760" cy="365760"/>
+          </a:xfrm>
+          <a:prstGeom prst="rect">
+            <a:avLst/>
+          </a:prstGeom>
+          <a:noFill/>
+          <a:ln/>
+        </p:spPr>
+        <p:txBody>
+          <a:bodyPr wrap="square" rtlCol="0" anchor="ctr"/>
+          <a:lstStyle/>
+          <a:p>
+            <a:pPr algn="ctr" indent="0" marL="0">
+              <a:buNone/>
+            </a:pPr>
+            <a:r>
+              <a:rPr lang="en-US" sz="1200" b="1" dirty="0">
+                <a:solidFill>
+                  <a:srgbClr val="FFFFFF"/>
+                </a:solidFill>
+                <a:latin typeface="Arial" pitchFamily="34" charset="0"/>
+                <a:ea typeface="Arial" pitchFamily="34" charset="-122"/>
+                <a:cs typeface="Arial" pitchFamily="34" charset="-120"/>
+              </a:rPr>
+              <a:t>2</a:t>
+            </a:r>
+            <a:endParaRPr lang="en-US" sz="1200" dirty="0"/>
+          </a:p>
+        </p:txBody>
+      </p:sp>
+      <p:sp>
+        <p:nvSpPr>
+          <p:cNvPr id="11" name="Text 9"/>
+          <p:cNvSpPr/>
+          <p:nvPr/>
+        </p:nvSpPr>
+        <p:spPr>
+          <a:xfrm>
+            <a:off x="1280160" y="3291840"/>
+            <a:ext cx="10058400" cy="548640"/>
           </a:xfrm>
           <a:prstGeom prst="rect">
             <a:avLst/>
@@ -4116,30 +3363,89 @@
               <a:buNone/>
             </a:pPr>
             <a:r>
-              <a:rPr lang="en-US" sz="1600" i="1" dirty="0">
-                <a:solidFill>
-                  <a:srgbClr val="9B9690"/>
-                </a:solidFill>
-                <a:latin typeface="Calibri" pitchFamily="34" charset="0"/>
-                <a:ea typeface="Calibri" pitchFamily="34" charset="-122"/>
-                <a:cs typeface="Calibri" pitchFamily="34" charset="-120"/>
-              </a:rPr>
-              <a:t>重力</a:t>
-            </a:r>
-            <a:endParaRPr lang="en-US" sz="1600" dirty="0"/>
-          </a:p>
-        </p:txBody>
-      </p:sp>
-      <p:sp>
-        <p:nvSpPr>
-          <p:cNvPr id="7" name="Text 5"/>
-          <p:cNvSpPr/>
-          <p:nvPr/>
-        </p:nvSpPr>
-        <p:spPr>
-          <a:xfrm>
-            <a:off x="457200" y="2194560"/>
-            <a:ext cx="8229600" cy="1828800"/>
+              <a:rPr lang="en-US" sz="1400" dirty="0">
+                <a:solidFill>
+                  <a:srgbClr val="3D3A36"/>
+                </a:solidFill>
+                <a:latin typeface="Arial" pitchFamily="34" charset="0"/>
+                <a:ea typeface="Arial" pitchFamily="34" charset="-122"/>
+                <a:cs typeface="Arial" pitchFamily="34" charset="-120"/>
+              </a:rPr>
+              <a:t>Substitute: P = 600 ÷ 2</a:t>
+            </a:r>
+            <a:endParaRPr lang="en-US" sz="1400" dirty="0"/>
+          </a:p>
+        </p:txBody>
+      </p:sp>
+      <p:sp>
+        <p:nvSpPr>
+          <p:cNvPr id="12" name="Shape 10"/>
+          <p:cNvSpPr/>
+          <p:nvPr/>
+        </p:nvSpPr>
+        <p:spPr>
+          <a:xfrm>
+            <a:off x="731520" y="4023360"/>
+            <a:ext cx="365760" cy="365760"/>
+          </a:xfrm>
+          <a:prstGeom prst="ellipse">
+            <a:avLst/>
+          </a:prstGeom>
+          <a:solidFill>
+            <a:srgbClr val="C8372D"/>
+          </a:solidFill>
+          <a:ln/>
+        </p:spPr>
+      </p:sp>
+      <p:sp>
+        <p:nvSpPr>
+          <p:cNvPr id="13" name="Text 11"/>
+          <p:cNvSpPr/>
+          <p:nvPr/>
+        </p:nvSpPr>
+        <p:spPr>
+          <a:xfrm>
+            <a:off x="731520" y="4023360"/>
+            <a:ext cx="365760" cy="365760"/>
+          </a:xfrm>
+          <a:prstGeom prst="rect">
+            <a:avLst/>
+          </a:prstGeom>
+          <a:noFill/>
+          <a:ln/>
+        </p:spPr>
+        <p:txBody>
+          <a:bodyPr wrap="square" rtlCol="0" anchor="ctr"/>
+          <a:lstStyle/>
+          <a:p>
+            <a:pPr algn="ctr" indent="0" marL="0">
+              <a:buNone/>
+            </a:pPr>
+            <a:r>
+              <a:rPr lang="en-US" sz="1200" b="1" dirty="0">
+                <a:solidFill>
+                  <a:srgbClr val="FFFFFF"/>
+                </a:solidFill>
+                <a:latin typeface="Arial" pitchFamily="34" charset="0"/>
+                <a:ea typeface="Arial" pitchFamily="34" charset="-122"/>
+                <a:cs typeface="Arial" pitchFamily="34" charset="-120"/>
+              </a:rPr>
+              <a:t>3</a:t>
+            </a:r>
+            <a:endParaRPr lang="en-US" sz="1200" dirty="0"/>
+          </a:p>
+        </p:txBody>
+      </p:sp>
+      <p:sp>
+        <p:nvSpPr>
+          <p:cNvPr id="14" name="Text 12"/>
+          <p:cNvSpPr/>
+          <p:nvPr/>
+        </p:nvSpPr>
+        <p:spPr>
+          <a:xfrm>
+            <a:off x="1280160" y="3977640"/>
+            <a:ext cx="10058400" cy="548640"/>
           </a:xfrm>
           <a:prstGeom prst="rect">
             <a:avLst/>
@@ -4152,35 +3458,150 @@
           <a:lstStyle/>
           <a:p>
             <a:pPr indent="0" marL="0">
-              <a:lnSpc>
-                <a:spcPct val="150000"/>
-              </a:lnSpc>
-              <a:buNone/>
-            </a:pPr>
-            <a:r>
-              <a:rPr lang="en-US" sz="1800" dirty="0">
-                <a:solidFill>
-                  <a:srgbClr val="6B6660"/>
-                </a:solidFill>
-                <a:latin typeface="Calibri" pitchFamily="34" charset="0"/>
-                <a:ea typeface="Calibri" pitchFamily="34" charset="-122"/>
-                <a:cs typeface="Calibri" pitchFamily="34" charset="-120"/>
-              </a:rPr>
-              <a:t>A force of attraction between any objects with mass. Pulls everything towards Earth's centre.</a:t>
-            </a:r>
-            <a:endParaRPr lang="en-US" sz="1800" dirty="0"/>
-          </a:p>
-        </p:txBody>
-      </p:sp>
-      <p:sp>
-        <p:nvSpPr>
-          <p:cNvPr id="8" name="Text 6"/>
-          <p:cNvSpPr/>
-          <p:nvPr/>
-        </p:nvSpPr>
-        <p:spPr>
-          <a:xfrm>
-            <a:off x="7315200" y="4754880"/>
+              <a:buNone/>
+            </a:pPr>
+            <a:r>
+              <a:rPr lang="en-US" sz="1400" dirty="0">
+                <a:solidFill>
+                  <a:srgbClr val="3D3A36"/>
+                </a:solidFill>
+                <a:latin typeface="Arial" pitchFamily="34" charset="0"/>
+                <a:ea typeface="Arial" pitchFamily="34" charset="-122"/>
+                <a:cs typeface="Arial" pitchFamily="34" charset="-120"/>
+              </a:rPr>
+              <a:t>Calculate: P = 300 Pa</a:t>
+            </a:r>
+            <a:endParaRPr lang="en-US" sz="1400" dirty="0"/>
+          </a:p>
+        </p:txBody>
+      </p:sp>
+      <p:sp>
+        <p:nvSpPr>
+          <p:cNvPr id="15" name="Shape 13"/>
+          <p:cNvSpPr/>
+          <p:nvPr/>
+        </p:nvSpPr>
+        <p:spPr>
+          <a:xfrm>
+            <a:off x="731520" y="4709160"/>
+            <a:ext cx="365760" cy="365760"/>
+          </a:xfrm>
+          <a:prstGeom prst="ellipse">
+            <a:avLst/>
+          </a:prstGeom>
+          <a:solidFill>
+            <a:srgbClr val="C8372D"/>
+          </a:solidFill>
+          <a:ln/>
+        </p:spPr>
+      </p:sp>
+      <p:sp>
+        <p:nvSpPr>
+          <p:cNvPr id="16" name="Text 14"/>
+          <p:cNvSpPr/>
+          <p:nvPr/>
+        </p:nvSpPr>
+        <p:spPr>
+          <a:xfrm>
+            <a:off x="731520" y="4709160"/>
+            <a:ext cx="365760" cy="365760"/>
+          </a:xfrm>
+          <a:prstGeom prst="rect">
+            <a:avLst/>
+          </a:prstGeom>
+          <a:noFill/>
+          <a:ln/>
+        </p:spPr>
+        <p:txBody>
+          <a:bodyPr wrap="square" rtlCol="0" anchor="ctr"/>
+          <a:lstStyle/>
+          <a:p>
+            <a:pPr algn="ctr" indent="0" marL="0">
+              <a:buNone/>
+            </a:pPr>
+            <a:r>
+              <a:rPr lang="en-US" sz="1200" b="1" dirty="0">
+                <a:solidFill>
+                  <a:srgbClr val="FFFFFF"/>
+                </a:solidFill>
+                <a:latin typeface="Arial" pitchFamily="34" charset="0"/>
+                <a:ea typeface="Arial" pitchFamily="34" charset="-122"/>
+                <a:cs typeface="Arial" pitchFamily="34" charset="-120"/>
+              </a:rPr>
+              <a:t>4</a:t>
+            </a:r>
+            <a:endParaRPr lang="en-US" sz="1200" dirty="0"/>
+          </a:p>
+        </p:txBody>
+      </p:sp>
+      <p:sp>
+        <p:nvSpPr>
+          <p:cNvPr id="17" name="Text 15"/>
+          <p:cNvSpPr/>
+          <p:nvPr/>
+        </p:nvSpPr>
+        <p:spPr>
+          <a:xfrm>
+            <a:off x="1280160" y="4663440"/>
+            <a:ext cx="10058400" cy="548640"/>
+          </a:xfrm>
+          <a:prstGeom prst="rect">
+            <a:avLst/>
+          </a:prstGeom>
+          <a:noFill/>
+          <a:ln/>
+        </p:spPr>
+        <p:txBody>
+          <a:bodyPr wrap="square" rtlCol="0" anchor="ctr"/>
+          <a:lstStyle/>
+          <a:p>
+            <a:pPr indent="0" marL="0">
+              <a:buNone/>
+            </a:pPr>
+            <a:r>
+              <a:rPr lang="en-US" sz="1400" dirty="0">
+                <a:solidFill>
+                  <a:srgbClr val="3D3A36"/>
+                </a:solidFill>
+                <a:latin typeface="Arial" pitchFamily="34" charset="0"/>
+                <a:ea typeface="Arial" pitchFamily="34" charset="-122"/>
+                <a:cs typeface="Arial" pitchFamily="34" charset="-120"/>
+              </a:rPr>
+              <a:t>300 Pascals of pressure on the ground</a:t>
+            </a:r>
+            <a:endParaRPr lang="en-US" sz="1400" dirty="0"/>
+          </a:p>
+        </p:txBody>
+      </p:sp>
+      <p:sp>
+        <p:nvSpPr>
+          <p:cNvPr id="18" name="Shape 16"/>
+          <p:cNvSpPr/>
+          <p:nvPr/>
+        </p:nvSpPr>
+        <p:spPr>
+          <a:xfrm>
+            <a:off x="0" y="6492240"/>
+            <a:ext cx="12188952" cy="365760"/>
+          </a:xfrm>
+          <a:prstGeom prst="rect">
+            <a:avLst/>
+          </a:prstGeom>
+          <a:solidFill>
+            <a:srgbClr val="1B2A4A"/>
+          </a:solidFill>
+          <a:ln/>
+        </p:spPr>
+      </p:sp>
+      <p:sp>
+        <p:nvSpPr>
+          <p:cNvPr id="19" name="Text 17"/>
+          <p:cNvSpPr/>
+          <p:nvPr/>
+        </p:nvSpPr>
+        <p:spPr>
+          <a:xfrm>
+            <a:off x="10058400" y="6537960"/>
             <a:ext cx="1828800" cy="274320"/>
           </a:xfrm>
           <a:prstGeom prst="rect">
@@ -4199,11 +3620,11 @@
             <a:r>
               <a:rPr lang="en-US" sz="900" dirty="0">
                 <a:solidFill>
-                  <a:srgbClr val="9B9690"/>
-                </a:solidFill>
-                <a:latin typeface="Calibri" pitchFamily="34" charset="0"/>
-                <a:ea typeface="Calibri" pitchFamily="34" charset="-122"/>
-                <a:cs typeface="Calibri" pitchFamily="34" charset="-120"/>
+                  <a:srgbClr val="E9C46A"/>
+                </a:solidFill>
+                <a:latin typeface="Arial" pitchFamily="34" charset="0"/>
+                <a:ea typeface="Arial" pitchFamily="34" charset="-122"/>
+                <a:cs typeface="Arial" pitchFamily="34" charset="-120"/>
               </a:rPr>
               <a:t>mrzocchi.com</a:t>
             </a:r>
@@ -4245,13 +3666,13 @@
         <p:spPr>
           <a:xfrm>
             <a:off x="0" y="0"/>
-            <a:ext cx="9144000" cy="54864"/>
-          </a:xfrm>
-          <a:prstGeom prst="rect">
-            <a:avLst/>
-          </a:prstGeom>
-          <a:solidFill>
-            <a:srgbClr val="C8372D"/>
+            <a:ext cx="12188952" cy="1097280"/>
+          </a:xfrm>
+          <a:prstGeom prst="rect">
+            <a:avLst/>
+          </a:prstGeom>
+          <a:solidFill>
+            <a:srgbClr val="1B2A4A"/>
           </a:solidFill>
           <a:ln/>
         </p:spPr>
@@ -4264,34 +3685,34 @@
         </p:nvSpPr>
         <p:spPr>
           <a:xfrm>
-            <a:off x="457200" y="228600"/>
-            <a:ext cx="8229600" cy="548640"/>
-          </a:xfrm>
-          <a:prstGeom prst="rect">
-            <a:avLst/>
-          </a:prstGeom>
-          <a:noFill/>
-          <a:ln/>
-        </p:spPr>
-        <p:txBody>
-          <a:bodyPr wrap="square" lIns="0" tIns="0" rIns="0" bIns="0" rtlCol="0" anchor="ctr"/>
+            <a:off x="548640" y="182880"/>
+            <a:ext cx="10972800" cy="731520"/>
+          </a:xfrm>
+          <a:prstGeom prst="rect">
+            <a:avLst/>
+          </a:prstGeom>
+          <a:noFill/>
+          <a:ln/>
+        </p:spPr>
+        <p:txBody>
+          <a:bodyPr wrap="square" rtlCol="0" anchor="ctr"/>
           <a:lstStyle/>
           <a:p>
             <a:pPr indent="0" marL="0">
               <a:buNone/>
             </a:pPr>
             <a:r>
-              <a:rPr lang="en-US" sz="2400" b="1" dirty="0">
-                <a:solidFill>
-                  <a:srgbClr val="1B2A4A"/>
+              <a:rPr lang="en-US" sz="2600" b="1" dirty="0">
+                <a:solidFill>
+                  <a:srgbClr val="FFFFFF"/>
                 </a:solidFill>
                 <a:latin typeface="Georgia" pitchFamily="34" charset="0"/>
                 <a:ea typeface="Georgia" pitchFamily="34" charset="-122"/>
                 <a:cs typeface="Georgia" pitchFamily="34" charset="-120"/>
               </a:rPr>
-              <a:t>Key Vocabulary</a:t>
-            </a:r>
-            <a:endParaRPr lang="en-US" sz="2400" dirty="0"/>
+              <a:t>Increasing vs Decreasing Pressure</a:t>
+            </a:r>
+            <a:endParaRPr lang="en-US" sz="2600" dirty="0"/>
           </a:p>
         </p:txBody>
       </p:sp>
@@ -4303,8 +3724,35 @@
         </p:nvSpPr>
         <p:spPr>
           <a:xfrm>
-            <a:off x="457200" y="868680"/>
-            <a:ext cx="1828800" cy="27432"/>
+            <a:off x="548640" y="1371600"/>
+            <a:ext cx="5303520" cy="4754880"/>
+          </a:xfrm>
+          <a:prstGeom prst="roundRect">
+            <a:avLst>
+              <a:gd name="adj" fmla="val 2885"/>
+            </a:avLst>
+          </a:prstGeom>
+          <a:solidFill>
+            <a:srgbClr val="FFFFFF"/>
+          </a:solidFill>
+          <a:ln w="19050">
+            <a:solidFill>
+              <a:srgbClr val="C8372D"/>
+            </a:solidFill>
+            <a:prstDash val="solid"/>
+          </a:ln>
+        </p:spPr>
+      </p:sp>
+      <p:sp>
+        <p:nvSpPr>
+          <p:cNvPr id="5" name="Shape 3"/>
+          <p:cNvSpPr/>
+          <p:nvPr/>
+        </p:nvSpPr>
+        <p:spPr>
+          <a:xfrm>
+            <a:off x="548640" y="1371600"/>
+            <a:ext cx="5303520" cy="502920"/>
           </a:xfrm>
           <a:prstGeom prst="rect">
             <a:avLst/>
@@ -4317,14 +3765,53 @@
       </p:sp>
       <p:sp>
         <p:nvSpPr>
-          <p:cNvPr id="5" name="Text 3"/>
-          <p:cNvSpPr/>
-          <p:nvPr/>
-        </p:nvSpPr>
-        <p:spPr>
-          <a:xfrm>
-            <a:off x="457200" y="1188720"/>
-            <a:ext cx="8229600" cy="548640"/>
+          <p:cNvPr id="6" name="Text 4"/>
+          <p:cNvSpPr/>
+          <p:nvPr/>
+        </p:nvSpPr>
+        <p:spPr>
+          <a:xfrm>
+            <a:off x="731520" y="1371600"/>
+            <a:ext cx="4937760" cy="502920"/>
+          </a:xfrm>
+          <a:prstGeom prst="rect">
+            <a:avLst/>
+          </a:prstGeom>
+          <a:noFill/>
+          <a:ln/>
+        </p:spPr>
+        <p:txBody>
+          <a:bodyPr wrap="square" rtlCol="0" anchor="ctr"/>
+          <a:lstStyle/>
+          <a:p>
+            <a:pPr algn="ctr" indent="0" marL="0">
+              <a:buNone/>
+            </a:pPr>
+            <a:r>
+              <a:rPr lang="en-US" sz="1500" b="1" dirty="0">
+                <a:solidFill>
+                  <a:srgbClr val="FFFFFF"/>
+                </a:solidFill>
+                <a:latin typeface="Arial" pitchFamily="34" charset="0"/>
+                <a:ea typeface="Arial" pitchFamily="34" charset="-122"/>
+                <a:cs typeface="Arial" pitchFamily="34" charset="-120"/>
+              </a:rPr>
+              <a:t>Increase Pressure</a:t>
+            </a:r>
+            <a:endParaRPr lang="en-US" sz="1500" dirty="0"/>
+          </a:p>
+        </p:txBody>
+      </p:sp>
+      <p:sp>
+        <p:nvSpPr>
+          <p:cNvPr id="7" name="Text 5"/>
+          <p:cNvSpPr/>
+          <p:nvPr/>
+        </p:nvSpPr>
+        <p:spPr>
+          <a:xfrm>
+            <a:off x="914400" y="2103120"/>
+            <a:ext cx="4572000" cy="502920"/>
           </a:xfrm>
           <a:prstGeom prst="rect">
             <a:avLst/>
@@ -4340,30 +3827,30 @@
               <a:buNone/>
             </a:pPr>
             <a:r>
-              <a:rPr lang="en-US" sz="2800" b="1" dirty="0">
-                <a:solidFill>
-                  <a:srgbClr val="C8372D"/>
-                </a:solidFill>
-                <a:latin typeface="Georgia" pitchFamily="34" charset="0"/>
-                <a:ea typeface="Georgia" pitchFamily="34" charset="-122"/>
-                <a:cs typeface="Georgia" pitchFamily="34" charset="-120"/>
-              </a:rPr>
-              <a:t>Friction</a:t>
-            </a:r>
-            <a:endParaRPr lang="en-US" sz="2800" dirty="0"/>
-          </a:p>
-        </p:txBody>
-      </p:sp>
-      <p:sp>
-        <p:nvSpPr>
-          <p:cNvPr id="6" name="Text 4"/>
-          <p:cNvSpPr/>
-          <p:nvPr/>
-        </p:nvSpPr>
-        <p:spPr>
-          <a:xfrm>
-            <a:off x="457200" y="1691640"/>
-            <a:ext cx="8229600" cy="365760"/>
+              <a:rPr lang="en-US" sz="1300" dirty="0">
+                <a:solidFill>
+                  <a:srgbClr val="3D3A36"/>
+                </a:solidFill>
+                <a:latin typeface="Arial" pitchFamily="34" charset="0"/>
+                <a:ea typeface="Arial" pitchFamily="34" charset="-122"/>
+                <a:cs typeface="Arial" pitchFamily="34" charset="-120"/>
+              </a:rPr>
+              <a:t>▸ Make the area smaller</a:t>
+            </a:r>
+            <a:endParaRPr lang="en-US" sz="1300" dirty="0"/>
+          </a:p>
+        </p:txBody>
+      </p:sp>
+      <p:sp>
+        <p:nvSpPr>
+          <p:cNvPr id="8" name="Text 6"/>
+          <p:cNvSpPr/>
+          <p:nvPr/>
+        </p:nvSpPr>
+        <p:spPr>
+          <a:xfrm>
+            <a:off x="914400" y="2697480"/>
+            <a:ext cx="4572000" cy="502920"/>
           </a:xfrm>
           <a:prstGeom prst="rect">
             <a:avLst/>
@@ -4379,30 +3866,30 @@
               <a:buNone/>
             </a:pPr>
             <a:r>
-              <a:rPr lang="en-US" sz="1600" i="1" dirty="0">
-                <a:solidFill>
-                  <a:srgbClr val="9B9690"/>
-                </a:solidFill>
-                <a:latin typeface="Calibri" pitchFamily="34" charset="0"/>
-                <a:ea typeface="Calibri" pitchFamily="34" charset="-122"/>
-                <a:cs typeface="Calibri" pitchFamily="34" charset="-120"/>
-              </a:rPr>
-              <a:t>摩擦力</a:t>
-            </a:r>
-            <a:endParaRPr lang="en-US" sz="1600" dirty="0"/>
-          </a:p>
-        </p:txBody>
-      </p:sp>
-      <p:sp>
-        <p:nvSpPr>
-          <p:cNvPr id="7" name="Text 5"/>
-          <p:cNvSpPr/>
-          <p:nvPr/>
-        </p:nvSpPr>
-        <p:spPr>
-          <a:xfrm>
-            <a:off x="457200" y="2194560"/>
-            <a:ext cx="8229600" cy="1828800"/>
+              <a:rPr lang="en-US" sz="1300" dirty="0">
+                <a:solidFill>
+                  <a:srgbClr val="3D3A36"/>
+                </a:solidFill>
+                <a:latin typeface="Arial" pitchFamily="34" charset="0"/>
+                <a:ea typeface="Arial" pitchFamily="34" charset="-122"/>
+                <a:cs typeface="Arial" pitchFamily="34" charset="-120"/>
+              </a:rPr>
+              <a:t>▸ Knife blade: thin edge, same force</a:t>
+            </a:r>
+            <a:endParaRPr lang="en-US" sz="1300" dirty="0"/>
+          </a:p>
+        </p:txBody>
+      </p:sp>
+      <p:sp>
+        <p:nvSpPr>
+          <p:cNvPr id="9" name="Text 7"/>
+          <p:cNvSpPr/>
+          <p:nvPr/>
+        </p:nvSpPr>
+        <p:spPr>
+          <a:xfrm>
+            <a:off x="914400" y="3291840"/>
+            <a:ext cx="4572000" cy="502920"/>
           </a:xfrm>
           <a:prstGeom prst="rect">
             <a:avLst/>
@@ -4415,35 +3902,411 @@
           <a:lstStyle/>
           <a:p>
             <a:pPr indent="0" marL="0">
-              <a:lnSpc>
-                <a:spcPct val="150000"/>
-              </a:lnSpc>
-              <a:buNone/>
-            </a:pPr>
-            <a:r>
-              <a:rPr lang="en-US" sz="1800" dirty="0">
-                <a:solidFill>
-                  <a:srgbClr val="6B6660"/>
-                </a:solidFill>
-                <a:latin typeface="Calibri" pitchFamily="34" charset="0"/>
-                <a:ea typeface="Calibri" pitchFamily="34" charset="-122"/>
-                <a:cs typeface="Calibri" pitchFamily="34" charset="-120"/>
-              </a:rPr>
-              <a:t>A force opposing motion between two surfaces. Converts kinetic energy to heat.</a:t>
-            </a:r>
-            <a:endParaRPr lang="en-US" sz="1800" dirty="0"/>
-          </a:p>
-        </p:txBody>
-      </p:sp>
-      <p:sp>
-        <p:nvSpPr>
-          <p:cNvPr id="8" name="Text 6"/>
-          <p:cNvSpPr/>
-          <p:nvPr/>
-        </p:nvSpPr>
-        <p:spPr>
-          <a:xfrm>
-            <a:off x="7315200" y="4754880"/>
+              <a:buNone/>
+            </a:pPr>
+            <a:r>
+              <a:rPr lang="en-US" sz="1300" dirty="0">
+                <a:solidFill>
+                  <a:srgbClr val="3D3A36"/>
+                </a:solidFill>
+                <a:latin typeface="Arial" pitchFamily="34" charset="0"/>
+                <a:ea typeface="Arial" pitchFamily="34" charset="-122"/>
+                <a:cs typeface="Arial" pitchFamily="34" charset="-120"/>
+              </a:rPr>
+              <a:t>▸ Stiletto heels: tiny area, lots of pressure</a:t>
+            </a:r>
+            <a:endParaRPr lang="en-US" sz="1300" dirty="0"/>
+          </a:p>
+        </p:txBody>
+      </p:sp>
+      <p:sp>
+        <p:nvSpPr>
+          <p:cNvPr id="10" name="Text 8"/>
+          <p:cNvSpPr/>
+          <p:nvPr/>
+        </p:nvSpPr>
+        <p:spPr>
+          <a:xfrm>
+            <a:off x="914400" y="3886200"/>
+            <a:ext cx="4572000" cy="502920"/>
+          </a:xfrm>
+          <a:prstGeom prst="rect">
+            <a:avLst/>
+          </a:prstGeom>
+          <a:noFill/>
+          <a:ln/>
+        </p:spPr>
+        <p:txBody>
+          <a:bodyPr wrap="square" rtlCol="0" anchor="ctr"/>
+          <a:lstStyle/>
+          <a:p>
+            <a:pPr indent="0" marL="0">
+              <a:buNone/>
+            </a:pPr>
+            <a:r>
+              <a:rPr lang="en-US" sz="1300" dirty="0">
+                <a:solidFill>
+                  <a:srgbClr val="3D3A36"/>
+                </a:solidFill>
+                <a:latin typeface="Arial" pitchFamily="34" charset="0"/>
+                <a:ea typeface="Arial" pitchFamily="34" charset="-122"/>
+                <a:cs typeface="Arial" pitchFamily="34" charset="-120"/>
+              </a:rPr>
+              <a:t>▸ Nails and pins: pointed tip</a:t>
+            </a:r>
+            <a:endParaRPr lang="en-US" sz="1300" dirty="0"/>
+          </a:p>
+        </p:txBody>
+      </p:sp>
+      <p:sp>
+        <p:nvSpPr>
+          <p:cNvPr id="11" name="Text 9"/>
+          <p:cNvSpPr/>
+          <p:nvPr/>
+        </p:nvSpPr>
+        <p:spPr>
+          <a:xfrm>
+            <a:off x="914400" y="4480560"/>
+            <a:ext cx="4572000" cy="502920"/>
+          </a:xfrm>
+          <a:prstGeom prst="rect">
+            <a:avLst/>
+          </a:prstGeom>
+          <a:noFill/>
+          <a:ln/>
+        </p:spPr>
+        <p:txBody>
+          <a:bodyPr wrap="square" rtlCol="0" anchor="ctr"/>
+          <a:lstStyle/>
+          <a:p>
+            <a:pPr indent="0" marL="0">
+              <a:buNone/>
+            </a:pPr>
+            <a:r>
+              <a:rPr lang="en-US" sz="1300" dirty="0">
+                <a:solidFill>
+                  <a:srgbClr val="3D3A36"/>
+                </a:solidFill>
+                <a:latin typeface="Arial" pitchFamily="34" charset="0"/>
+                <a:ea typeface="Arial" pitchFamily="34" charset="-122"/>
+                <a:cs typeface="Arial" pitchFamily="34" charset="-120"/>
+              </a:rPr>
+              <a:t>▸ Drawing pins: small contact area</a:t>
+            </a:r>
+            <a:endParaRPr lang="en-US" sz="1300" dirty="0"/>
+          </a:p>
+        </p:txBody>
+      </p:sp>
+      <p:sp>
+        <p:nvSpPr>
+          <p:cNvPr id="12" name="Shape 10"/>
+          <p:cNvSpPr/>
+          <p:nvPr/>
+        </p:nvSpPr>
+        <p:spPr>
+          <a:xfrm>
+            <a:off x="6309360" y="1371600"/>
+            <a:ext cx="5303520" cy="4754880"/>
+          </a:xfrm>
+          <a:prstGeom prst="roundRect">
+            <a:avLst>
+              <a:gd name="adj" fmla="val 2885"/>
+            </a:avLst>
+          </a:prstGeom>
+          <a:solidFill>
+            <a:srgbClr val="FFFFFF"/>
+          </a:solidFill>
+          <a:ln w="19050">
+            <a:solidFill>
+              <a:srgbClr val="E9C46A"/>
+            </a:solidFill>
+            <a:prstDash val="solid"/>
+          </a:ln>
+        </p:spPr>
+      </p:sp>
+      <p:sp>
+        <p:nvSpPr>
+          <p:cNvPr id="13" name="Shape 11"/>
+          <p:cNvSpPr/>
+          <p:nvPr/>
+        </p:nvSpPr>
+        <p:spPr>
+          <a:xfrm>
+            <a:off x="6309360" y="1371600"/>
+            <a:ext cx="5303520" cy="502920"/>
+          </a:xfrm>
+          <a:prstGeom prst="rect">
+            <a:avLst/>
+          </a:prstGeom>
+          <a:solidFill>
+            <a:srgbClr val="E9C46A"/>
+          </a:solidFill>
+          <a:ln/>
+        </p:spPr>
+      </p:sp>
+      <p:sp>
+        <p:nvSpPr>
+          <p:cNvPr id="14" name="Text 12"/>
+          <p:cNvSpPr/>
+          <p:nvPr/>
+        </p:nvSpPr>
+        <p:spPr>
+          <a:xfrm>
+            <a:off x="6492240" y="1371600"/>
+            <a:ext cx="4937760" cy="502920"/>
+          </a:xfrm>
+          <a:prstGeom prst="rect">
+            <a:avLst/>
+          </a:prstGeom>
+          <a:noFill/>
+          <a:ln/>
+        </p:spPr>
+        <p:txBody>
+          <a:bodyPr wrap="square" rtlCol="0" anchor="ctr"/>
+          <a:lstStyle/>
+          <a:p>
+            <a:pPr algn="ctr" indent="0" marL="0">
+              <a:buNone/>
+            </a:pPr>
+            <a:r>
+              <a:rPr lang="en-US" sz="1500" b="1" dirty="0">
+                <a:solidFill>
+                  <a:srgbClr val="1B2A4A"/>
+                </a:solidFill>
+                <a:latin typeface="Arial" pitchFamily="34" charset="0"/>
+                <a:ea typeface="Arial" pitchFamily="34" charset="-122"/>
+                <a:cs typeface="Arial" pitchFamily="34" charset="-120"/>
+              </a:rPr>
+              <a:t>Decrease Pressure</a:t>
+            </a:r>
+            <a:endParaRPr lang="en-US" sz="1500" dirty="0"/>
+          </a:p>
+        </p:txBody>
+      </p:sp>
+      <p:sp>
+        <p:nvSpPr>
+          <p:cNvPr id="15" name="Text 13"/>
+          <p:cNvSpPr/>
+          <p:nvPr/>
+        </p:nvSpPr>
+        <p:spPr>
+          <a:xfrm>
+            <a:off x="6583680" y="2103120"/>
+            <a:ext cx="4572000" cy="502920"/>
+          </a:xfrm>
+          <a:prstGeom prst="rect">
+            <a:avLst/>
+          </a:prstGeom>
+          <a:noFill/>
+          <a:ln/>
+        </p:spPr>
+        <p:txBody>
+          <a:bodyPr wrap="square" rtlCol="0" anchor="ctr"/>
+          <a:lstStyle/>
+          <a:p>
+            <a:pPr indent="0" marL="0">
+              <a:buNone/>
+            </a:pPr>
+            <a:r>
+              <a:rPr lang="en-US" sz="1300" dirty="0">
+                <a:solidFill>
+                  <a:srgbClr val="3D3A36"/>
+                </a:solidFill>
+                <a:latin typeface="Arial" pitchFamily="34" charset="0"/>
+                <a:ea typeface="Arial" pitchFamily="34" charset="-122"/>
+                <a:cs typeface="Arial" pitchFamily="34" charset="-120"/>
+              </a:rPr>
+              <a:t>▸ Make the area bigger</a:t>
+            </a:r>
+            <a:endParaRPr lang="en-US" sz="1300" dirty="0"/>
+          </a:p>
+        </p:txBody>
+      </p:sp>
+      <p:sp>
+        <p:nvSpPr>
+          <p:cNvPr id="16" name="Text 14"/>
+          <p:cNvSpPr/>
+          <p:nvPr/>
+        </p:nvSpPr>
+        <p:spPr>
+          <a:xfrm>
+            <a:off x="6583680" y="2697480"/>
+            <a:ext cx="4572000" cy="502920"/>
+          </a:xfrm>
+          <a:prstGeom prst="rect">
+            <a:avLst/>
+          </a:prstGeom>
+          <a:noFill/>
+          <a:ln/>
+        </p:spPr>
+        <p:txBody>
+          <a:bodyPr wrap="square" rtlCol="0" anchor="ctr"/>
+          <a:lstStyle/>
+          <a:p>
+            <a:pPr indent="0" marL="0">
+              <a:buNone/>
+            </a:pPr>
+            <a:r>
+              <a:rPr lang="en-US" sz="1300" dirty="0">
+                <a:solidFill>
+                  <a:srgbClr val="3D3A36"/>
+                </a:solidFill>
+                <a:latin typeface="Arial" pitchFamily="34" charset="0"/>
+                <a:ea typeface="Arial" pitchFamily="34" charset="-122"/>
+                <a:cs typeface="Arial" pitchFamily="34" charset="-120"/>
+              </a:rPr>
+              <a:t>▸ Snowshoes: spread weight over large area</a:t>
+            </a:r>
+            <a:endParaRPr lang="en-US" sz="1300" dirty="0"/>
+          </a:p>
+        </p:txBody>
+      </p:sp>
+      <p:sp>
+        <p:nvSpPr>
+          <p:cNvPr id="17" name="Text 15"/>
+          <p:cNvSpPr/>
+          <p:nvPr/>
+        </p:nvSpPr>
+        <p:spPr>
+          <a:xfrm>
+            <a:off x="6583680" y="3291840"/>
+            <a:ext cx="4572000" cy="502920"/>
+          </a:xfrm>
+          <a:prstGeom prst="rect">
+            <a:avLst/>
+          </a:prstGeom>
+          <a:noFill/>
+          <a:ln/>
+        </p:spPr>
+        <p:txBody>
+          <a:bodyPr wrap="square" rtlCol="0" anchor="ctr"/>
+          <a:lstStyle/>
+          <a:p>
+            <a:pPr indent="0" marL="0">
+              <a:buNone/>
+            </a:pPr>
+            <a:r>
+              <a:rPr lang="en-US" sz="1300" dirty="0">
+                <a:solidFill>
+                  <a:srgbClr val="3D3A36"/>
+                </a:solidFill>
+                <a:latin typeface="Arial" pitchFamily="34" charset="0"/>
+                <a:ea typeface="Arial" pitchFamily="34" charset="-122"/>
+                <a:cs typeface="Arial" pitchFamily="34" charset="-120"/>
+              </a:rPr>
+              <a:t>▸ Wide tyres on sand vehicles</a:t>
+            </a:r>
+            <a:endParaRPr lang="en-US" sz="1300" dirty="0"/>
+          </a:p>
+        </p:txBody>
+      </p:sp>
+      <p:sp>
+        <p:nvSpPr>
+          <p:cNvPr id="18" name="Text 16"/>
+          <p:cNvSpPr/>
+          <p:nvPr/>
+        </p:nvSpPr>
+        <p:spPr>
+          <a:xfrm>
+            <a:off x="6583680" y="3886200"/>
+            <a:ext cx="4572000" cy="502920"/>
+          </a:xfrm>
+          <a:prstGeom prst="rect">
+            <a:avLst/>
+          </a:prstGeom>
+          <a:noFill/>
+          <a:ln/>
+        </p:spPr>
+        <p:txBody>
+          <a:bodyPr wrap="square" rtlCol="0" anchor="ctr"/>
+          <a:lstStyle/>
+          <a:p>
+            <a:pPr indent="0" marL="0">
+              <a:buNone/>
+            </a:pPr>
+            <a:r>
+              <a:rPr lang="en-US" sz="1300" dirty="0">
+                <a:solidFill>
+                  <a:srgbClr val="3D3A36"/>
+                </a:solidFill>
+                <a:latin typeface="Arial" pitchFamily="34" charset="0"/>
+                <a:ea typeface="Arial" pitchFamily="34" charset="-122"/>
+                <a:cs typeface="Arial" pitchFamily="34" charset="-120"/>
+              </a:rPr>
+              <a:t>▸ Caterpillar tracks on tanks</a:t>
+            </a:r>
+            <a:endParaRPr lang="en-US" sz="1300" dirty="0"/>
+          </a:p>
+        </p:txBody>
+      </p:sp>
+      <p:sp>
+        <p:nvSpPr>
+          <p:cNvPr id="19" name="Text 17"/>
+          <p:cNvSpPr/>
+          <p:nvPr/>
+        </p:nvSpPr>
+        <p:spPr>
+          <a:xfrm>
+            <a:off x="6583680" y="4480560"/>
+            <a:ext cx="4572000" cy="502920"/>
+          </a:xfrm>
+          <a:prstGeom prst="rect">
+            <a:avLst/>
+          </a:prstGeom>
+          <a:noFill/>
+          <a:ln/>
+        </p:spPr>
+        <p:txBody>
+          <a:bodyPr wrap="square" rtlCol="0" anchor="ctr"/>
+          <a:lstStyle/>
+          <a:p>
+            <a:pPr indent="0" marL="0">
+              <a:buNone/>
+            </a:pPr>
+            <a:r>
+              <a:rPr lang="en-US" sz="1300" dirty="0">
+                <a:solidFill>
+                  <a:srgbClr val="3D3A36"/>
+                </a:solidFill>
+                <a:latin typeface="Arial" pitchFamily="34" charset="0"/>
+                <a:ea typeface="Arial" pitchFamily="34" charset="-122"/>
+                <a:cs typeface="Arial" pitchFamily="34" charset="-120"/>
+              </a:rPr>
+              <a:t>▸ Flat foundations on buildings</a:t>
+            </a:r>
+            <a:endParaRPr lang="en-US" sz="1300" dirty="0"/>
+          </a:p>
+        </p:txBody>
+      </p:sp>
+      <p:sp>
+        <p:nvSpPr>
+          <p:cNvPr id="20" name="Shape 18"/>
+          <p:cNvSpPr/>
+          <p:nvPr/>
+        </p:nvSpPr>
+        <p:spPr>
+          <a:xfrm>
+            <a:off x="0" y="6492240"/>
+            <a:ext cx="12188952" cy="365760"/>
+          </a:xfrm>
+          <a:prstGeom prst="rect">
+            <a:avLst/>
+          </a:prstGeom>
+          <a:solidFill>
+            <a:srgbClr val="1B2A4A"/>
+          </a:solidFill>
+          <a:ln/>
+        </p:spPr>
+      </p:sp>
+      <p:sp>
+        <p:nvSpPr>
+          <p:cNvPr id="21" name="Text 19"/>
+          <p:cNvSpPr/>
+          <p:nvPr/>
+        </p:nvSpPr>
+        <p:spPr>
+          <a:xfrm>
+            <a:off x="10058400" y="6537960"/>
             <a:ext cx="1828800" cy="274320"/>
           </a:xfrm>
           <a:prstGeom prst="rect">
@@ -4462,11 +4325,11 @@
             <a:r>
               <a:rPr lang="en-US" sz="900" dirty="0">
                 <a:solidFill>
-                  <a:srgbClr val="9B9690"/>
-                </a:solidFill>
-                <a:latin typeface="Calibri" pitchFamily="34" charset="0"/>
-                <a:ea typeface="Calibri" pitchFamily="34" charset="-122"/>
-                <a:cs typeface="Calibri" pitchFamily="34" charset="-120"/>
+                  <a:srgbClr val="E9C46A"/>
+                </a:solidFill>
+                <a:latin typeface="Arial" pitchFamily="34" charset="0"/>
+                <a:ea typeface="Arial" pitchFamily="34" charset="-122"/>
+                <a:cs typeface="Arial" pitchFamily="34" charset="-120"/>
               </a:rPr>
               <a:t>mrzocchi.com</a:t>
             </a:r>
@@ -4508,13 +4371,13 @@
         <p:spPr>
           <a:xfrm>
             <a:off x="0" y="0"/>
-            <a:ext cx="9144000" cy="54864"/>
-          </a:xfrm>
-          <a:prstGeom prst="rect">
-            <a:avLst/>
-          </a:prstGeom>
-          <a:solidFill>
-            <a:srgbClr val="C8372D"/>
+            <a:ext cx="12188952" cy="1097280"/>
+          </a:xfrm>
+          <a:prstGeom prst="rect">
+            <a:avLst/>
+          </a:prstGeom>
+          <a:solidFill>
+            <a:srgbClr val="1B2A4A"/>
           </a:solidFill>
           <a:ln/>
         </p:spPr>
@@ -4527,34 +4390,34 @@
         </p:nvSpPr>
         <p:spPr>
           <a:xfrm>
-            <a:off x="457200" y="228600"/>
-            <a:ext cx="8229600" cy="548640"/>
-          </a:xfrm>
-          <a:prstGeom prst="rect">
-            <a:avLst/>
-          </a:prstGeom>
-          <a:noFill/>
-          <a:ln/>
-        </p:spPr>
-        <p:txBody>
-          <a:bodyPr wrap="square" lIns="0" tIns="0" rIns="0" bIns="0" rtlCol="0" anchor="ctr"/>
+            <a:off x="548640" y="182880"/>
+            <a:ext cx="9144000" cy="731520"/>
+          </a:xfrm>
+          <a:prstGeom prst="rect">
+            <a:avLst/>
+          </a:prstGeom>
+          <a:noFill/>
+          <a:ln/>
+        </p:spPr>
+        <p:txBody>
+          <a:bodyPr wrap="square" rtlCol="0" anchor="ctr"/>
           <a:lstStyle/>
           <a:p>
             <a:pPr indent="0" marL="0">
               <a:buNone/>
             </a:pPr>
             <a:r>
-              <a:rPr lang="en-US" sz="2400" b="1" dirty="0">
-                <a:solidFill>
-                  <a:srgbClr val="1B2A4A"/>
+              <a:rPr lang="en-US" sz="2600" b="1" dirty="0">
+                <a:solidFill>
+                  <a:srgbClr val="FFFFFF"/>
                 </a:solidFill>
                 <a:latin typeface="Georgia" pitchFamily="34" charset="0"/>
                 <a:ea typeface="Georgia" pitchFamily="34" charset="-122"/>
                 <a:cs typeface="Georgia" pitchFamily="34" charset="-120"/>
               </a:rPr>
-              <a:t>Key Vocabulary</a:t>
-            </a:r>
-            <a:endParaRPr lang="en-US" sz="2400" dirty="0"/>
+              <a:t>📖 Key Vocabulary</a:t>
+            </a:r>
+            <a:endParaRPr lang="en-US" sz="2600" dirty="0"/>
           </a:p>
         </p:txBody>
       </p:sp>
@@ -4566,16 +4429,23 @@
         </p:nvSpPr>
         <p:spPr>
           <a:xfrm>
-            <a:off x="457200" y="868680"/>
-            <a:ext cx="1828800" cy="27432"/>
-          </a:xfrm>
-          <a:prstGeom prst="rect">
-            <a:avLst/>
-          </a:prstGeom>
-          <a:solidFill>
-            <a:srgbClr val="C8372D"/>
-          </a:solidFill>
-          <a:ln/>
+            <a:off x="548640" y="1371600"/>
+            <a:ext cx="3383280" cy="1280160"/>
+          </a:xfrm>
+          <a:prstGeom prst="roundRect">
+            <a:avLst>
+              <a:gd name="adj" fmla="val 7143"/>
+            </a:avLst>
+          </a:prstGeom>
+          <a:solidFill>
+            <a:srgbClr val="FFFFFF"/>
+          </a:solidFill>
+          <a:ln w="12700">
+            <a:solidFill>
+              <a:srgbClr val="E5E2DC"/>
+            </a:solidFill>
+            <a:prstDash val="solid"/>
+          </a:ln>
         </p:spPr>
       </p:sp>
       <p:sp>
@@ -4586,8 +4456,8 @@
         </p:nvSpPr>
         <p:spPr>
           <a:xfrm>
-            <a:off x="457200" y="1188720"/>
-            <a:ext cx="8229600" cy="548640"/>
+            <a:off x="685800" y="1463040"/>
+            <a:ext cx="3108960" cy="365760"/>
           </a:xfrm>
           <a:prstGeom prst="rect">
             <a:avLst/>
@@ -4603,17 +4473,17 @@
               <a:buNone/>
             </a:pPr>
             <a:r>
-              <a:rPr lang="en-US" sz="2800" b="1" dirty="0">
+              <a:rPr lang="en-US" sz="1400" b="1" dirty="0">
                 <a:solidFill>
                   <a:srgbClr val="C8372D"/>
                 </a:solidFill>
-                <a:latin typeface="Georgia" pitchFamily="34" charset="0"/>
-                <a:ea typeface="Georgia" pitchFamily="34" charset="-122"/>
-                <a:cs typeface="Georgia" pitchFamily="34" charset="-120"/>
-              </a:rPr>
-              <a:t>Air Resistance</a:t>
-            </a:r>
-            <a:endParaRPr lang="en-US" sz="2800" dirty="0"/>
+                <a:latin typeface="Arial" pitchFamily="34" charset="0"/>
+                <a:ea typeface="Arial" pitchFamily="34" charset="-122"/>
+                <a:cs typeface="Arial" pitchFamily="34" charset="-120"/>
+              </a:rPr>
+              <a:t>Pressure  压强</a:t>
+            </a:r>
+            <a:endParaRPr lang="en-US" sz="1400" dirty="0"/>
           </a:p>
         </p:txBody>
       </p:sp>
@@ -4625,8 +4495,8 @@
         </p:nvSpPr>
         <p:spPr>
           <a:xfrm>
-            <a:off x="457200" y="1691640"/>
-            <a:ext cx="8229600" cy="365760"/>
+            <a:off x="685800" y="1828800"/>
+            <a:ext cx="3108960" cy="731520"/>
           </a:xfrm>
           <a:prstGeom prst="rect">
             <a:avLst/>
@@ -4642,30 +4512,57 @@
               <a:buNone/>
             </a:pPr>
             <a:r>
-              <a:rPr lang="en-US" sz="1600" i="1" dirty="0">
-                <a:solidFill>
-                  <a:srgbClr val="9B9690"/>
-                </a:solidFill>
-                <a:latin typeface="Calibri" pitchFamily="34" charset="0"/>
-                <a:ea typeface="Calibri" pitchFamily="34" charset="-122"/>
-                <a:cs typeface="Calibri" pitchFamily="34" charset="-120"/>
-              </a:rPr>
-              <a:t>空气阻力</a:t>
-            </a:r>
-            <a:endParaRPr lang="en-US" sz="1600" dirty="0"/>
-          </a:p>
-        </p:txBody>
-      </p:sp>
-      <p:sp>
-        <p:nvSpPr>
-          <p:cNvPr id="7" name="Text 5"/>
-          <p:cNvSpPr/>
-          <p:nvPr/>
-        </p:nvSpPr>
-        <p:spPr>
-          <a:xfrm>
-            <a:off x="457200" y="2194560"/>
-            <a:ext cx="8229600" cy="1828800"/>
+              <a:rPr lang="en-US" sz="1100" dirty="0">
+                <a:solidFill>
+                  <a:srgbClr val="6B6660"/>
+                </a:solidFill>
+                <a:latin typeface="Arial" pitchFamily="34" charset="0"/>
+                <a:ea typeface="Arial" pitchFamily="34" charset="-122"/>
+                <a:cs typeface="Arial" pitchFamily="34" charset="-120"/>
+              </a:rPr>
+              <a:t>Force per unit area. P = F ÷ A. Measured in Pascals.</a:t>
+            </a:r>
+            <a:endParaRPr lang="en-US" sz="1100" dirty="0"/>
+          </a:p>
+        </p:txBody>
+      </p:sp>
+      <p:sp>
+        <p:nvSpPr>
+          <p:cNvPr id="7" name="Shape 5"/>
+          <p:cNvSpPr/>
+          <p:nvPr/>
+        </p:nvSpPr>
+        <p:spPr>
+          <a:xfrm>
+            <a:off x="4160520" y="1371600"/>
+            <a:ext cx="3383280" cy="1280160"/>
+          </a:xfrm>
+          <a:prstGeom prst="roundRect">
+            <a:avLst>
+              <a:gd name="adj" fmla="val 7143"/>
+            </a:avLst>
+          </a:prstGeom>
+          <a:solidFill>
+            <a:srgbClr val="FFFFFF"/>
+          </a:solidFill>
+          <a:ln w="12700">
+            <a:solidFill>
+              <a:srgbClr val="E5E2DC"/>
+            </a:solidFill>
+            <a:prstDash val="solid"/>
+          </a:ln>
+        </p:spPr>
+      </p:sp>
+      <p:sp>
+        <p:nvSpPr>
+          <p:cNvPr id="8" name="Text 6"/>
+          <p:cNvSpPr/>
+          <p:nvPr/>
+        </p:nvSpPr>
+        <p:spPr>
+          <a:xfrm>
+            <a:off x="4297680" y="1463040"/>
+            <a:ext cx="3108960" cy="365760"/>
           </a:xfrm>
           <a:prstGeom prst="rect">
             <a:avLst/>
@@ -4678,35 +4575,511 @@
           <a:lstStyle/>
           <a:p>
             <a:pPr indent="0" marL="0">
-              <a:lnSpc>
-                <a:spcPct val="150000"/>
-              </a:lnSpc>
-              <a:buNone/>
-            </a:pPr>
-            <a:r>
-              <a:rPr lang="en-US" sz="1800" dirty="0">
+              <a:buNone/>
+            </a:pPr>
+            <a:r>
+              <a:rPr lang="en-US" sz="1400" b="1" dirty="0">
+                <a:solidFill>
+                  <a:srgbClr val="C8372D"/>
+                </a:solidFill>
+                <a:latin typeface="Arial" pitchFamily="34" charset="0"/>
+                <a:ea typeface="Arial" pitchFamily="34" charset="-122"/>
+                <a:cs typeface="Arial" pitchFamily="34" charset="-120"/>
+              </a:rPr>
+              <a:t>Pascal (Pa)  帕斯卡</a:t>
+            </a:r>
+            <a:endParaRPr lang="en-US" sz="1400" dirty="0"/>
+          </a:p>
+        </p:txBody>
+      </p:sp>
+      <p:sp>
+        <p:nvSpPr>
+          <p:cNvPr id="9" name="Text 7"/>
+          <p:cNvSpPr/>
+          <p:nvPr/>
+        </p:nvSpPr>
+        <p:spPr>
+          <a:xfrm>
+            <a:off x="4297680" y="1828800"/>
+            <a:ext cx="3108960" cy="731520"/>
+          </a:xfrm>
+          <a:prstGeom prst="rect">
+            <a:avLst/>
+          </a:prstGeom>
+          <a:noFill/>
+          <a:ln/>
+        </p:spPr>
+        <p:txBody>
+          <a:bodyPr wrap="square" rtlCol="0" anchor="ctr"/>
+          <a:lstStyle/>
+          <a:p>
+            <a:pPr indent="0" marL="0">
+              <a:buNone/>
+            </a:pPr>
+            <a:r>
+              <a:rPr lang="en-US" sz="1100" dirty="0">
                 <a:solidFill>
                   <a:srgbClr val="6B6660"/>
                 </a:solidFill>
-                <a:latin typeface="Calibri" pitchFamily="34" charset="0"/>
-                <a:ea typeface="Calibri" pitchFamily="34" charset="-122"/>
-                <a:cs typeface="Calibri" pitchFamily="34" charset="-120"/>
-              </a:rPr>
-              <a:t>Friction between an object and the air. Increases with speed and surface area.</a:t>
-            </a:r>
-            <a:endParaRPr lang="en-US" sz="1800" dirty="0"/>
-          </a:p>
-        </p:txBody>
-      </p:sp>
-      <p:sp>
-        <p:nvSpPr>
-          <p:cNvPr id="8" name="Text 6"/>
-          <p:cNvSpPr/>
-          <p:nvPr/>
-        </p:nvSpPr>
-        <p:spPr>
-          <a:xfrm>
-            <a:off x="7315200" y="4754880"/>
+                <a:latin typeface="Arial" pitchFamily="34" charset="0"/>
+                <a:ea typeface="Arial" pitchFamily="34" charset="-122"/>
+                <a:cs typeface="Arial" pitchFamily="34" charset="-120"/>
+              </a:rPr>
+              <a:t>The unit of pressure. 1 Pa = 1 N/m².</a:t>
+            </a:r>
+            <a:endParaRPr lang="en-US" sz="1100" dirty="0"/>
+          </a:p>
+        </p:txBody>
+      </p:sp>
+      <p:sp>
+        <p:nvSpPr>
+          <p:cNvPr id="10" name="Shape 8"/>
+          <p:cNvSpPr/>
+          <p:nvPr/>
+        </p:nvSpPr>
+        <p:spPr>
+          <a:xfrm>
+            <a:off x="7772400" y="1371600"/>
+            <a:ext cx="3383280" cy="1280160"/>
+          </a:xfrm>
+          <a:prstGeom prst="roundRect">
+            <a:avLst>
+              <a:gd name="adj" fmla="val 7143"/>
+            </a:avLst>
+          </a:prstGeom>
+          <a:solidFill>
+            <a:srgbClr val="FFFFFF"/>
+          </a:solidFill>
+          <a:ln w="12700">
+            <a:solidFill>
+              <a:srgbClr val="E5E2DC"/>
+            </a:solidFill>
+            <a:prstDash val="solid"/>
+          </a:ln>
+        </p:spPr>
+      </p:sp>
+      <p:sp>
+        <p:nvSpPr>
+          <p:cNvPr id="11" name="Text 9"/>
+          <p:cNvSpPr/>
+          <p:nvPr/>
+        </p:nvSpPr>
+        <p:spPr>
+          <a:xfrm>
+            <a:off x="7909560" y="1463040"/>
+            <a:ext cx="3108960" cy="365760"/>
+          </a:xfrm>
+          <a:prstGeom prst="rect">
+            <a:avLst/>
+          </a:prstGeom>
+          <a:noFill/>
+          <a:ln/>
+        </p:spPr>
+        <p:txBody>
+          <a:bodyPr wrap="square" rtlCol="0" anchor="ctr"/>
+          <a:lstStyle/>
+          <a:p>
+            <a:pPr indent="0" marL="0">
+              <a:buNone/>
+            </a:pPr>
+            <a:r>
+              <a:rPr lang="en-US" sz="1400" b="1" dirty="0">
+                <a:solidFill>
+                  <a:srgbClr val="C8372D"/>
+                </a:solidFill>
+                <a:latin typeface="Arial" pitchFamily="34" charset="0"/>
+                <a:ea typeface="Arial" pitchFamily="34" charset="-122"/>
+                <a:cs typeface="Arial" pitchFamily="34" charset="-120"/>
+              </a:rPr>
+              <a:t>Force  力</a:t>
+            </a:r>
+            <a:endParaRPr lang="en-US" sz="1400" dirty="0"/>
+          </a:p>
+        </p:txBody>
+      </p:sp>
+      <p:sp>
+        <p:nvSpPr>
+          <p:cNvPr id="12" name="Text 10"/>
+          <p:cNvSpPr/>
+          <p:nvPr/>
+        </p:nvSpPr>
+        <p:spPr>
+          <a:xfrm>
+            <a:off x="7909560" y="1828800"/>
+            <a:ext cx="3108960" cy="731520"/>
+          </a:xfrm>
+          <a:prstGeom prst="rect">
+            <a:avLst/>
+          </a:prstGeom>
+          <a:noFill/>
+          <a:ln/>
+        </p:spPr>
+        <p:txBody>
+          <a:bodyPr wrap="square" rtlCol="0" anchor="ctr"/>
+          <a:lstStyle/>
+          <a:p>
+            <a:pPr indent="0" marL="0">
+              <a:buNone/>
+            </a:pPr>
+            <a:r>
+              <a:rPr lang="en-US" sz="1100" dirty="0">
+                <a:solidFill>
+                  <a:srgbClr val="6B6660"/>
+                </a:solidFill>
+                <a:latin typeface="Arial" pitchFamily="34" charset="0"/>
+                <a:ea typeface="Arial" pitchFamily="34" charset="-122"/>
+                <a:cs typeface="Arial" pitchFamily="34" charset="-120"/>
+              </a:rPr>
+              <a:t>A push or pull measured in Newtons (N).</a:t>
+            </a:r>
+            <a:endParaRPr lang="en-US" sz="1100" dirty="0"/>
+          </a:p>
+        </p:txBody>
+      </p:sp>
+      <p:sp>
+        <p:nvSpPr>
+          <p:cNvPr id="13" name="Shape 11"/>
+          <p:cNvSpPr/>
+          <p:nvPr/>
+        </p:nvSpPr>
+        <p:spPr>
+          <a:xfrm>
+            <a:off x="548640" y="2834640"/>
+            <a:ext cx="3383280" cy="1280160"/>
+          </a:xfrm>
+          <a:prstGeom prst="roundRect">
+            <a:avLst>
+              <a:gd name="adj" fmla="val 7143"/>
+            </a:avLst>
+          </a:prstGeom>
+          <a:solidFill>
+            <a:srgbClr val="FFFFFF"/>
+          </a:solidFill>
+          <a:ln w="12700">
+            <a:solidFill>
+              <a:srgbClr val="E5E2DC"/>
+            </a:solidFill>
+            <a:prstDash val="solid"/>
+          </a:ln>
+        </p:spPr>
+      </p:sp>
+      <p:sp>
+        <p:nvSpPr>
+          <p:cNvPr id="14" name="Text 12"/>
+          <p:cNvSpPr/>
+          <p:nvPr/>
+        </p:nvSpPr>
+        <p:spPr>
+          <a:xfrm>
+            <a:off x="685800" y="2926080"/>
+            <a:ext cx="3108960" cy="365760"/>
+          </a:xfrm>
+          <a:prstGeom prst="rect">
+            <a:avLst/>
+          </a:prstGeom>
+          <a:noFill/>
+          <a:ln/>
+        </p:spPr>
+        <p:txBody>
+          <a:bodyPr wrap="square" rtlCol="0" anchor="ctr"/>
+          <a:lstStyle/>
+          <a:p>
+            <a:pPr indent="0" marL="0">
+              <a:buNone/>
+            </a:pPr>
+            <a:r>
+              <a:rPr lang="en-US" sz="1400" b="1" dirty="0">
+                <a:solidFill>
+                  <a:srgbClr val="C8372D"/>
+                </a:solidFill>
+                <a:latin typeface="Arial" pitchFamily="34" charset="0"/>
+                <a:ea typeface="Arial" pitchFamily="34" charset="-122"/>
+                <a:cs typeface="Arial" pitchFamily="34" charset="-120"/>
+              </a:rPr>
+              <a:t>Area  面积</a:t>
+            </a:r>
+            <a:endParaRPr lang="en-US" sz="1400" dirty="0"/>
+          </a:p>
+        </p:txBody>
+      </p:sp>
+      <p:sp>
+        <p:nvSpPr>
+          <p:cNvPr id="15" name="Text 13"/>
+          <p:cNvSpPr/>
+          <p:nvPr/>
+        </p:nvSpPr>
+        <p:spPr>
+          <a:xfrm>
+            <a:off x="685800" y="3291840"/>
+            <a:ext cx="3108960" cy="731520"/>
+          </a:xfrm>
+          <a:prstGeom prst="rect">
+            <a:avLst/>
+          </a:prstGeom>
+          <a:noFill/>
+          <a:ln/>
+        </p:spPr>
+        <p:txBody>
+          <a:bodyPr wrap="square" rtlCol="0" anchor="ctr"/>
+          <a:lstStyle/>
+          <a:p>
+            <a:pPr indent="0" marL="0">
+              <a:buNone/>
+            </a:pPr>
+            <a:r>
+              <a:rPr lang="en-US" sz="1100" dirty="0">
+                <a:solidFill>
+                  <a:srgbClr val="6B6660"/>
+                </a:solidFill>
+                <a:latin typeface="Arial" pitchFamily="34" charset="0"/>
+                <a:ea typeface="Arial" pitchFamily="34" charset="-122"/>
+                <a:cs typeface="Arial" pitchFamily="34" charset="-120"/>
+              </a:rPr>
+              <a:t>The surface over which a force is spread (m²).</a:t>
+            </a:r>
+            <a:endParaRPr lang="en-US" sz="1100" dirty="0"/>
+          </a:p>
+        </p:txBody>
+      </p:sp>
+      <p:sp>
+        <p:nvSpPr>
+          <p:cNvPr id="16" name="Shape 14"/>
+          <p:cNvSpPr/>
+          <p:nvPr/>
+        </p:nvSpPr>
+        <p:spPr>
+          <a:xfrm>
+            <a:off x="4160520" y="2834640"/>
+            <a:ext cx="3383280" cy="1280160"/>
+          </a:xfrm>
+          <a:prstGeom prst="roundRect">
+            <a:avLst>
+              <a:gd name="adj" fmla="val 7143"/>
+            </a:avLst>
+          </a:prstGeom>
+          <a:solidFill>
+            <a:srgbClr val="FFFFFF"/>
+          </a:solidFill>
+          <a:ln w="12700">
+            <a:solidFill>
+              <a:srgbClr val="E5E2DC"/>
+            </a:solidFill>
+            <a:prstDash val="solid"/>
+          </a:ln>
+        </p:spPr>
+      </p:sp>
+      <p:sp>
+        <p:nvSpPr>
+          <p:cNvPr id="17" name="Text 15"/>
+          <p:cNvSpPr/>
+          <p:nvPr/>
+        </p:nvSpPr>
+        <p:spPr>
+          <a:xfrm>
+            <a:off x="4297680" y="2926080"/>
+            <a:ext cx="3108960" cy="365760"/>
+          </a:xfrm>
+          <a:prstGeom prst="rect">
+            <a:avLst/>
+          </a:prstGeom>
+          <a:noFill/>
+          <a:ln/>
+        </p:spPr>
+        <p:txBody>
+          <a:bodyPr wrap="square" rtlCol="0" anchor="ctr"/>
+          <a:lstStyle/>
+          <a:p>
+            <a:pPr indent="0" marL="0">
+              <a:buNone/>
+            </a:pPr>
+            <a:r>
+              <a:rPr lang="en-US" sz="1400" b="1" dirty="0">
+                <a:solidFill>
+                  <a:srgbClr val="C8372D"/>
+                </a:solidFill>
+                <a:latin typeface="Arial" pitchFamily="34" charset="0"/>
+                <a:ea typeface="Arial" pitchFamily="34" charset="-122"/>
+                <a:cs typeface="Arial" pitchFamily="34" charset="-120"/>
+              </a:rPr>
+              <a:t>Atmospheric Pressure  大气压</a:t>
+            </a:r>
+            <a:endParaRPr lang="en-US" sz="1400" dirty="0"/>
+          </a:p>
+        </p:txBody>
+      </p:sp>
+      <p:sp>
+        <p:nvSpPr>
+          <p:cNvPr id="18" name="Text 16"/>
+          <p:cNvSpPr/>
+          <p:nvPr/>
+        </p:nvSpPr>
+        <p:spPr>
+          <a:xfrm>
+            <a:off x="4297680" y="3291840"/>
+            <a:ext cx="3108960" cy="731520"/>
+          </a:xfrm>
+          <a:prstGeom prst="rect">
+            <a:avLst/>
+          </a:prstGeom>
+          <a:noFill/>
+          <a:ln/>
+        </p:spPr>
+        <p:txBody>
+          <a:bodyPr wrap="square" rtlCol="0" anchor="ctr"/>
+          <a:lstStyle/>
+          <a:p>
+            <a:pPr indent="0" marL="0">
+              <a:buNone/>
+            </a:pPr>
+            <a:r>
+              <a:rPr lang="en-US" sz="1100" dirty="0">
+                <a:solidFill>
+                  <a:srgbClr val="6B6660"/>
+                </a:solidFill>
+                <a:latin typeface="Arial" pitchFamily="34" charset="0"/>
+                <a:ea typeface="Arial" pitchFamily="34" charset="-122"/>
+                <a:cs typeface="Arial" pitchFamily="34" charset="-120"/>
+              </a:rPr>
+              <a:t>Pressure exerted by the weight of air above us.</a:t>
+            </a:r>
+            <a:endParaRPr lang="en-US" sz="1100" dirty="0"/>
+          </a:p>
+        </p:txBody>
+      </p:sp>
+      <p:sp>
+        <p:nvSpPr>
+          <p:cNvPr id="19" name="Shape 17"/>
+          <p:cNvSpPr/>
+          <p:nvPr/>
+        </p:nvSpPr>
+        <p:spPr>
+          <a:xfrm>
+            <a:off x="7772400" y="2834640"/>
+            <a:ext cx="3383280" cy="1280160"/>
+          </a:xfrm>
+          <a:prstGeom prst="roundRect">
+            <a:avLst>
+              <a:gd name="adj" fmla="val 7143"/>
+            </a:avLst>
+          </a:prstGeom>
+          <a:solidFill>
+            <a:srgbClr val="FFFFFF"/>
+          </a:solidFill>
+          <a:ln w="12700">
+            <a:solidFill>
+              <a:srgbClr val="E5E2DC"/>
+            </a:solidFill>
+            <a:prstDash val="solid"/>
+          </a:ln>
+        </p:spPr>
+      </p:sp>
+      <p:sp>
+        <p:nvSpPr>
+          <p:cNvPr id="20" name="Text 18"/>
+          <p:cNvSpPr/>
+          <p:nvPr/>
+        </p:nvSpPr>
+        <p:spPr>
+          <a:xfrm>
+            <a:off x="7909560" y="2926080"/>
+            <a:ext cx="3108960" cy="365760"/>
+          </a:xfrm>
+          <a:prstGeom prst="rect">
+            <a:avLst/>
+          </a:prstGeom>
+          <a:noFill/>
+          <a:ln/>
+        </p:spPr>
+        <p:txBody>
+          <a:bodyPr wrap="square" rtlCol="0" anchor="ctr"/>
+          <a:lstStyle/>
+          <a:p>
+            <a:pPr indent="0" marL="0">
+              <a:buNone/>
+            </a:pPr>
+            <a:r>
+              <a:rPr lang="en-US" sz="1400" b="1" dirty="0">
+                <a:solidFill>
+                  <a:srgbClr val="C8372D"/>
+                </a:solidFill>
+                <a:latin typeface="Arial" pitchFamily="34" charset="0"/>
+                <a:ea typeface="Arial" pitchFamily="34" charset="-122"/>
+                <a:cs typeface="Arial" pitchFamily="34" charset="-120"/>
+              </a:rPr>
+              <a:t>Hydraulics  液压</a:t>
+            </a:r>
+            <a:endParaRPr lang="en-US" sz="1400" dirty="0"/>
+          </a:p>
+        </p:txBody>
+      </p:sp>
+      <p:sp>
+        <p:nvSpPr>
+          <p:cNvPr id="21" name="Text 19"/>
+          <p:cNvSpPr/>
+          <p:nvPr/>
+        </p:nvSpPr>
+        <p:spPr>
+          <a:xfrm>
+            <a:off x="7909560" y="3291840"/>
+            <a:ext cx="3108960" cy="731520"/>
+          </a:xfrm>
+          <a:prstGeom prst="rect">
+            <a:avLst/>
+          </a:prstGeom>
+          <a:noFill/>
+          <a:ln/>
+        </p:spPr>
+        <p:txBody>
+          <a:bodyPr wrap="square" rtlCol="0" anchor="ctr"/>
+          <a:lstStyle/>
+          <a:p>
+            <a:pPr indent="0" marL="0">
+              <a:buNone/>
+            </a:pPr>
+            <a:r>
+              <a:rPr lang="en-US" sz="1100" dirty="0">
+                <a:solidFill>
+                  <a:srgbClr val="6B6660"/>
+                </a:solidFill>
+                <a:latin typeface="Arial" pitchFamily="34" charset="0"/>
+                <a:ea typeface="Arial" pitchFamily="34" charset="-122"/>
+                <a:cs typeface="Arial" pitchFamily="34" charset="-120"/>
+              </a:rPr>
+              <a:t>Using liquid pressure to multiply force.</a:t>
+            </a:r>
+            <a:endParaRPr lang="en-US" sz="1100" dirty="0"/>
+          </a:p>
+        </p:txBody>
+      </p:sp>
+      <p:sp>
+        <p:nvSpPr>
+          <p:cNvPr id="22" name="Shape 20"/>
+          <p:cNvSpPr/>
+          <p:nvPr/>
+        </p:nvSpPr>
+        <p:spPr>
+          <a:xfrm>
+            <a:off x="0" y="6492240"/>
+            <a:ext cx="12188952" cy="365760"/>
+          </a:xfrm>
+          <a:prstGeom prst="rect">
+            <a:avLst/>
+          </a:prstGeom>
+          <a:solidFill>
+            <a:srgbClr val="1B2A4A"/>
+          </a:solidFill>
+          <a:ln/>
+        </p:spPr>
+      </p:sp>
+      <p:sp>
+        <p:nvSpPr>
+          <p:cNvPr id="23" name="Text 21"/>
+          <p:cNvSpPr/>
+          <p:nvPr/>
+        </p:nvSpPr>
+        <p:spPr>
+          <a:xfrm>
+            <a:off x="10058400" y="6537960"/>
             <a:ext cx="1828800" cy="274320"/>
           </a:xfrm>
           <a:prstGeom prst="rect">
@@ -4725,11 +5098,11 @@
             <a:r>
               <a:rPr lang="en-US" sz="900" dirty="0">
                 <a:solidFill>
-                  <a:srgbClr val="9B9690"/>
-                </a:solidFill>
-                <a:latin typeface="Calibri" pitchFamily="34" charset="0"/>
-                <a:ea typeface="Calibri" pitchFamily="34" charset="-122"/>
-                <a:cs typeface="Calibri" pitchFamily="34" charset="-120"/>
+                  <a:srgbClr val="E9C46A"/>
+                </a:solidFill>
+                <a:latin typeface="Arial" pitchFamily="34" charset="0"/>
+                <a:ea typeface="Arial" pitchFamily="34" charset="-122"/>
+                <a:cs typeface="Arial" pitchFamily="34" charset="-120"/>
               </a:rPr>
               <a:t>mrzocchi.com</a:t>
             </a:r>
@@ -4771,13 +5144,13 @@
         <p:spPr>
           <a:xfrm>
             <a:off x="0" y="0"/>
-            <a:ext cx="9144000" cy="54864"/>
-          </a:xfrm>
-          <a:prstGeom prst="rect">
-            <a:avLst/>
-          </a:prstGeom>
-          <a:solidFill>
-            <a:srgbClr val="C8372D"/>
+            <a:ext cx="12188952" cy="1097280"/>
+          </a:xfrm>
+          <a:prstGeom prst="rect">
+            <a:avLst/>
+          </a:prstGeom>
+          <a:solidFill>
+            <a:srgbClr val="1B2A4A"/>
           </a:solidFill>
           <a:ln/>
         </p:spPr>
@@ -4790,34 +5163,34 @@
         </p:nvSpPr>
         <p:spPr>
           <a:xfrm>
-            <a:off x="457200" y="228600"/>
-            <a:ext cx="8229600" cy="548640"/>
-          </a:xfrm>
-          <a:prstGeom prst="rect">
-            <a:avLst/>
-          </a:prstGeom>
-          <a:noFill/>
-          <a:ln/>
-        </p:spPr>
-        <p:txBody>
-          <a:bodyPr wrap="square" lIns="0" tIns="0" rIns="0" bIns="0" rtlCol="0" anchor="ctr"/>
+            <a:off x="548640" y="182880"/>
+            <a:ext cx="9144000" cy="731520"/>
+          </a:xfrm>
+          <a:prstGeom prst="rect">
+            <a:avLst/>
+          </a:prstGeom>
+          <a:noFill/>
+          <a:ln/>
+        </p:spPr>
+        <p:txBody>
+          <a:bodyPr wrap="square" rtlCol="0" anchor="ctr"/>
           <a:lstStyle/>
           <a:p>
             <a:pPr indent="0" marL="0">
               <a:buNone/>
             </a:pPr>
             <a:r>
-              <a:rPr lang="en-US" sz="2400" b="1" dirty="0">
-                <a:solidFill>
-                  <a:srgbClr val="1B2A4A"/>
+              <a:rPr lang="en-US" sz="2600" b="1" dirty="0">
+                <a:solidFill>
+                  <a:srgbClr val="FFFFFF"/>
                 </a:solidFill>
                 <a:latin typeface="Georgia" pitchFamily="34" charset="0"/>
                 <a:ea typeface="Georgia" pitchFamily="34" charset="-122"/>
                 <a:cs typeface="Georgia" pitchFamily="34" charset="-120"/>
               </a:rPr>
-              <a:t>Key Vocabulary</a:t>
-            </a:r>
-            <a:endParaRPr lang="en-US" sz="2400" dirty="0"/>
+              <a:t>🧠 Check Your Understanding</a:t>
+            </a:r>
+            <a:endParaRPr lang="en-US" sz="2600" dirty="0"/>
           </a:p>
         </p:txBody>
       </p:sp>
@@ -4829,16 +5202,23 @@
         </p:nvSpPr>
         <p:spPr>
           <a:xfrm>
-            <a:off x="457200" y="868680"/>
-            <a:ext cx="1828800" cy="27432"/>
-          </a:xfrm>
-          <a:prstGeom prst="rect">
-            <a:avLst/>
-          </a:prstGeom>
-          <a:solidFill>
-            <a:srgbClr val="C8372D"/>
-          </a:solidFill>
-          <a:ln/>
+            <a:off x="548640" y="1371600"/>
+            <a:ext cx="10972800" cy="502920"/>
+          </a:xfrm>
+          <a:prstGeom prst="roundRect">
+            <a:avLst>
+              <a:gd name="adj" fmla="val 14545"/>
+            </a:avLst>
+          </a:prstGeom>
+          <a:solidFill>
+            <a:srgbClr val="FFFFFF"/>
+          </a:solidFill>
+          <a:ln w="12700">
+            <a:solidFill>
+              <a:srgbClr val="C8372D"/>
+            </a:solidFill>
+            <a:prstDash val="solid"/>
+          </a:ln>
         </p:spPr>
       </p:sp>
       <p:sp>
@@ -4849,8 +5229,8 @@
         </p:nvSpPr>
         <p:spPr>
           <a:xfrm>
-            <a:off x="457200" y="1188720"/>
-            <a:ext cx="8229600" cy="548640"/>
+            <a:off x="822960" y="1389888"/>
+            <a:ext cx="10515600" cy="457200"/>
           </a:xfrm>
           <a:prstGeom prst="rect">
             <a:avLst/>
@@ -4866,30 +5246,52 @@
               <a:buNone/>
             </a:pPr>
             <a:r>
-              <a:rPr lang="en-US" sz="2800" b="1" dirty="0">
-                <a:solidFill>
-                  <a:srgbClr val="C8372D"/>
-                </a:solidFill>
-                <a:latin typeface="Georgia" pitchFamily="34" charset="0"/>
-                <a:ea typeface="Georgia" pitchFamily="34" charset="-122"/>
-                <a:cs typeface="Georgia" pitchFamily="34" charset="-120"/>
-              </a:rPr>
-              <a:t>Balanced Forces</a:t>
-            </a:r>
-            <a:endParaRPr lang="en-US" sz="2800" dirty="0"/>
-          </a:p>
-        </p:txBody>
-      </p:sp>
-      <p:sp>
-        <p:nvSpPr>
-          <p:cNvPr id="6" name="Text 4"/>
-          <p:cNvSpPr/>
-          <p:nvPr/>
-        </p:nvSpPr>
-        <p:spPr>
-          <a:xfrm>
-            <a:off x="457200" y="1691640"/>
-            <a:ext cx="8229600" cy="365760"/>
+              <a:rPr lang="en-US" sz="1400" b="1" dirty="0">
+                <a:solidFill>
+                  <a:srgbClr val="1B2A4A"/>
+                </a:solidFill>
+                <a:latin typeface="Arial" pitchFamily="34" charset="0"/>
+                <a:ea typeface="Arial" pitchFamily="34" charset="-122"/>
+                <a:cs typeface="Arial" pitchFamily="34" charset="-120"/>
+              </a:rPr>
+              <a:t>Q1: What is the formula for pressure?</a:t>
+            </a:r>
+            <a:endParaRPr lang="en-US" sz="1400" dirty="0"/>
+          </a:p>
+        </p:txBody>
+      </p:sp>
+      <p:sp>
+        <p:nvSpPr>
+          <p:cNvPr id="6" name="Shape 4"/>
+          <p:cNvSpPr/>
+          <p:nvPr/>
+        </p:nvSpPr>
+        <p:spPr>
+          <a:xfrm>
+            <a:off x="1097280" y="1965960"/>
+            <a:ext cx="10424160" cy="502920"/>
+          </a:xfrm>
+          <a:prstGeom prst="roundRect">
+            <a:avLst>
+              <a:gd name="adj" fmla="val 14545"/>
+            </a:avLst>
+          </a:prstGeom>
+          <a:solidFill>
+            <a:srgbClr val="F3F1EE"/>
+          </a:solidFill>
+          <a:ln/>
+        </p:spPr>
+      </p:sp>
+      <p:sp>
+        <p:nvSpPr>
+          <p:cNvPr id="7" name="Text 5"/>
+          <p:cNvSpPr/>
+          <p:nvPr/>
+        </p:nvSpPr>
+        <p:spPr>
+          <a:xfrm>
+            <a:off x="1371600" y="1984248"/>
+            <a:ext cx="9875520" cy="457200"/>
           </a:xfrm>
           <a:prstGeom prst="rect">
             <a:avLst/>
@@ -4905,30 +5307,57 @@
               <a:buNone/>
             </a:pPr>
             <a:r>
-              <a:rPr lang="en-US" sz="1600" i="1" dirty="0">
-                <a:solidFill>
-                  <a:srgbClr val="9B9690"/>
-                </a:solidFill>
-                <a:latin typeface="Calibri" pitchFamily="34" charset="0"/>
-                <a:ea typeface="Calibri" pitchFamily="34" charset="-122"/>
-                <a:cs typeface="Calibri" pitchFamily="34" charset="-120"/>
-              </a:rPr>
-              <a:t>平衡力</a:t>
-            </a:r>
-            <a:endParaRPr lang="en-US" sz="1600" dirty="0"/>
-          </a:p>
-        </p:txBody>
-      </p:sp>
-      <p:sp>
-        <p:nvSpPr>
-          <p:cNvPr id="7" name="Text 5"/>
-          <p:cNvSpPr/>
-          <p:nvPr/>
-        </p:nvSpPr>
-        <p:spPr>
-          <a:xfrm>
-            <a:off x="457200" y="2194560"/>
-            <a:ext cx="8229600" cy="1828800"/>
+              <a:rPr lang="en-US" sz="1300" i="1" dirty="0">
+                <a:solidFill>
+                  <a:srgbClr val="6B6660"/>
+                </a:solidFill>
+                <a:latin typeface="Arial" pitchFamily="34" charset="0"/>
+                <a:ea typeface="Arial" pitchFamily="34" charset="-122"/>
+                <a:cs typeface="Arial" pitchFamily="34" charset="-120"/>
+              </a:rPr>
+              <a:t>→ Pressure = Force ÷ Area (P = F/A)</a:t>
+            </a:r>
+            <a:endParaRPr lang="en-US" sz="1300" dirty="0"/>
+          </a:p>
+        </p:txBody>
+      </p:sp>
+      <p:sp>
+        <p:nvSpPr>
+          <p:cNvPr id="8" name="Shape 6"/>
+          <p:cNvSpPr/>
+          <p:nvPr/>
+        </p:nvSpPr>
+        <p:spPr>
+          <a:xfrm>
+            <a:off x="548640" y="2606040"/>
+            <a:ext cx="10972800" cy="502920"/>
+          </a:xfrm>
+          <a:prstGeom prst="roundRect">
+            <a:avLst>
+              <a:gd name="adj" fmla="val 14545"/>
+            </a:avLst>
+          </a:prstGeom>
+          <a:solidFill>
+            <a:srgbClr val="FFFFFF"/>
+          </a:solidFill>
+          <a:ln w="12700">
+            <a:solidFill>
+              <a:srgbClr val="C8372D"/>
+            </a:solidFill>
+            <a:prstDash val="solid"/>
+          </a:ln>
+        </p:spPr>
+      </p:sp>
+      <p:sp>
+        <p:nvSpPr>
+          <p:cNvPr id="9" name="Text 7"/>
+          <p:cNvSpPr/>
+          <p:nvPr/>
+        </p:nvSpPr>
+        <p:spPr>
+          <a:xfrm>
+            <a:off x="822960" y="2624328"/>
+            <a:ext cx="10515600" cy="457200"/>
           </a:xfrm>
           <a:prstGeom prst="rect">
             <a:avLst/>
@@ -4941,35 +5370,367 @@
           <a:lstStyle/>
           <a:p>
             <a:pPr indent="0" marL="0">
-              <a:lnSpc>
-                <a:spcPct val="150000"/>
-              </a:lnSpc>
-              <a:buNone/>
-            </a:pPr>
-            <a:r>
-              <a:rPr lang="en-US" sz="1800" dirty="0">
+              <a:buNone/>
+            </a:pPr>
+            <a:r>
+              <a:rPr lang="en-US" sz="1400" b="1" dirty="0">
+                <a:solidFill>
+                  <a:srgbClr val="1B2A4A"/>
+                </a:solidFill>
+                <a:latin typeface="Arial" pitchFamily="34" charset="0"/>
+                <a:ea typeface="Arial" pitchFamily="34" charset="-122"/>
+                <a:cs typeface="Arial" pitchFamily="34" charset="-120"/>
+              </a:rPr>
+              <a:t>Q2: A 900 N force acts on 3 m². Pressure?</a:t>
+            </a:r>
+            <a:endParaRPr lang="en-US" sz="1400" dirty="0"/>
+          </a:p>
+        </p:txBody>
+      </p:sp>
+      <p:sp>
+        <p:nvSpPr>
+          <p:cNvPr id="10" name="Shape 8"/>
+          <p:cNvSpPr/>
+          <p:nvPr/>
+        </p:nvSpPr>
+        <p:spPr>
+          <a:xfrm>
+            <a:off x="1097280" y="3200400"/>
+            <a:ext cx="10424160" cy="502920"/>
+          </a:xfrm>
+          <a:prstGeom prst="roundRect">
+            <a:avLst>
+              <a:gd name="adj" fmla="val 14545"/>
+            </a:avLst>
+          </a:prstGeom>
+          <a:solidFill>
+            <a:srgbClr val="F3F1EE"/>
+          </a:solidFill>
+          <a:ln/>
+        </p:spPr>
+      </p:sp>
+      <p:sp>
+        <p:nvSpPr>
+          <p:cNvPr id="11" name="Text 9"/>
+          <p:cNvSpPr/>
+          <p:nvPr/>
+        </p:nvSpPr>
+        <p:spPr>
+          <a:xfrm>
+            <a:off x="1371600" y="3218688"/>
+            <a:ext cx="9875520" cy="457200"/>
+          </a:xfrm>
+          <a:prstGeom prst="rect">
+            <a:avLst/>
+          </a:prstGeom>
+          <a:noFill/>
+          <a:ln/>
+        </p:spPr>
+        <p:txBody>
+          <a:bodyPr wrap="square" rtlCol="0" anchor="ctr"/>
+          <a:lstStyle/>
+          <a:p>
+            <a:pPr indent="0" marL="0">
+              <a:buNone/>
+            </a:pPr>
+            <a:r>
+              <a:rPr lang="en-US" sz="1300" i="1" dirty="0">
                 <a:solidFill>
                   <a:srgbClr val="6B6660"/>
                 </a:solidFill>
-                <a:latin typeface="Calibri" pitchFamily="34" charset="0"/>
-                <a:ea typeface="Calibri" pitchFamily="34" charset="-122"/>
-                <a:cs typeface="Calibri" pitchFamily="34" charset="-120"/>
-              </a:rPr>
-              <a:t>Equal forces in opposite directions. Resultant force = 0. Object stays still or at constant speed.</a:t>
-            </a:r>
-            <a:endParaRPr lang="en-US" sz="1800" dirty="0"/>
-          </a:p>
-        </p:txBody>
-      </p:sp>
-      <p:sp>
-        <p:nvSpPr>
-          <p:cNvPr id="8" name="Text 6"/>
-          <p:cNvSpPr/>
-          <p:nvPr/>
-        </p:nvSpPr>
-        <p:spPr>
-          <a:xfrm>
-            <a:off x="7315200" y="4754880"/>
+                <a:latin typeface="Arial" pitchFamily="34" charset="0"/>
+                <a:ea typeface="Arial" pitchFamily="34" charset="-122"/>
+                <a:cs typeface="Arial" pitchFamily="34" charset="-120"/>
+              </a:rPr>
+              <a:t>→ P = 900 ÷ 3 = 300 Pa</a:t>
+            </a:r>
+            <a:endParaRPr lang="en-US" sz="1300" dirty="0"/>
+          </a:p>
+        </p:txBody>
+      </p:sp>
+      <p:sp>
+        <p:nvSpPr>
+          <p:cNvPr id="12" name="Shape 10"/>
+          <p:cNvSpPr/>
+          <p:nvPr/>
+        </p:nvSpPr>
+        <p:spPr>
+          <a:xfrm>
+            <a:off x="548640" y="3840480"/>
+            <a:ext cx="10972800" cy="502920"/>
+          </a:xfrm>
+          <a:prstGeom prst="roundRect">
+            <a:avLst>
+              <a:gd name="adj" fmla="val 14545"/>
+            </a:avLst>
+          </a:prstGeom>
+          <a:solidFill>
+            <a:srgbClr val="FFFFFF"/>
+          </a:solidFill>
+          <a:ln w="12700">
+            <a:solidFill>
+              <a:srgbClr val="C8372D"/>
+            </a:solidFill>
+            <a:prstDash val="solid"/>
+          </a:ln>
+        </p:spPr>
+      </p:sp>
+      <p:sp>
+        <p:nvSpPr>
+          <p:cNvPr id="13" name="Text 11"/>
+          <p:cNvSpPr/>
+          <p:nvPr/>
+        </p:nvSpPr>
+        <p:spPr>
+          <a:xfrm>
+            <a:off x="822960" y="3858768"/>
+            <a:ext cx="10515600" cy="457200"/>
+          </a:xfrm>
+          <a:prstGeom prst="rect">
+            <a:avLst/>
+          </a:prstGeom>
+          <a:noFill/>
+          <a:ln/>
+        </p:spPr>
+        <p:txBody>
+          <a:bodyPr wrap="square" rtlCol="0" anchor="ctr"/>
+          <a:lstStyle/>
+          <a:p>
+            <a:pPr indent="0" marL="0">
+              <a:buNone/>
+            </a:pPr>
+            <a:r>
+              <a:rPr lang="en-US" sz="1400" b="1" dirty="0">
+                <a:solidFill>
+                  <a:srgbClr val="1B2A4A"/>
+                </a:solidFill>
+                <a:latin typeface="Arial" pitchFamily="34" charset="0"/>
+                <a:ea typeface="Arial" pitchFamily="34" charset="-122"/>
+                <a:cs typeface="Arial" pitchFamily="34" charset="-120"/>
+              </a:rPr>
+              <a:t>Q3: Why do sharp knives cut more easily?</a:t>
+            </a:r>
+            <a:endParaRPr lang="en-US" sz="1400" dirty="0"/>
+          </a:p>
+        </p:txBody>
+      </p:sp>
+      <p:sp>
+        <p:nvSpPr>
+          <p:cNvPr id="14" name="Shape 12"/>
+          <p:cNvSpPr/>
+          <p:nvPr/>
+        </p:nvSpPr>
+        <p:spPr>
+          <a:xfrm>
+            <a:off x="1097280" y="4434840"/>
+            <a:ext cx="10424160" cy="502920"/>
+          </a:xfrm>
+          <a:prstGeom prst="roundRect">
+            <a:avLst>
+              <a:gd name="adj" fmla="val 14545"/>
+            </a:avLst>
+          </a:prstGeom>
+          <a:solidFill>
+            <a:srgbClr val="F3F1EE"/>
+          </a:solidFill>
+          <a:ln/>
+        </p:spPr>
+      </p:sp>
+      <p:sp>
+        <p:nvSpPr>
+          <p:cNvPr id="15" name="Text 13"/>
+          <p:cNvSpPr/>
+          <p:nvPr/>
+        </p:nvSpPr>
+        <p:spPr>
+          <a:xfrm>
+            <a:off x="1371600" y="4453128"/>
+            <a:ext cx="9875520" cy="457200"/>
+          </a:xfrm>
+          <a:prstGeom prst="rect">
+            <a:avLst/>
+          </a:prstGeom>
+          <a:noFill/>
+          <a:ln/>
+        </p:spPr>
+        <p:txBody>
+          <a:bodyPr wrap="square" rtlCol="0" anchor="ctr"/>
+          <a:lstStyle/>
+          <a:p>
+            <a:pPr indent="0" marL="0">
+              <a:buNone/>
+            </a:pPr>
+            <a:r>
+              <a:rPr lang="en-US" sz="1300" i="1" dirty="0">
+                <a:solidFill>
+                  <a:srgbClr val="6B6660"/>
+                </a:solidFill>
+                <a:latin typeface="Arial" pitchFamily="34" charset="0"/>
+                <a:ea typeface="Arial" pitchFamily="34" charset="-122"/>
+                <a:cs typeface="Arial" pitchFamily="34" charset="-120"/>
+              </a:rPr>
+              <a:t>→ Same force on a smaller area = higher pressure.</a:t>
+            </a:r>
+            <a:endParaRPr lang="en-US" sz="1300" dirty="0"/>
+          </a:p>
+        </p:txBody>
+      </p:sp>
+      <p:sp>
+        <p:nvSpPr>
+          <p:cNvPr id="16" name="Shape 14"/>
+          <p:cNvSpPr/>
+          <p:nvPr/>
+        </p:nvSpPr>
+        <p:spPr>
+          <a:xfrm>
+            <a:off x="548640" y="5074920"/>
+            <a:ext cx="10972800" cy="502920"/>
+          </a:xfrm>
+          <a:prstGeom prst="roundRect">
+            <a:avLst>
+              <a:gd name="adj" fmla="val 14545"/>
+            </a:avLst>
+          </a:prstGeom>
+          <a:solidFill>
+            <a:srgbClr val="FFFFFF"/>
+          </a:solidFill>
+          <a:ln w="12700">
+            <a:solidFill>
+              <a:srgbClr val="C8372D"/>
+            </a:solidFill>
+            <a:prstDash val="solid"/>
+          </a:ln>
+        </p:spPr>
+      </p:sp>
+      <p:sp>
+        <p:nvSpPr>
+          <p:cNvPr id="17" name="Text 15"/>
+          <p:cNvSpPr/>
+          <p:nvPr/>
+        </p:nvSpPr>
+        <p:spPr>
+          <a:xfrm>
+            <a:off x="822960" y="5093208"/>
+            <a:ext cx="10515600" cy="457200"/>
+          </a:xfrm>
+          <a:prstGeom prst="rect">
+            <a:avLst/>
+          </a:prstGeom>
+          <a:noFill/>
+          <a:ln/>
+        </p:spPr>
+        <p:txBody>
+          <a:bodyPr wrap="square" rtlCol="0" anchor="ctr"/>
+          <a:lstStyle/>
+          <a:p>
+            <a:pPr indent="0" marL="0">
+              <a:buNone/>
+            </a:pPr>
+            <a:r>
+              <a:rPr lang="en-US" sz="1400" b="1" dirty="0">
+                <a:solidFill>
+                  <a:srgbClr val="1B2A4A"/>
+                </a:solidFill>
+                <a:latin typeface="Arial" pitchFamily="34" charset="0"/>
+                <a:ea typeface="Arial" pitchFamily="34" charset="-122"/>
+                <a:cs typeface="Arial" pitchFamily="34" charset="-120"/>
+              </a:rPr>
+              <a:t>Q4: Why do tractors have wide tyres?</a:t>
+            </a:r>
+            <a:endParaRPr lang="en-US" sz="1400" dirty="0"/>
+          </a:p>
+        </p:txBody>
+      </p:sp>
+      <p:sp>
+        <p:nvSpPr>
+          <p:cNvPr id="18" name="Shape 16"/>
+          <p:cNvSpPr/>
+          <p:nvPr/>
+        </p:nvSpPr>
+        <p:spPr>
+          <a:xfrm>
+            <a:off x="1097280" y="5669280"/>
+            <a:ext cx="10424160" cy="502920"/>
+          </a:xfrm>
+          <a:prstGeom prst="roundRect">
+            <a:avLst>
+              <a:gd name="adj" fmla="val 14545"/>
+            </a:avLst>
+          </a:prstGeom>
+          <a:solidFill>
+            <a:srgbClr val="F3F1EE"/>
+          </a:solidFill>
+          <a:ln/>
+        </p:spPr>
+      </p:sp>
+      <p:sp>
+        <p:nvSpPr>
+          <p:cNvPr id="19" name="Text 17"/>
+          <p:cNvSpPr/>
+          <p:nvPr/>
+        </p:nvSpPr>
+        <p:spPr>
+          <a:xfrm>
+            <a:off x="1371600" y="5687568"/>
+            <a:ext cx="9875520" cy="457200"/>
+          </a:xfrm>
+          <a:prstGeom prst="rect">
+            <a:avLst/>
+          </a:prstGeom>
+          <a:noFill/>
+          <a:ln/>
+        </p:spPr>
+        <p:txBody>
+          <a:bodyPr wrap="square" rtlCol="0" anchor="ctr"/>
+          <a:lstStyle/>
+          <a:p>
+            <a:pPr indent="0" marL="0">
+              <a:buNone/>
+            </a:pPr>
+            <a:r>
+              <a:rPr lang="en-US" sz="1300" i="1" dirty="0">
+                <a:solidFill>
+                  <a:srgbClr val="6B6660"/>
+                </a:solidFill>
+                <a:latin typeface="Arial" pitchFamily="34" charset="0"/>
+                <a:ea typeface="Arial" pitchFamily="34" charset="-122"/>
+                <a:cs typeface="Arial" pitchFamily="34" charset="-120"/>
+              </a:rPr>
+              <a:t>→ To spread the weight over a larger area, reducing pressure on soft ground.</a:t>
+            </a:r>
+            <a:endParaRPr lang="en-US" sz="1300" dirty="0"/>
+          </a:p>
+        </p:txBody>
+      </p:sp>
+      <p:sp>
+        <p:nvSpPr>
+          <p:cNvPr id="20" name="Shape 18"/>
+          <p:cNvSpPr/>
+          <p:nvPr/>
+        </p:nvSpPr>
+        <p:spPr>
+          <a:xfrm>
+            <a:off x="0" y="6492240"/>
+            <a:ext cx="12188952" cy="365760"/>
+          </a:xfrm>
+          <a:prstGeom prst="rect">
+            <a:avLst/>
+          </a:prstGeom>
+          <a:solidFill>
+            <a:srgbClr val="1B2A4A"/>
+          </a:solidFill>
+          <a:ln/>
+        </p:spPr>
+      </p:sp>
+      <p:sp>
+        <p:nvSpPr>
+          <p:cNvPr id="21" name="Text 19"/>
+          <p:cNvSpPr/>
+          <p:nvPr/>
+        </p:nvSpPr>
+        <p:spPr>
+          <a:xfrm>
+            <a:off x="10058400" y="6537960"/>
             <a:ext cx="1828800" cy="274320"/>
           </a:xfrm>
           <a:prstGeom prst="rect">
@@ -4988,11 +5749,11 @@
             <a:r>
               <a:rPr lang="en-US" sz="900" dirty="0">
                 <a:solidFill>
-                  <a:srgbClr val="9B9690"/>
-                </a:solidFill>
-                <a:latin typeface="Calibri" pitchFamily="34" charset="0"/>
-                <a:ea typeface="Calibri" pitchFamily="34" charset="-122"/>
-                <a:cs typeface="Calibri" pitchFamily="34" charset="-120"/>
+                  <a:srgbClr val="E9C46A"/>
+                </a:solidFill>
+                <a:latin typeface="Arial" pitchFamily="34" charset="0"/>
+                <a:ea typeface="Arial" pitchFamily="34" charset="-122"/>
+                <a:cs typeface="Arial" pitchFamily="34" charset="-120"/>
               </a:rPr>
               <a:t>mrzocchi.com</a:t>
             </a:r>
@@ -5034,13 +5795,13 @@
         <p:spPr>
           <a:xfrm>
             <a:off x="0" y="0"/>
-            <a:ext cx="9144000" cy="54864"/>
-          </a:xfrm>
-          <a:prstGeom prst="rect">
-            <a:avLst/>
-          </a:prstGeom>
-          <a:solidFill>
-            <a:srgbClr val="C8372D"/>
+            <a:ext cx="12188952" cy="1097280"/>
+          </a:xfrm>
+          <a:prstGeom prst="rect">
+            <a:avLst/>
+          </a:prstGeom>
+          <a:solidFill>
+            <a:srgbClr val="1B2A4A"/>
           </a:solidFill>
           <a:ln/>
         </p:spPr>
@@ -5053,34 +5814,34 @@
         </p:nvSpPr>
         <p:spPr>
           <a:xfrm>
-            <a:off x="457200" y="228600"/>
-            <a:ext cx="8229600" cy="548640"/>
-          </a:xfrm>
-          <a:prstGeom prst="rect">
-            <a:avLst/>
-          </a:prstGeom>
-          <a:noFill/>
-          <a:ln/>
-        </p:spPr>
-        <p:txBody>
-          <a:bodyPr wrap="square" lIns="0" tIns="0" rIns="0" bIns="0" rtlCol="0" anchor="ctr"/>
+            <a:off x="548640" y="182880"/>
+            <a:ext cx="9144000" cy="731520"/>
+          </a:xfrm>
+          <a:prstGeom prst="rect">
+            <a:avLst/>
+          </a:prstGeom>
+          <a:noFill/>
+          <a:ln/>
+        </p:spPr>
+        <p:txBody>
+          <a:bodyPr wrap="square" rtlCol="0" anchor="ctr"/>
           <a:lstStyle/>
           <a:p>
             <a:pPr indent="0" marL="0">
               <a:buNone/>
             </a:pPr>
             <a:r>
-              <a:rPr lang="en-US" sz="2400" b="1" dirty="0">
-                <a:solidFill>
-                  <a:srgbClr val="1B2A4A"/>
+              <a:rPr lang="en-US" sz="2600" b="1" dirty="0">
+                <a:solidFill>
+                  <a:srgbClr val="FFFFFF"/>
                 </a:solidFill>
                 <a:latin typeface="Georgia" pitchFamily="34" charset="0"/>
                 <a:ea typeface="Georgia" pitchFamily="34" charset="-122"/>
                 <a:cs typeface="Georgia" pitchFamily="34" charset="-120"/>
               </a:rPr>
-              <a:t>Key Vocabulary</a:t>
-            </a:r>
-            <a:endParaRPr lang="en-US" sz="2400" dirty="0"/>
+              <a:t>📌 Key Takeaways</a:t>
+            </a:r>
+            <a:endParaRPr lang="en-US" sz="2600" dirty="0"/>
           </a:p>
         </p:txBody>
       </p:sp>
@@ -5092,16 +5853,23 @@
         </p:nvSpPr>
         <p:spPr>
           <a:xfrm>
-            <a:off x="457200" y="868680"/>
-            <a:ext cx="1828800" cy="27432"/>
-          </a:xfrm>
-          <a:prstGeom prst="rect">
-            <a:avLst/>
-          </a:prstGeom>
-          <a:solidFill>
-            <a:srgbClr val="C8372D"/>
-          </a:solidFill>
-          <a:ln/>
+            <a:off x="731520" y="1463040"/>
+            <a:ext cx="10515600" cy="685800"/>
+          </a:xfrm>
+          <a:prstGeom prst="roundRect">
+            <a:avLst>
+              <a:gd name="adj" fmla="val 16000"/>
+            </a:avLst>
+          </a:prstGeom>
+          <a:solidFill>
+            <a:srgbClr val="FFFFFF"/>
+          </a:solidFill>
+          <a:ln w="19050">
+            <a:solidFill>
+              <a:srgbClr val="C8372D"/>
+            </a:solidFill>
+            <a:prstDash val="solid"/>
+          </a:ln>
         </p:spPr>
       </p:sp>
       <p:sp>
@@ -5112,8 +5880,8 @@
         </p:nvSpPr>
         <p:spPr>
           <a:xfrm>
-            <a:off x="457200" y="1188720"/>
-            <a:ext cx="8229600" cy="548640"/>
+            <a:off x="914400" y="1554480"/>
+            <a:ext cx="365760" cy="457200"/>
           </a:xfrm>
           <a:prstGeom prst="rect">
             <a:avLst/>
@@ -5129,17 +5897,17 @@
               <a:buNone/>
             </a:pPr>
             <a:r>
-              <a:rPr lang="en-US" sz="2800" b="1" dirty="0">
+              <a:rPr lang="en-US" sz="1600" b="1" dirty="0">
                 <a:solidFill>
                   <a:srgbClr val="C8372D"/>
                 </a:solidFill>
-                <a:latin typeface="Georgia" pitchFamily="34" charset="0"/>
-                <a:ea typeface="Georgia" pitchFamily="34" charset="-122"/>
-                <a:cs typeface="Georgia" pitchFamily="34" charset="-120"/>
-              </a:rPr>
-              <a:t>Unbalanced Forces</a:t>
-            </a:r>
-            <a:endParaRPr lang="en-US" sz="2800" dirty="0"/>
+                <a:latin typeface="Arial" pitchFamily="34" charset="0"/>
+                <a:ea typeface="Arial" pitchFamily="34" charset="-122"/>
+                <a:cs typeface="Arial" pitchFamily="34" charset="-120"/>
+              </a:rPr>
+              <a:t>✓</a:t>
+            </a:r>
+            <a:endParaRPr lang="en-US" sz="1600" dirty="0"/>
           </a:p>
         </p:txBody>
       </p:sp>
@@ -5151,8 +5919,8 @@
         </p:nvSpPr>
         <p:spPr>
           <a:xfrm>
-            <a:off x="457200" y="1691640"/>
-            <a:ext cx="8229600" cy="365760"/>
+            <a:off x="1371600" y="1554480"/>
+            <a:ext cx="9601200" cy="502920"/>
           </a:xfrm>
           <a:prstGeom prst="rect">
             <a:avLst/>
@@ -5168,15 +5936,81 @@
               <a:buNone/>
             </a:pPr>
             <a:r>
-              <a:rPr lang="en-US" sz="1600" i="1" dirty="0">
-                <a:solidFill>
-                  <a:srgbClr val="9B9690"/>
-                </a:solidFill>
-                <a:latin typeface="Calibri" pitchFamily="34" charset="0"/>
-                <a:ea typeface="Calibri" pitchFamily="34" charset="-122"/>
-                <a:cs typeface="Calibri" pitchFamily="34" charset="-120"/>
-              </a:rPr>
-              <a:t>不平衡力</a:t>
+              <a:rPr lang="en-US" sz="1500" dirty="0">
+                <a:solidFill>
+                  <a:srgbClr val="3D3A36"/>
+                </a:solidFill>
+                <a:latin typeface="Arial" pitchFamily="34" charset="0"/>
+                <a:ea typeface="Arial" pitchFamily="34" charset="-122"/>
+                <a:cs typeface="Arial" pitchFamily="34" charset="-120"/>
+              </a:rPr>
+              <a:t>Pressure = Force ÷ Area, measured in Pascals (Pa)</a:t>
+            </a:r>
+            <a:endParaRPr lang="en-US" sz="1500" dirty="0"/>
+          </a:p>
+        </p:txBody>
+      </p:sp>
+      <p:sp>
+        <p:nvSpPr>
+          <p:cNvPr id="7" name="Shape 5"/>
+          <p:cNvSpPr/>
+          <p:nvPr/>
+        </p:nvSpPr>
+        <p:spPr>
+          <a:xfrm>
+            <a:off x="731520" y="2286000"/>
+            <a:ext cx="10515600" cy="685800"/>
+          </a:xfrm>
+          <a:prstGeom prst="roundRect">
+            <a:avLst>
+              <a:gd name="adj" fmla="val 16000"/>
+            </a:avLst>
+          </a:prstGeom>
+          <a:solidFill>
+            <a:srgbClr val="FFFFFF"/>
+          </a:solidFill>
+          <a:ln w="19050">
+            <a:solidFill>
+              <a:srgbClr val="C8372D"/>
+            </a:solidFill>
+            <a:prstDash val="solid"/>
+          </a:ln>
+        </p:spPr>
+      </p:sp>
+      <p:sp>
+        <p:nvSpPr>
+          <p:cNvPr id="8" name="Text 6"/>
+          <p:cNvSpPr/>
+          <p:nvPr/>
+        </p:nvSpPr>
+        <p:spPr>
+          <a:xfrm>
+            <a:off x="914400" y="2377440"/>
+            <a:ext cx="365760" cy="457200"/>
+          </a:xfrm>
+          <a:prstGeom prst="rect">
+            <a:avLst/>
+          </a:prstGeom>
+          <a:noFill/>
+          <a:ln/>
+        </p:spPr>
+        <p:txBody>
+          <a:bodyPr wrap="square" rtlCol="0" anchor="ctr"/>
+          <a:lstStyle/>
+          <a:p>
+            <a:pPr indent="0" marL="0">
+              <a:buNone/>
+            </a:pPr>
+            <a:r>
+              <a:rPr lang="en-US" sz="1600" b="1" dirty="0">
+                <a:solidFill>
+                  <a:srgbClr val="C8372D"/>
+                </a:solidFill>
+                <a:latin typeface="Arial" pitchFamily="34" charset="0"/>
+                <a:ea typeface="Arial" pitchFamily="34" charset="-122"/>
+                <a:cs typeface="Arial" pitchFamily="34" charset="-120"/>
+              </a:rPr>
+              <a:t>✓</a:t>
             </a:r>
             <a:endParaRPr lang="en-US" sz="1600" dirty="0"/>
           </a:p>
@@ -5184,14 +6018,14 @@
       </p:sp>
       <p:sp>
         <p:nvSpPr>
-          <p:cNvPr id="7" name="Text 5"/>
-          <p:cNvSpPr/>
-          <p:nvPr/>
-        </p:nvSpPr>
-        <p:spPr>
-          <a:xfrm>
-            <a:off x="457200" y="2194560"/>
-            <a:ext cx="8229600" cy="1828800"/>
+          <p:cNvPr id="9" name="Text 7"/>
+          <p:cNvSpPr/>
+          <p:nvPr/>
+        </p:nvSpPr>
+        <p:spPr>
+          <a:xfrm>
+            <a:off x="1371600" y="2377440"/>
+            <a:ext cx="9601200" cy="502920"/>
           </a:xfrm>
           <a:prstGeom prst="rect">
             <a:avLst/>
@@ -5204,35 +6038,367 @@
           <a:lstStyle/>
           <a:p>
             <a:pPr indent="0" marL="0">
-              <a:lnSpc>
-                <a:spcPct val="150000"/>
-              </a:lnSpc>
-              <a:buNone/>
-            </a:pPr>
-            <a:r>
-              <a:rPr lang="en-US" sz="1800" dirty="0">
-                <a:solidFill>
-                  <a:srgbClr val="6B6660"/>
-                </a:solidFill>
-                <a:latin typeface="Calibri" pitchFamily="34" charset="0"/>
-                <a:ea typeface="Calibri" pitchFamily="34" charset="-122"/>
-                <a:cs typeface="Calibri" pitchFamily="34" charset="-120"/>
-              </a:rPr>
-              <a:t>Forces not equal. There is a resultant force causing acceleration or deceleration.</a:t>
-            </a:r>
-            <a:endParaRPr lang="en-US" sz="1800" dirty="0"/>
-          </a:p>
-        </p:txBody>
-      </p:sp>
-      <p:sp>
-        <p:nvSpPr>
-          <p:cNvPr id="8" name="Text 6"/>
-          <p:cNvSpPr/>
-          <p:nvPr/>
-        </p:nvSpPr>
-        <p:spPr>
-          <a:xfrm>
-            <a:off x="7315200" y="4754880"/>
+              <a:buNone/>
+            </a:pPr>
+            <a:r>
+              <a:rPr lang="en-US" sz="1500" dirty="0">
+                <a:solidFill>
+                  <a:srgbClr val="3D3A36"/>
+                </a:solidFill>
+                <a:latin typeface="Arial" pitchFamily="34" charset="0"/>
+                <a:ea typeface="Arial" pitchFamily="34" charset="-122"/>
+                <a:cs typeface="Arial" pitchFamily="34" charset="-120"/>
+              </a:rPr>
+              <a:t>Smaller area = more pressure (knives, nails, stilettos)</a:t>
+            </a:r>
+            <a:endParaRPr lang="en-US" sz="1500" dirty="0"/>
+          </a:p>
+        </p:txBody>
+      </p:sp>
+      <p:sp>
+        <p:nvSpPr>
+          <p:cNvPr id="10" name="Shape 8"/>
+          <p:cNvSpPr/>
+          <p:nvPr/>
+        </p:nvSpPr>
+        <p:spPr>
+          <a:xfrm>
+            <a:off x="731520" y="3108960"/>
+            <a:ext cx="10515600" cy="685800"/>
+          </a:xfrm>
+          <a:prstGeom prst="roundRect">
+            <a:avLst>
+              <a:gd name="adj" fmla="val 16000"/>
+            </a:avLst>
+          </a:prstGeom>
+          <a:solidFill>
+            <a:srgbClr val="FFFFFF"/>
+          </a:solidFill>
+          <a:ln w="19050">
+            <a:solidFill>
+              <a:srgbClr val="C8372D"/>
+            </a:solidFill>
+            <a:prstDash val="solid"/>
+          </a:ln>
+        </p:spPr>
+      </p:sp>
+      <p:sp>
+        <p:nvSpPr>
+          <p:cNvPr id="11" name="Text 9"/>
+          <p:cNvSpPr/>
+          <p:nvPr/>
+        </p:nvSpPr>
+        <p:spPr>
+          <a:xfrm>
+            <a:off x="914400" y="3200400"/>
+            <a:ext cx="365760" cy="457200"/>
+          </a:xfrm>
+          <a:prstGeom prst="rect">
+            <a:avLst/>
+          </a:prstGeom>
+          <a:noFill/>
+          <a:ln/>
+        </p:spPr>
+        <p:txBody>
+          <a:bodyPr wrap="square" rtlCol="0" anchor="ctr"/>
+          <a:lstStyle/>
+          <a:p>
+            <a:pPr indent="0" marL="0">
+              <a:buNone/>
+            </a:pPr>
+            <a:r>
+              <a:rPr lang="en-US" sz="1600" b="1" dirty="0">
+                <a:solidFill>
+                  <a:srgbClr val="C8372D"/>
+                </a:solidFill>
+                <a:latin typeface="Arial" pitchFamily="34" charset="0"/>
+                <a:ea typeface="Arial" pitchFamily="34" charset="-122"/>
+                <a:cs typeface="Arial" pitchFamily="34" charset="-120"/>
+              </a:rPr>
+              <a:t>✓</a:t>
+            </a:r>
+            <a:endParaRPr lang="en-US" sz="1600" dirty="0"/>
+          </a:p>
+        </p:txBody>
+      </p:sp>
+      <p:sp>
+        <p:nvSpPr>
+          <p:cNvPr id="12" name="Text 10"/>
+          <p:cNvSpPr/>
+          <p:nvPr/>
+        </p:nvSpPr>
+        <p:spPr>
+          <a:xfrm>
+            <a:off x="1371600" y="3200400"/>
+            <a:ext cx="9601200" cy="502920"/>
+          </a:xfrm>
+          <a:prstGeom prst="rect">
+            <a:avLst/>
+          </a:prstGeom>
+          <a:noFill/>
+          <a:ln/>
+        </p:spPr>
+        <p:txBody>
+          <a:bodyPr wrap="square" rtlCol="0" anchor="ctr"/>
+          <a:lstStyle/>
+          <a:p>
+            <a:pPr indent="0" marL="0">
+              <a:buNone/>
+            </a:pPr>
+            <a:r>
+              <a:rPr lang="en-US" sz="1500" dirty="0">
+                <a:solidFill>
+                  <a:srgbClr val="3D3A36"/>
+                </a:solidFill>
+                <a:latin typeface="Arial" pitchFamily="34" charset="0"/>
+                <a:ea typeface="Arial" pitchFamily="34" charset="-122"/>
+                <a:cs typeface="Arial" pitchFamily="34" charset="-120"/>
+              </a:rPr>
+              <a:t>Larger area = less pressure (snowshoes, wide tyres, tracks)</a:t>
+            </a:r>
+            <a:endParaRPr lang="en-US" sz="1500" dirty="0"/>
+          </a:p>
+        </p:txBody>
+      </p:sp>
+      <p:sp>
+        <p:nvSpPr>
+          <p:cNvPr id="13" name="Shape 11"/>
+          <p:cNvSpPr/>
+          <p:nvPr/>
+        </p:nvSpPr>
+        <p:spPr>
+          <a:xfrm>
+            <a:off x="731520" y="3931920"/>
+            <a:ext cx="10515600" cy="685800"/>
+          </a:xfrm>
+          <a:prstGeom prst="roundRect">
+            <a:avLst>
+              <a:gd name="adj" fmla="val 16000"/>
+            </a:avLst>
+          </a:prstGeom>
+          <a:solidFill>
+            <a:srgbClr val="FFFFFF"/>
+          </a:solidFill>
+          <a:ln w="19050">
+            <a:solidFill>
+              <a:srgbClr val="C8372D"/>
+            </a:solidFill>
+            <a:prstDash val="solid"/>
+          </a:ln>
+        </p:spPr>
+      </p:sp>
+      <p:sp>
+        <p:nvSpPr>
+          <p:cNvPr id="14" name="Text 12"/>
+          <p:cNvSpPr/>
+          <p:nvPr/>
+        </p:nvSpPr>
+        <p:spPr>
+          <a:xfrm>
+            <a:off x="914400" y="4023360"/>
+            <a:ext cx="365760" cy="457200"/>
+          </a:xfrm>
+          <a:prstGeom prst="rect">
+            <a:avLst/>
+          </a:prstGeom>
+          <a:noFill/>
+          <a:ln/>
+        </p:spPr>
+        <p:txBody>
+          <a:bodyPr wrap="square" rtlCol="0" anchor="ctr"/>
+          <a:lstStyle/>
+          <a:p>
+            <a:pPr indent="0" marL="0">
+              <a:buNone/>
+            </a:pPr>
+            <a:r>
+              <a:rPr lang="en-US" sz="1600" b="1" dirty="0">
+                <a:solidFill>
+                  <a:srgbClr val="C8372D"/>
+                </a:solidFill>
+                <a:latin typeface="Arial" pitchFamily="34" charset="0"/>
+                <a:ea typeface="Arial" pitchFamily="34" charset="-122"/>
+                <a:cs typeface="Arial" pitchFamily="34" charset="-120"/>
+              </a:rPr>
+              <a:t>✓</a:t>
+            </a:r>
+            <a:endParaRPr lang="en-US" sz="1600" dirty="0"/>
+          </a:p>
+        </p:txBody>
+      </p:sp>
+      <p:sp>
+        <p:nvSpPr>
+          <p:cNvPr id="15" name="Text 13"/>
+          <p:cNvSpPr/>
+          <p:nvPr/>
+        </p:nvSpPr>
+        <p:spPr>
+          <a:xfrm>
+            <a:off x="1371600" y="4023360"/>
+            <a:ext cx="9601200" cy="502920"/>
+          </a:xfrm>
+          <a:prstGeom prst="rect">
+            <a:avLst/>
+          </a:prstGeom>
+          <a:noFill/>
+          <a:ln/>
+        </p:spPr>
+        <p:txBody>
+          <a:bodyPr wrap="square" rtlCol="0" anchor="ctr"/>
+          <a:lstStyle/>
+          <a:p>
+            <a:pPr indent="0" marL="0">
+              <a:buNone/>
+            </a:pPr>
+            <a:r>
+              <a:rPr lang="en-US" sz="1500" dirty="0">
+                <a:solidFill>
+                  <a:srgbClr val="3D3A36"/>
+                </a:solidFill>
+                <a:latin typeface="Arial" pitchFamily="34" charset="0"/>
+                <a:ea typeface="Arial" pitchFamily="34" charset="-122"/>
+                <a:cs typeface="Arial" pitchFamily="34" charset="-120"/>
+              </a:rPr>
+              <a:t>1 Pascal = 1 Newton per square metre</a:t>
+            </a:r>
+            <a:endParaRPr lang="en-US" sz="1500" dirty="0"/>
+          </a:p>
+        </p:txBody>
+      </p:sp>
+      <p:sp>
+        <p:nvSpPr>
+          <p:cNvPr id="16" name="Shape 14"/>
+          <p:cNvSpPr/>
+          <p:nvPr/>
+        </p:nvSpPr>
+        <p:spPr>
+          <a:xfrm>
+            <a:off x="731520" y="4754880"/>
+            <a:ext cx="10515600" cy="685800"/>
+          </a:xfrm>
+          <a:prstGeom prst="roundRect">
+            <a:avLst>
+              <a:gd name="adj" fmla="val 16000"/>
+            </a:avLst>
+          </a:prstGeom>
+          <a:solidFill>
+            <a:srgbClr val="FFFFFF"/>
+          </a:solidFill>
+          <a:ln w="19050">
+            <a:solidFill>
+              <a:srgbClr val="C8372D"/>
+            </a:solidFill>
+            <a:prstDash val="solid"/>
+          </a:ln>
+        </p:spPr>
+      </p:sp>
+      <p:sp>
+        <p:nvSpPr>
+          <p:cNvPr id="17" name="Text 15"/>
+          <p:cNvSpPr/>
+          <p:nvPr/>
+        </p:nvSpPr>
+        <p:spPr>
+          <a:xfrm>
+            <a:off x="914400" y="4846320"/>
+            <a:ext cx="365760" cy="457200"/>
+          </a:xfrm>
+          <a:prstGeom prst="rect">
+            <a:avLst/>
+          </a:prstGeom>
+          <a:noFill/>
+          <a:ln/>
+        </p:spPr>
+        <p:txBody>
+          <a:bodyPr wrap="square" rtlCol="0" anchor="ctr"/>
+          <a:lstStyle/>
+          <a:p>
+            <a:pPr indent="0" marL="0">
+              <a:buNone/>
+            </a:pPr>
+            <a:r>
+              <a:rPr lang="en-US" sz="1600" b="1" dirty="0">
+                <a:solidFill>
+                  <a:srgbClr val="C8372D"/>
+                </a:solidFill>
+                <a:latin typeface="Arial" pitchFamily="34" charset="0"/>
+                <a:ea typeface="Arial" pitchFamily="34" charset="-122"/>
+                <a:cs typeface="Arial" pitchFamily="34" charset="-120"/>
+              </a:rPr>
+              <a:t>✓</a:t>
+            </a:r>
+            <a:endParaRPr lang="en-US" sz="1600" dirty="0"/>
+          </a:p>
+        </p:txBody>
+      </p:sp>
+      <p:sp>
+        <p:nvSpPr>
+          <p:cNvPr id="18" name="Text 16"/>
+          <p:cNvSpPr/>
+          <p:nvPr/>
+        </p:nvSpPr>
+        <p:spPr>
+          <a:xfrm>
+            <a:off x="1371600" y="4846320"/>
+            <a:ext cx="9601200" cy="502920"/>
+          </a:xfrm>
+          <a:prstGeom prst="rect">
+            <a:avLst/>
+          </a:prstGeom>
+          <a:noFill/>
+          <a:ln/>
+        </p:spPr>
+        <p:txBody>
+          <a:bodyPr wrap="square" rtlCol="0" anchor="ctr"/>
+          <a:lstStyle/>
+          <a:p>
+            <a:pPr indent="0" marL="0">
+              <a:buNone/>
+            </a:pPr>
+            <a:r>
+              <a:rPr lang="en-US" sz="1500" dirty="0">
+                <a:solidFill>
+                  <a:srgbClr val="3D3A36"/>
+                </a:solidFill>
+                <a:latin typeface="Arial" pitchFamily="34" charset="0"/>
+                <a:ea typeface="Arial" pitchFamily="34" charset="-122"/>
+                <a:cs typeface="Arial" pitchFamily="34" charset="-120"/>
+              </a:rPr>
+              <a:t>Pressure explains cutting, sinking, and many everyday phenomena</a:t>
+            </a:r>
+            <a:endParaRPr lang="en-US" sz="1500" dirty="0"/>
+          </a:p>
+        </p:txBody>
+      </p:sp>
+      <p:sp>
+        <p:nvSpPr>
+          <p:cNvPr id="19" name="Shape 17"/>
+          <p:cNvSpPr/>
+          <p:nvPr/>
+        </p:nvSpPr>
+        <p:spPr>
+          <a:xfrm>
+            <a:off x="0" y="6492240"/>
+            <a:ext cx="12188952" cy="365760"/>
+          </a:xfrm>
+          <a:prstGeom prst="rect">
+            <a:avLst/>
+          </a:prstGeom>
+          <a:solidFill>
+            <a:srgbClr val="1B2A4A"/>
+          </a:solidFill>
+          <a:ln/>
+        </p:spPr>
+      </p:sp>
+      <p:sp>
+        <p:nvSpPr>
+          <p:cNvPr id="20" name="Text 18"/>
+          <p:cNvSpPr/>
+          <p:nvPr/>
+        </p:nvSpPr>
+        <p:spPr>
+          <a:xfrm>
+            <a:off x="10058400" y="6537960"/>
             <a:ext cx="1828800" cy="274320"/>
           </a:xfrm>
           <a:prstGeom prst="rect">
@@ -5251,11 +6417,11 @@
             <a:r>
               <a:rPr lang="en-US" sz="900" dirty="0">
                 <a:solidFill>
-                  <a:srgbClr val="9B9690"/>
-                </a:solidFill>
-                <a:latin typeface="Calibri" pitchFamily="34" charset="0"/>
-                <a:ea typeface="Calibri" pitchFamily="34" charset="-122"/>
-                <a:cs typeface="Calibri" pitchFamily="34" charset="-120"/>
+                  <a:srgbClr val="E9C46A"/>
+                </a:solidFill>
+                <a:latin typeface="Arial" pitchFamily="34" charset="0"/>
+                <a:ea typeface="Arial" pitchFamily="34" charset="-122"/>
+                <a:cs typeface="Arial" pitchFamily="34" charset="-120"/>
               </a:rPr>
               <a:t>mrzocchi.com</a:t>
             </a:r>
@@ -5297,7 +6463,27 @@
         <p:spPr>
           <a:xfrm>
             <a:off x="0" y="0"/>
-            <a:ext cx="9144000" cy="54864"/>
+            <a:ext cx="12188952" cy="6858000"/>
+          </a:xfrm>
+          <a:prstGeom prst="rect">
+            <a:avLst/>
+          </a:prstGeom>
+          <a:solidFill>
+            <a:srgbClr val="1B2A4A"/>
+          </a:solidFill>
+          <a:ln/>
+        </p:spPr>
+      </p:sp>
+      <p:sp>
+        <p:nvSpPr>
+          <p:cNvPr id="3" name="Shape 1"/>
+          <p:cNvSpPr/>
+          <p:nvPr/>
+        </p:nvSpPr>
+        <p:spPr>
+          <a:xfrm>
+            <a:off x="0" y="6400800"/>
+            <a:ext cx="12188952" cy="73152"/>
           </a:xfrm>
           <a:prstGeom prst="rect">
             <a:avLst/>
@@ -5310,89 +6496,81 @@
       </p:sp>
       <p:sp>
         <p:nvSpPr>
-          <p:cNvPr id="3" name="Text 1"/>
-          <p:cNvSpPr/>
-          <p:nvPr/>
-        </p:nvSpPr>
-        <p:spPr>
-          <a:xfrm>
-            <a:off x="457200" y="228600"/>
-            <a:ext cx="8229600" cy="548640"/>
-          </a:xfrm>
-          <a:prstGeom prst="rect">
-            <a:avLst/>
-          </a:prstGeom>
-          <a:noFill/>
-          <a:ln/>
-        </p:spPr>
-        <p:txBody>
-          <a:bodyPr wrap="square" lIns="0" tIns="0" rIns="0" bIns="0" rtlCol="0" anchor="ctr"/>
-          <a:lstStyle/>
-          <a:p>
-            <a:pPr indent="0" marL="0">
-              <a:buNone/>
-            </a:pPr>
-            <a:r>
-              <a:rPr lang="en-US" sz="2400" b="1" dirty="0">
-                <a:solidFill>
-                  <a:srgbClr val="1B2A4A"/>
+          <p:cNvPr id="4" name="Text 2"/>
+          <p:cNvSpPr/>
+          <p:nvPr/>
+        </p:nvSpPr>
+        <p:spPr>
+          <a:xfrm>
+            <a:off x="0" y="1828800"/>
+            <a:ext cx="12188952" cy="1097280"/>
+          </a:xfrm>
+          <a:prstGeom prst="rect">
+            <a:avLst/>
+          </a:prstGeom>
+          <a:noFill/>
+          <a:ln/>
+        </p:spPr>
+        <p:txBody>
+          <a:bodyPr wrap="square" rtlCol="0" anchor="ctr"/>
+          <a:lstStyle/>
+          <a:p>
+            <a:pPr algn="ctr" indent="0" marL="0">
+              <a:buNone/>
+            </a:pPr>
+            <a:r>
+              <a:rPr lang="en-US" sz="3600" b="1" dirty="0">
+                <a:solidFill>
+                  <a:srgbClr val="FFFFFF"/>
                 </a:solidFill>
                 <a:latin typeface="Georgia" pitchFamily="34" charset="0"/>
                 <a:ea typeface="Georgia" pitchFamily="34" charset="-122"/>
                 <a:cs typeface="Georgia" pitchFamily="34" charset="-120"/>
               </a:rPr>
-              <a:t>Check Your Understanding</a:t>
-            </a:r>
-            <a:endParaRPr lang="en-US" sz="2400" dirty="0"/>
-          </a:p>
-        </p:txBody>
-      </p:sp>
-      <p:sp>
-        <p:nvSpPr>
-          <p:cNvPr id="4" name="Shape 2"/>
-          <p:cNvSpPr/>
-          <p:nvPr/>
-        </p:nvSpPr>
-        <p:spPr>
-          <a:xfrm>
-            <a:off x="457200" y="868680"/>
-            <a:ext cx="1828800" cy="27432"/>
-          </a:xfrm>
-          <a:prstGeom prst="rect">
-            <a:avLst/>
-          </a:prstGeom>
-          <a:solidFill>
-            <a:srgbClr val="C8372D"/>
-          </a:solidFill>
-          <a:ln/>
-        </p:spPr>
-      </p:sp>
-      <p:sp>
-        <p:nvSpPr>
-          <p:cNvPr id="5" name="Shape 3"/>
-          <p:cNvSpPr/>
-          <p:nvPr/>
-        </p:nvSpPr>
-        <p:spPr>
-          <a:xfrm>
-            <a:off x="457200" y="1188720"/>
-            <a:ext cx="8229600" cy="1371600"/>
-          </a:xfrm>
-          <a:prstGeom prst="roundRect">
-            <a:avLst>
-              <a:gd name="adj" fmla="val 10000"/>
-            </a:avLst>
-          </a:prstGeom>
-          <a:solidFill>
-            <a:srgbClr val="FAF8F5"/>
-          </a:solidFill>
-          <a:ln w="12700">
-            <a:solidFill>
-              <a:srgbClr val="E5E2DC"/>
-            </a:solidFill>
-            <a:prstDash val="solid"/>
-          </a:ln>
-        </p:spPr>
+              <a:t>Keep Practising!</a:t>
+            </a:r>
+            <a:endParaRPr lang="en-US" sz="3600" dirty="0"/>
+          </a:p>
+        </p:txBody>
+      </p:sp>
+      <p:sp>
+        <p:nvSpPr>
+          <p:cNvPr id="5" name="Text 3"/>
+          <p:cNvSpPr/>
+          <p:nvPr/>
+        </p:nvSpPr>
+        <p:spPr>
+          <a:xfrm>
+            <a:off x="0" y="3017520"/>
+            <a:ext cx="12188952" cy="548640"/>
+          </a:xfrm>
+          <a:prstGeom prst="rect">
+            <a:avLst/>
+          </a:prstGeom>
+          <a:noFill/>
+          <a:ln/>
+        </p:spPr>
+        <p:txBody>
+          <a:bodyPr wrap="square" rtlCol="0" anchor="ctr"/>
+          <a:lstStyle/>
+          <a:p>
+            <a:pPr algn="ctr" indent="0" marL="0">
+              <a:buNone/>
+            </a:pPr>
+            <a:r>
+              <a:rPr lang="en-US" sz="1600" dirty="0">
+                <a:solidFill>
+                  <a:srgbClr val="E9C46A"/>
+                </a:solidFill>
+                <a:latin typeface="Arial" pitchFamily="34" charset="0"/>
+                <a:ea typeface="Arial" pitchFamily="34" charset="-122"/>
+                <a:cs typeface="Arial" pitchFamily="34" charset="-120"/>
+              </a:rPr>
+              <a:t>Use the Self-Quiz and Review Games on mrzocchi.com</a:t>
+            </a:r>
+            <a:endParaRPr lang="en-US" sz="1600" dirty="0"/>
+          </a:p>
+        </p:txBody>
       </p:sp>
       <p:sp>
         <p:nvSpPr>
@@ -5402,157 +6580,34 @@
         </p:nvSpPr>
         <p:spPr>
           <a:xfrm>
-            <a:off x="731520" y="1188720"/>
-            <a:ext cx="7680960" cy="1371600"/>
-          </a:xfrm>
-          <a:prstGeom prst="rect">
-            <a:avLst/>
-          </a:prstGeom>
-          <a:noFill/>
-          <a:ln/>
-        </p:spPr>
-        <p:txBody>
-          <a:bodyPr wrap="square" rtlCol="0" anchor="ctr"/>
-          <a:lstStyle/>
-          <a:p>
-            <a:pPr indent="0" marL="0">
-              <a:buNone/>
-            </a:pPr>
-            <a:r>
-              <a:rPr lang="en-US" sz="1800" b="1" dirty="0">
-                <a:solidFill>
-                  <a:srgbClr val="1B2A4A"/>
-                </a:solidFill>
-                <a:latin typeface="Georgia" pitchFamily="34" charset="0"/>
-                <a:ea typeface="Georgia" pitchFamily="34" charset="-122"/>
-                <a:cs typeface="Georgia" pitchFamily="34" charset="-120"/>
-              </a:rPr>
-              <a:t>❓  What is a force?</a:t>
-            </a:r>
-            <a:endParaRPr lang="en-US" sz="1800" dirty="0"/>
-          </a:p>
-        </p:txBody>
-      </p:sp>
-      <p:sp>
-        <p:nvSpPr>
-          <p:cNvPr id="7" name="Shape 5"/>
-          <p:cNvSpPr/>
-          <p:nvPr/>
-        </p:nvSpPr>
-        <p:spPr>
-          <a:xfrm>
-            <a:off x="457200" y="2926080"/>
-            <a:ext cx="8229600" cy="1463040"/>
-          </a:xfrm>
-          <a:prstGeom prst="roundRect">
-            <a:avLst>
-              <a:gd name="adj" fmla="val 9375"/>
-            </a:avLst>
-          </a:prstGeom>
-          <a:solidFill>
-            <a:srgbClr val="E8F5F3"/>
-          </a:solidFill>
-          <a:ln/>
-        </p:spPr>
-      </p:sp>
-      <p:sp>
-        <p:nvSpPr>
-          <p:cNvPr id="8" name="Shape 6"/>
-          <p:cNvSpPr/>
-          <p:nvPr/>
-        </p:nvSpPr>
-        <p:spPr>
-          <a:xfrm>
-            <a:off x="457200" y="2926080"/>
-            <a:ext cx="54864" cy="1463040"/>
-          </a:xfrm>
-          <a:prstGeom prst="rect">
-            <a:avLst/>
-          </a:prstGeom>
-          <a:solidFill>
-            <a:srgbClr val="C8372D"/>
-          </a:solidFill>
-          <a:ln/>
-        </p:spPr>
-      </p:sp>
-      <p:sp>
-        <p:nvSpPr>
-          <p:cNvPr id="9" name="Text 7"/>
-          <p:cNvSpPr/>
-          <p:nvPr/>
-        </p:nvSpPr>
-        <p:spPr>
-          <a:xfrm>
-            <a:off x="731520" y="2926080"/>
-            <a:ext cx="7680960" cy="1463040"/>
-          </a:xfrm>
-          <a:prstGeom prst="rect">
-            <a:avLst/>
-          </a:prstGeom>
-          <a:noFill/>
-          <a:ln/>
-        </p:spPr>
-        <p:txBody>
-          <a:bodyPr wrap="square" rtlCol="0" anchor="ctr"/>
-          <a:lstStyle/>
-          <a:p>
-            <a:pPr indent="0" marL="0">
-              <a:lnSpc>
-                <a:spcPct val="140000"/>
-              </a:lnSpc>
-              <a:buNone/>
-            </a:pPr>
-            <a:r>
-              <a:rPr lang="en-US" sz="1600" dirty="0">
-                <a:solidFill>
-                  <a:srgbClr val="3D3A36"/>
-                </a:solidFill>
-                <a:latin typeface="Calibri" pitchFamily="34" charset="0"/>
-                <a:ea typeface="Calibri" pitchFamily="34" charset="-122"/>
-                <a:cs typeface="Calibri" pitchFamily="34" charset="-120"/>
-              </a:rPr>
-              <a:t>A push or pull that can change an object's speed, direction, or shape. Measured in Newtons (N).</a:t>
-            </a:r>
-            <a:endParaRPr lang="en-US" sz="1600" dirty="0"/>
-          </a:p>
-        </p:txBody>
-      </p:sp>
-      <p:sp>
-        <p:nvSpPr>
-          <p:cNvPr id="10" name="Text 8"/>
-          <p:cNvSpPr/>
-          <p:nvPr/>
-        </p:nvSpPr>
-        <p:spPr>
-          <a:xfrm>
-            <a:off x="7315200" y="4754880"/>
-            <a:ext cx="1828800" cy="274320"/>
-          </a:xfrm>
-          <a:prstGeom prst="rect">
-            <a:avLst/>
-          </a:prstGeom>
-          <a:noFill/>
-          <a:ln/>
-        </p:spPr>
-        <p:txBody>
-          <a:bodyPr wrap="square" rtlCol="0" anchor="ctr"/>
-          <a:lstStyle/>
-          <a:p>
-            <a:pPr algn="r" indent="0" marL="0">
-              <a:buNone/>
-            </a:pPr>
-            <a:r>
-              <a:rPr lang="en-US" sz="900" dirty="0">
+            <a:off x="0" y="5029200"/>
+            <a:ext cx="12188952" cy="457200"/>
+          </a:xfrm>
+          <a:prstGeom prst="rect">
+            <a:avLst/>
+          </a:prstGeom>
+          <a:noFill/>
+          <a:ln/>
+        </p:spPr>
+        <p:txBody>
+          <a:bodyPr wrap="square" rtlCol="0" anchor="ctr"/>
+          <a:lstStyle/>
+          <a:p>
+            <a:pPr algn="ctr" indent="0" marL="0">
+              <a:buNone/>
+            </a:pPr>
+            <a:r>
+              <a:rPr lang="en-US" sz="1400" dirty="0">
                 <a:solidFill>
                   <a:srgbClr val="9B9690"/>
                 </a:solidFill>
-                <a:latin typeface="Calibri" pitchFamily="34" charset="0"/>
-                <a:ea typeface="Calibri" pitchFamily="34" charset="-122"/>
-                <a:cs typeface="Calibri" pitchFamily="34" charset="-120"/>
+                <a:latin typeface="Arial" pitchFamily="34" charset="0"/>
+                <a:ea typeface="Arial" pitchFamily="34" charset="-122"/>
+                <a:cs typeface="Arial" pitchFamily="34" charset="-120"/>
               </a:rPr>
               <a:t>mrzocchi.com</a:t>
             </a:r>
-            <a:endParaRPr lang="en-US" sz="900" dirty="0"/>
+            <a:endParaRPr lang="en-US" sz="1400" dirty="0"/>
           </a:p>
         </p:txBody>
       </p:sp>
